--- a/src/assets/files/bbs/siengp_bbs_format.pptx
+++ b/src/assets/files/bbs/siengp_bbs_format.pptx
@@ -2,69 +2,1071 @@
 <file path=ppt/presentation.xml><?xml version="1.0" encoding="utf-8"?>
 <p:presentation xmlns:a="http://schemas.openxmlformats.org/drawingml/2006/main" xmlns:r="http://schemas.openxmlformats.org/officeDocument/2006/relationships" xmlns:p="http://schemas.openxmlformats.org/presentationml/2006/main" saveSubsetFonts="1">
   <p:sldMasterIdLst>
-    <p:sldMasterId id="2147483672" r:id="rId1"/>
+    <p:sldMasterId id="2147483688" r:id="rId2"/>
   </p:sldMasterIdLst>
+  <p:notesMasterIdLst>
+    <p:notesMasterId r:id="rId4"/>
+  </p:notesMasterIdLst>
+  <p:handoutMasterIdLst>
+    <p:handoutMasterId r:id="rId5"/>
+  </p:handoutMasterIdLst>
   <p:sldIdLst>
-    <p:sldId id="256" r:id="rId2"/>
+    <p:sldId id="256" r:id="rId3"/>
   </p:sldIdLst>
-  <p:sldSz cx="11685588" cy="8664575"/>
+  <p:sldSz cx="8231188" cy="6173788"/>
   <p:notesSz cx="6858000" cy="9144000"/>
   <p:defaultTextStyle>
     <a:defPPr>
       <a:defRPr lang="en-US"/>
     </a:defPPr>
-    <a:lvl1pPr marL="0" algn="l" defTabSz="457200" rtl="0" eaLnBrk="1" latinLnBrk="0" hangingPunct="1">
-      <a:defRPr sz="1800" kern="1200">
+    <a:lvl1pPr algn="l" rtl="0" eaLnBrk="0" fontAlgn="base" hangingPunct="0">
+      <a:spcBef>
+        <a:spcPct val="0"/>
+      </a:spcBef>
+      <a:spcAft>
+        <a:spcPct val="0"/>
+      </a:spcAft>
+      <a:defRPr kern="1200">
         <a:solidFill>
           <a:schemeClr val="tx1"/>
         </a:solidFill>
-        <a:latin typeface="+mn-lt"/>
-        <a:ea typeface="+mn-ea"/>
-        <a:cs typeface="+mn-cs"/>
+        <a:latin typeface="Arial" charset="0"/>
+        <a:ea typeface="ＭＳ Ｐゴシック" charset="-128"/>
+        <a:cs typeface="Times New Roman" pitchFamily="18" charset="0"/>
       </a:defRPr>
     </a:lvl1pPr>
-    <a:lvl2pPr marL="457200" algn="l" defTabSz="457200" rtl="0" eaLnBrk="1" latinLnBrk="0" hangingPunct="1">
-      <a:defRPr sz="1800" kern="1200">
+    <a:lvl2pPr marL="411456" algn="l" rtl="0" eaLnBrk="0" fontAlgn="base" hangingPunct="0">
+      <a:spcBef>
+        <a:spcPct val="0"/>
+      </a:spcBef>
+      <a:spcAft>
+        <a:spcPct val="0"/>
+      </a:spcAft>
+      <a:defRPr kern="1200">
         <a:solidFill>
           <a:schemeClr val="tx1"/>
         </a:solidFill>
-        <a:latin typeface="+mn-lt"/>
-        <a:ea typeface="+mn-ea"/>
-        <a:cs typeface="+mn-cs"/>
+        <a:latin typeface="Arial" charset="0"/>
+        <a:ea typeface="ＭＳ Ｐゴシック" charset="-128"/>
+        <a:cs typeface="Times New Roman" pitchFamily="18" charset="0"/>
       </a:defRPr>
     </a:lvl2pPr>
-    <a:lvl3pPr marL="914400" algn="l" defTabSz="457200" rtl="0" eaLnBrk="1" latinLnBrk="0" hangingPunct="1">
-      <a:defRPr sz="1800" kern="1200">
+    <a:lvl3pPr marL="822912" algn="l" rtl="0" eaLnBrk="0" fontAlgn="base" hangingPunct="0">
+      <a:spcBef>
+        <a:spcPct val="0"/>
+      </a:spcBef>
+      <a:spcAft>
+        <a:spcPct val="0"/>
+      </a:spcAft>
+      <a:defRPr kern="1200">
         <a:solidFill>
           <a:schemeClr val="tx1"/>
         </a:solidFill>
-        <a:latin typeface="+mn-lt"/>
-        <a:ea typeface="+mn-ea"/>
-        <a:cs typeface="+mn-cs"/>
+        <a:latin typeface="Arial" charset="0"/>
+        <a:ea typeface="ＭＳ Ｐゴシック" charset="-128"/>
+        <a:cs typeface="Times New Roman" pitchFamily="18" charset="0"/>
       </a:defRPr>
     </a:lvl3pPr>
-    <a:lvl4pPr marL="1371600" algn="l" defTabSz="457200" rtl="0" eaLnBrk="1" latinLnBrk="0" hangingPunct="1">
-      <a:defRPr sz="1800" kern="1200">
+    <a:lvl4pPr marL="1234368" algn="l" rtl="0" eaLnBrk="0" fontAlgn="base" hangingPunct="0">
+      <a:spcBef>
+        <a:spcPct val="0"/>
+      </a:spcBef>
+      <a:spcAft>
+        <a:spcPct val="0"/>
+      </a:spcAft>
+      <a:defRPr kern="1200">
         <a:solidFill>
           <a:schemeClr val="tx1"/>
         </a:solidFill>
-        <a:latin typeface="+mn-lt"/>
-        <a:ea typeface="+mn-ea"/>
-        <a:cs typeface="+mn-cs"/>
+        <a:latin typeface="Arial" charset="0"/>
+        <a:ea typeface="ＭＳ Ｐゴシック" charset="-128"/>
+        <a:cs typeface="Times New Roman" pitchFamily="18" charset="0"/>
       </a:defRPr>
     </a:lvl4pPr>
-    <a:lvl5pPr marL="1828800" algn="l" defTabSz="457200" rtl="0" eaLnBrk="1" latinLnBrk="0" hangingPunct="1">
-      <a:defRPr sz="1800" kern="1200">
+    <a:lvl5pPr marL="1645825" algn="l" rtl="0" eaLnBrk="0" fontAlgn="base" hangingPunct="0">
+      <a:spcBef>
+        <a:spcPct val="0"/>
+      </a:spcBef>
+      <a:spcAft>
+        <a:spcPct val="0"/>
+      </a:spcAft>
+      <a:defRPr kern="1200">
         <a:solidFill>
           <a:schemeClr val="tx1"/>
         </a:solidFill>
-        <a:latin typeface="+mn-lt"/>
-        <a:ea typeface="+mn-ea"/>
-        <a:cs typeface="+mn-cs"/>
+        <a:latin typeface="Arial" charset="0"/>
+        <a:ea typeface="ＭＳ Ｐゴシック" charset="-128"/>
+        <a:cs typeface="Times New Roman" pitchFamily="18" charset="0"/>
       </a:defRPr>
     </a:lvl5pPr>
-    <a:lvl6pPr marL="2286000" algn="l" defTabSz="457200" rtl="0" eaLnBrk="1" latinLnBrk="0" hangingPunct="1">
-      <a:defRPr sz="1800" kern="1200">
+    <a:lvl6pPr marL="2057281" algn="l" defTabSz="822912" rtl="0" eaLnBrk="1" latinLnBrk="0" hangingPunct="1">
+      <a:defRPr kern="1200">
+        <a:solidFill>
+          <a:schemeClr val="tx1"/>
+        </a:solidFill>
+        <a:latin typeface="Arial" charset="0"/>
+        <a:ea typeface="ＭＳ Ｐゴシック" charset="-128"/>
+        <a:cs typeface="Times New Roman" pitchFamily="18" charset="0"/>
+      </a:defRPr>
+    </a:lvl6pPr>
+    <a:lvl7pPr marL="2468737" algn="l" defTabSz="822912" rtl="0" eaLnBrk="1" latinLnBrk="0" hangingPunct="1">
+      <a:defRPr kern="1200">
+        <a:solidFill>
+          <a:schemeClr val="tx1"/>
+        </a:solidFill>
+        <a:latin typeface="Arial" charset="0"/>
+        <a:ea typeface="ＭＳ Ｐゴシック" charset="-128"/>
+        <a:cs typeface="Times New Roman" pitchFamily="18" charset="0"/>
+      </a:defRPr>
+    </a:lvl7pPr>
+    <a:lvl8pPr marL="2880193" algn="l" defTabSz="822912" rtl="0" eaLnBrk="1" latinLnBrk="0" hangingPunct="1">
+      <a:defRPr kern="1200">
+        <a:solidFill>
+          <a:schemeClr val="tx1"/>
+        </a:solidFill>
+        <a:latin typeface="Arial" charset="0"/>
+        <a:ea typeface="ＭＳ Ｐゴシック" charset="-128"/>
+        <a:cs typeface="Times New Roman" pitchFamily="18" charset="0"/>
+      </a:defRPr>
+    </a:lvl8pPr>
+    <a:lvl9pPr marL="3291649" algn="l" defTabSz="822912" rtl="0" eaLnBrk="1" latinLnBrk="0" hangingPunct="1">
+      <a:defRPr kern="1200">
+        <a:solidFill>
+          <a:schemeClr val="tx1"/>
+        </a:solidFill>
+        <a:latin typeface="Arial" charset="0"/>
+        <a:ea typeface="ＭＳ Ｐゴシック" charset="-128"/>
+        <a:cs typeface="Times New Roman" pitchFamily="18" charset="0"/>
+      </a:defRPr>
+    </a:lvl9pPr>
+  </p:defaultTextStyle>
+  <p:extLst>
+    <p:ext uri="{EFAFB233-063F-42B5-8137-9DF3F51BA10A}">
+      <p15:sldGuideLst xmlns:p15="http://schemas.microsoft.com/office/powerpoint/2012/main">
+        <p15:guide id="1" orient="horz" pos="1945">
+          <p15:clr>
+            <a:srgbClr val="A4A3A4"/>
+          </p15:clr>
+        </p15:guide>
+        <p15:guide id="2" pos="2593">
+          <p15:clr>
+            <a:srgbClr val="A4A3A4"/>
+          </p15:clr>
+        </p15:guide>
+      </p15:sldGuideLst>
+    </p:ext>
+    <p:ext uri="{2D200454-40CA-4A62-9FC3-DE9A4176ACB9}">
+      <p15:notesGuideLst xmlns:p15="http://schemas.microsoft.com/office/powerpoint/2012/main"/>
+    </p:ext>
+  </p:extLst>
+</p:presentation>
+</file>
+
+<file path=ppt/commentAuthors.xml><?xml version="1.0" encoding="utf-8"?>
+<p:cmAuthorLst xmlns:a="http://schemas.openxmlformats.org/drawingml/2006/main" xmlns:r="http://schemas.openxmlformats.org/officeDocument/2006/relationships" xmlns:p="http://schemas.openxmlformats.org/presentationml/2006/main">
+  <p:cmAuthor id="0" name="Eric Herzog" initials="" lastIdx="3" clrIdx="0"/>
+</p:cmAuthorLst>
+</file>
+
+<file path=ppt/revisionInfo.xml><?xml version="1.0" encoding="utf-8"?>
+<p1510:revInfo xmlns:a="http://schemas.openxmlformats.org/drawingml/2006/main" xmlns:r="http://schemas.openxmlformats.org/officeDocument/2006/relationships" xmlns:p1510="http://schemas.microsoft.com/office/powerpoint/2015/10/main">
+  <p1510:revLst>
+    <p1510:client id="{A9B913A8-16A3-4AA8-A1FB-DCF21196062A}" v="1" dt="2025-10-10T02:29:04.204"/>
+  </p1510:revLst>
+</p1510:revInfo>
+</file>
+
+<file path=ppt/changesInfos/changesInfo1.xml><?xml version="1.0" encoding="utf-8"?>
+<pc:chgInfo xmlns:a="http://schemas.openxmlformats.org/drawingml/2006/main" xmlns:r="http://schemas.openxmlformats.org/officeDocument/2006/relationships" xmlns:ac="http://schemas.microsoft.com/office/drawing/2013/main/command" xmlns:pc="http://schemas.microsoft.com/office/powerpoint/2013/main/command">
+  <pc:docChgLst>
+    <pc:chgData name="小泉 香奈 / KANA KOIZUMI" userId="b3542091-ded0-4e13-a2a2-f33cdf2101e9" providerId="ADAL" clId="{AAE0B4EE-8C3C-4B10-A6DA-B84C26A9FA4F}"/>
+    <pc:docChg chg="modSld">
+      <pc:chgData name="小泉 香奈 / KANA KOIZUMI" userId="b3542091-ded0-4e13-a2a2-f33cdf2101e9" providerId="ADAL" clId="{AAE0B4EE-8C3C-4B10-A6DA-B84C26A9FA4F}" dt="2025-10-10T02:29:04.204" v="36"/>
+      <pc:docMkLst>
+        <pc:docMk/>
+      </pc:docMkLst>
+      <pc:sldChg chg="modSp mod">
+        <pc:chgData name="小泉 香奈 / KANA KOIZUMI" userId="b3542091-ded0-4e13-a2a2-f33cdf2101e9" providerId="ADAL" clId="{AAE0B4EE-8C3C-4B10-A6DA-B84C26A9FA4F}" dt="2025-10-10T02:29:04.204" v="36"/>
+        <pc:sldMkLst>
+          <pc:docMk/>
+          <pc:sldMk cId="0" sldId="256"/>
+        </pc:sldMkLst>
+        <pc:spChg chg="mod">
+          <ac:chgData name="小泉 香奈 / KANA KOIZUMI" userId="b3542091-ded0-4e13-a2a2-f33cdf2101e9" providerId="ADAL" clId="{AAE0B4EE-8C3C-4B10-A6DA-B84C26A9FA4F}" dt="2025-10-10T02:29:04.204" v="36"/>
+          <ac:spMkLst>
+            <pc:docMk/>
+            <pc:sldMk cId="0" sldId="256"/>
+            <ac:spMk id="2" creationId="{00000000-0000-0000-0000-000000000000}"/>
+          </ac:spMkLst>
+        </pc:spChg>
+      </pc:sldChg>
+    </pc:docChg>
+  </pc:docChgLst>
+</pc:chgInfo>
+</file>
+
+<file path=ppt/handoutMasters/handoutMaster1.xml><?xml version="1.0" encoding="utf-8"?>
+<p:handoutMaster xmlns:a="http://schemas.openxmlformats.org/drawingml/2006/main" xmlns:r="http://schemas.openxmlformats.org/officeDocument/2006/relationships" xmlns:p="http://schemas.openxmlformats.org/presentationml/2006/main">
+  <p:cSld>
+    <p:bg>
+      <p:bgPr>
+        <a:solidFill>
+          <a:schemeClr val="bg1"/>
+        </a:solidFill>
+        <a:effectLst/>
+      </p:bgPr>
+    </p:bg>
+    <p:spTree>
+      <p:nvGrpSpPr>
+        <p:cNvPr id="1" name=""/>
+        <p:cNvGrpSpPr/>
+        <p:nvPr/>
+      </p:nvGrpSpPr>
+      <p:grpSpPr>
+        <a:xfrm>
+          <a:off x="0" y="0"/>
+          <a:ext cx="0" cy="0"/>
+          <a:chOff x="0" y="0"/>
+          <a:chExt cx="0" cy="0"/>
+        </a:xfrm>
+      </p:grpSpPr>
+      <p:sp>
+        <p:nvSpPr>
+          <p:cNvPr id="15362" name="Rectangle 2"/>
+          <p:cNvSpPr>
+            <a:spLocks noGrp="1" noChangeArrowheads="1"/>
+          </p:cNvSpPr>
+          <p:nvPr>
+            <p:ph type="hdr" sz="quarter"/>
+          </p:nvPr>
+        </p:nvSpPr>
+        <p:spPr bwMode="auto">
+          <a:xfrm>
+            <a:off x="0" y="0"/>
+            <a:ext cx="2971800" cy="457200"/>
+          </a:xfrm>
+          <a:prstGeom prst="rect">
+            <a:avLst/>
+          </a:prstGeom>
+          <a:noFill/>
+          <a:ln>
+            <a:noFill/>
+          </a:ln>
+          <a:effectLst/>
+          <a:extLst>
+            <a:ext uri="{909E8E84-426E-40DD-AFC4-6F175D3DCCD1}">
+              <a14:hiddenFill xmlns:a14="http://schemas.microsoft.com/office/drawing/2010/main">
+                <a:solidFill>
+                  <a:schemeClr val="accent1"/>
+                </a:solidFill>
+              </a14:hiddenFill>
+            </a:ext>
+            <a:ext uri="{91240B29-F687-4F45-9708-019B960494DF}">
+              <a14:hiddenLine xmlns:a14="http://schemas.microsoft.com/office/drawing/2010/main" w="12700">
+                <a:solidFill>
+                  <a:schemeClr val="tx1"/>
+                </a:solidFill>
+                <a:miter lim="800000"/>
+                <a:headEnd type="none" w="sm" len="sm"/>
+                <a:tailEnd type="none" w="sm" len="sm"/>
+              </a14:hiddenLine>
+            </a:ext>
+            <a:ext uri="{AF507438-7753-43E0-B8FC-AC1667EBCBE1}">
+              <a14:hiddenEffects xmlns:a14="http://schemas.microsoft.com/office/drawing/2010/main">
+                <a:effectLst>
+                  <a:outerShdw dist="35921" dir="2700000" algn="ctr" rotWithShape="0">
+                    <a:schemeClr val="bg2"/>
+                  </a:outerShdw>
+                </a:effectLst>
+              </a14:hiddenEffects>
+            </a:ext>
+          </a:extLst>
+        </p:spPr>
+        <p:txBody>
+          <a:bodyPr vert="horz" wrap="square" lIns="91440" tIns="45720" rIns="91440" bIns="45720" numCol="1" anchor="t" anchorCtr="0" compatLnSpc="1">
+            <a:prstTxWarp prst="textNoShape">
+              <a:avLst/>
+            </a:prstTxWarp>
+          </a:bodyPr>
+          <a:lstStyle>
+            <a:lvl1pPr>
+              <a:defRPr sz="1200">
+                <a:latin typeface="Times New Roman" pitchFamily="18" charset="0"/>
+              </a:defRPr>
+            </a:lvl1pPr>
+          </a:lstStyle>
+          <a:p>
+            <a:endParaRPr lang="en-US" altLang="ja-JP"/>
+          </a:p>
+        </p:txBody>
+      </p:sp>
+      <p:sp>
+        <p:nvSpPr>
+          <p:cNvPr id="15363" name="Rectangle 3"/>
+          <p:cNvSpPr>
+            <a:spLocks noGrp="1" noChangeArrowheads="1"/>
+          </p:cNvSpPr>
+          <p:nvPr>
+            <p:ph type="dt" sz="quarter" idx="1"/>
+          </p:nvPr>
+        </p:nvSpPr>
+        <p:spPr bwMode="auto">
+          <a:xfrm>
+            <a:off x="3886200" y="0"/>
+            <a:ext cx="2971800" cy="457200"/>
+          </a:xfrm>
+          <a:prstGeom prst="rect">
+            <a:avLst/>
+          </a:prstGeom>
+          <a:noFill/>
+          <a:ln>
+            <a:noFill/>
+          </a:ln>
+          <a:effectLst/>
+          <a:extLst>
+            <a:ext uri="{909E8E84-426E-40DD-AFC4-6F175D3DCCD1}">
+              <a14:hiddenFill xmlns:a14="http://schemas.microsoft.com/office/drawing/2010/main">
+                <a:solidFill>
+                  <a:schemeClr val="accent1"/>
+                </a:solidFill>
+              </a14:hiddenFill>
+            </a:ext>
+            <a:ext uri="{91240B29-F687-4F45-9708-019B960494DF}">
+              <a14:hiddenLine xmlns:a14="http://schemas.microsoft.com/office/drawing/2010/main" w="12700">
+                <a:solidFill>
+                  <a:schemeClr val="tx1"/>
+                </a:solidFill>
+                <a:miter lim="800000"/>
+                <a:headEnd type="none" w="sm" len="sm"/>
+                <a:tailEnd type="none" w="sm" len="sm"/>
+              </a14:hiddenLine>
+            </a:ext>
+            <a:ext uri="{AF507438-7753-43E0-B8FC-AC1667EBCBE1}">
+              <a14:hiddenEffects xmlns:a14="http://schemas.microsoft.com/office/drawing/2010/main">
+                <a:effectLst>
+                  <a:outerShdw dist="35921" dir="2700000" algn="ctr" rotWithShape="0">
+                    <a:schemeClr val="bg2"/>
+                  </a:outerShdw>
+                </a:effectLst>
+              </a14:hiddenEffects>
+            </a:ext>
+          </a:extLst>
+        </p:spPr>
+        <p:txBody>
+          <a:bodyPr vert="horz" wrap="square" lIns="91440" tIns="45720" rIns="91440" bIns="45720" numCol="1" anchor="t" anchorCtr="0" compatLnSpc="1">
+            <a:prstTxWarp prst="textNoShape">
+              <a:avLst/>
+            </a:prstTxWarp>
+          </a:bodyPr>
+          <a:lstStyle>
+            <a:lvl1pPr algn="r">
+              <a:defRPr sz="1200">
+                <a:latin typeface="Times New Roman" pitchFamily="18" charset="0"/>
+              </a:defRPr>
+            </a:lvl1pPr>
+          </a:lstStyle>
+          <a:p>
+            <a:endParaRPr lang="en-US" altLang="ja-JP"/>
+          </a:p>
+        </p:txBody>
+      </p:sp>
+      <p:sp>
+        <p:nvSpPr>
+          <p:cNvPr id="15364" name="Rectangle 4"/>
+          <p:cNvSpPr>
+            <a:spLocks noGrp="1" noChangeArrowheads="1"/>
+          </p:cNvSpPr>
+          <p:nvPr>
+            <p:ph type="ftr" sz="quarter" idx="2"/>
+          </p:nvPr>
+        </p:nvSpPr>
+        <p:spPr bwMode="auto">
+          <a:xfrm>
+            <a:off x="0" y="8686800"/>
+            <a:ext cx="2971800" cy="457200"/>
+          </a:xfrm>
+          <a:prstGeom prst="rect">
+            <a:avLst/>
+          </a:prstGeom>
+          <a:noFill/>
+          <a:ln>
+            <a:noFill/>
+          </a:ln>
+          <a:effectLst/>
+          <a:extLst>
+            <a:ext uri="{909E8E84-426E-40DD-AFC4-6F175D3DCCD1}">
+              <a14:hiddenFill xmlns:a14="http://schemas.microsoft.com/office/drawing/2010/main">
+                <a:solidFill>
+                  <a:schemeClr val="accent1"/>
+                </a:solidFill>
+              </a14:hiddenFill>
+            </a:ext>
+            <a:ext uri="{91240B29-F687-4F45-9708-019B960494DF}">
+              <a14:hiddenLine xmlns:a14="http://schemas.microsoft.com/office/drawing/2010/main" w="12700">
+                <a:solidFill>
+                  <a:schemeClr val="tx1"/>
+                </a:solidFill>
+                <a:miter lim="800000"/>
+                <a:headEnd type="none" w="sm" len="sm"/>
+                <a:tailEnd type="none" w="sm" len="sm"/>
+              </a14:hiddenLine>
+            </a:ext>
+            <a:ext uri="{AF507438-7753-43E0-B8FC-AC1667EBCBE1}">
+              <a14:hiddenEffects xmlns:a14="http://schemas.microsoft.com/office/drawing/2010/main">
+                <a:effectLst>
+                  <a:outerShdw dist="35921" dir="2700000" algn="ctr" rotWithShape="0">
+                    <a:schemeClr val="bg2"/>
+                  </a:outerShdw>
+                </a:effectLst>
+              </a14:hiddenEffects>
+            </a:ext>
+          </a:extLst>
+        </p:spPr>
+        <p:txBody>
+          <a:bodyPr vert="horz" wrap="square" lIns="91440" tIns="45720" rIns="91440" bIns="45720" numCol="1" anchor="b" anchorCtr="0" compatLnSpc="1">
+            <a:prstTxWarp prst="textNoShape">
+              <a:avLst/>
+            </a:prstTxWarp>
+          </a:bodyPr>
+          <a:lstStyle>
+            <a:lvl1pPr>
+              <a:defRPr sz="1200">
+                <a:latin typeface="Times New Roman" pitchFamily="18" charset="0"/>
+              </a:defRPr>
+            </a:lvl1pPr>
+          </a:lstStyle>
+          <a:p>
+            <a:endParaRPr lang="en-US" altLang="ja-JP"/>
+          </a:p>
+        </p:txBody>
+      </p:sp>
+      <p:sp>
+        <p:nvSpPr>
+          <p:cNvPr id="15365" name="Rectangle 5"/>
+          <p:cNvSpPr>
+            <a:spLocks noGrp="1" noChangeArrowheads="1"/>
+          </p:cNvSpPr>
+          <p:nvPr>
+            <p:ph type="sldNum" sz="quarter" idx="3"/>
+          </p:nvPr>
+        </p:nvSpPr>
+        <p:spPr bwMode="auto">
+          <a:xfrm>
+            <a:off x="3886200" y="8686800"/>
+            <a:ext cx="2971800" cy="457200"/>
+          </a:xfrm>
+          <a:prstGeom prst="rect">
+            <a:avLst/>
+          </a:prstGeom>
+          <a:noFill/>
+          <a:ln>
+            <a:noFill/>
+          </a:ln>
+          <a:effectLst/>
+          <a:extLst>
+            <a:ext uri="{909E8E84-426E-40DD-AFC4-6F175D3DCCD1}">
+              <a14:hiddenFill xmlns:a14="http://schemas.microsoft.com/office/drawing/2010/main">
+                <a:solidFill>
+                  <a:schemeClr val="accent1"/>
+                </a:solidFill>
+              </a14:hiddenFill>
+            </a:ext>
+            <a:ext uri="{91240B29-F687-4F45-9708-019B960494DF}">
+              <a14:hiddenLine xmlns:a14="http://schemas.microsoft.com/office/drawing/2010/main" w="12700">
+                <a:solidFill>
+                  <a:schemeClr val="tx1"/>
+                </a:solidFill>
+                <a:miter lim="800000"/>
+                <a:headEnd type="none" w="sm" len="sm"/>
+                <a:tailEnd type="none" w="sm" len="sm"/>
+              </a14:hiddenLine>
+            </a:ext>
+            <a:ext uri="{AF507438-7753-43E0-B8FC-AC1667EBCBE1}">
+              <a14:hiddenEffects xmlns:a14="http://schemas.microsoft.com/office/drawing/2010/main">
+                <a:effectLst>
+                  <a:outerShdw dist="35921" dir="2700000" algn="ctr" rotWithShape="0">
+                    <a:schemeClr val="bg2"/>
+                  </a:outerShdw>
+                </a:effectLst>
+              </a14:hiddenEffects>
+            </a:ext>
+          </a:extLst>
+        </p:spPr>
+        <p:txBody>
+          <a:bodyPr vert="horz" wrap="square" lIns="91440" tIns="45720" rIns="91440" bIns="45720" numCol="1" anchor="b" anchorCtr="0" compatLnSpc="1">
+            <a:prstTxWarp prst="textNoShape">
+              <a:avLst/>
+            </a:prstTxWarp>
+          </a:bodyPr>
+          <a:lstStyle>
+            <a:lvl1pPr algn="r">
+              <a:defRPr sz="1200">
+                <a:latin typeface="Times New Roman" pitchFamily="18" charset="0"/>
+              </a:defRPr>
+            </a:lvl1pPr>
+          </a:lstStyle>
+          <a:p>
+            <a:fld id="{94DDC69E-C362-4642-AA7C-EDC99D50E0B1}" type="slidenum">
+              <a:rPr lang="ja-JP" altLang="en-US"/>
+              <a:pPr/>
+              <a:t>‹#›</a:t>
+            </a:fld>
+            <a:endParaRPr lang="en-US" altLang="ja-JP"/>
+          </a:p>
+        </p:txBody>
+      </p:sp>
+    </p:spTree>
+    <p:extLst>
+      <p:ext uri="{BB962C8B-B14F-4D97-AF65-F5344CB8AC3E}">
+        <p14:creationId xmlns:p14="http://schemas.microsoft.com/office/powerpoint/2010/main" val="3687711537"/>
+      </p:ext>
+    </p:extLst>
+  </p:cSld>
+  <p:clrMap bg1="lt1" tx1="dk1" bg2="lt2" tx2="dk2" accent1="accent1" accent2="accent2" accent3="accent3" accent4="accent4" accent5="accent5" accent6="accent6" hlink="hlink" folHlink="folHlink"/>
+</p:handoutMaster>
+</file>
+
+<file path=ppt/notesMasters/notesMaster1.xml><?xml version="1.0" encoding="utf-8"?>
+<p:notesMaster xmlns:a="http://schemas.openxmlformats.org/drawingml/2006/main" xmlns:r="http://schemas.openxmlformats.org/officeDocument/2006/relationships" xmlns:p="http://schemas.openxmlformats.org/presentationml/2006/main">
+  <p:cSld>
+    <p:bg>
+      <p:bgPr>
+        <a:solidFill>
+          <a:schemeClr val="bg1"/>
+        </a:solidFill>
+        <a:effectLst/>
+      </p:bgPr>
+    </p:bg>
+    <p:spTree>
+      <p:nvGrpSpPr>
+        <p:cNvPr id="1" name=""/>
+        <p:cNvGrpSpPr/>
+        <p:nvPr/>
+      </p:nvGrpSpPr>
+      <p:grpSpPr>
+        <a:xfrm>
+          <a:off x="0" y="0"/>
+          <a:ext cx="0" cy="0"/>
+          <a:chOff x="0" y="0"/>
+          <a:chExt cx="0" cy="0"/>
+        </a:xfrm>
+      </p:grpSpPr>
+      <p:sp>
+        <p:nvSpPr>
+          <p:cNvPr id="17410" name="Rectangle 2"/>
+          <p:cNvSpPr>
+            <a:spLocks noGrp="1" noChangeArrowheads="1"/>
+          </p:cNvSpPr>
+          <p:nvPr>
+            <p:ph type="hdr" sz="quarter"/>
+          </p:nvPr>
+        </p:nvSpPr>
+        <p:spPr bwMode="auto">
+          <a:xfrm>
+            <a:off x="0" y="0"/>
+            <a:ext cx="2971800" cy="457200"/>
+          </a:xfrm>
+          <a:prstGeom prst="rect">
+            <a:avLst/>
+          </a:prstGeom>
+          <a:noFill/>
+          <a:ln>
+            <a:noFill/>
+          </a:ln>
+          <a:effectLst/>
+          <a:extLst>
+            <a:ext uri="{909E8E84-426E-40DD-AFC4-6F175D3DCCD1}">
+              <a14:hiddenFill xmlns:a14="http://schemas.microsoft.com/office/drawing/2010/main">
+                <a:solidFill>
+                  <a:schemeClr val="accent1"/>
+                </a:solidFill>
+              </a14:hiddenFill>
+            </a:ext>
+            <a:ext uri="{91240B29-F687-4F45-9708-019B960494DF}">
+              <a14:hiddenLine xmlns:a14="http://schemas.microsoft.com/office/drawing/2010/main" w="12700">
+                <a:solidFill>
+                  <a:schemeClr val="tx1"/>
+                </a:solidFill>
+                <a:miter lim="800000"/>
+                <a:headEnd type="none" w="sm" len="sm"/>
+                <a:tailEnd type="none" w="sm" len="sm"/>
+              </a14:hiddenLine>
+            </a:ext>
+            <a:ext uri="{AF507438-7753-43E0-B8FC-AC1667EBCBE1}">
+              <a14:hiddenEffects xmlns:a14="http://schemas.microsoft.com/office/drawing/2010/main">
+                <a:effectLst>
+                  <a:outerShdw dist="35921" dir="2700000" algn="ctr" rotWithShape="0">
+                    <a:schemeClr val="bg2"/>
+                  </a:outerShdw>
+                </a:effectLst>
+              </a14:hiddenEffects>
+            </a:ext>
+          </a:extLst>
+        </p:spPr>
+        <p:txBody>
+          <a:bodyPr vert="horz" wrap="square" lIns="91440" tIns="45720" rIns="91440" bIns="45720" numCol="1" anchor="t" anchorCtr="0" compatLnSpc="1">
+            <a:prstTxWarp prst="textNoShape">
+              <a:avLst/>
+            </a:prstTxWarp>
+          </a:bodyPr>
+          <a:lstStyle>
+            <a:lvl1pPr>
+              <a:defRPr sz="1200">
+                <a:latin typeface="Times New Roman" pitchFamily="18" charset="0"/>
+              </a:defRPr>
+            </a:lvl1pPr>
+          </a:lstStyle>
+          <a:p>
+            <a:endParaRPr lang="en-US" altLang="ja-JP"/>
+          </a:p>
+        </p:txBody>
+      </p:sp>
+      <p:sp>
+        <p:nvSpPr>
+          <p:cNvPr id="17411" name="Rectangle 3"/>
+          <p:cNvSpPr>
+            <a:spLocks noGrp="1" noChangeArrowheads="1"/>
+          </p:cNvSpPr>
+          <p:nvPr>
+            <p:ph type="dt" idx="1"/>
+          </p:nvPr>
+        </p:nvSpPr>
+        <p:spPr bwMode="auto">
+          <a:xfrm>
+            <a:off x="3886200" y="0"/>
+            <a:ext cx="2971800" cy="457200"/>
+          </a:xfrm>
+          <a:prstGeom prst="rect">
+            <a:avLst/>
+          </a:prstGeom>
+          <a:noFill/>
+          <a:ln>
+            <a:noFill/>
+          </a:ln>
+          <a:effectLst/>
+          <a:extLst>
+            <a:ext uri="{909E8E84-426E-40DD-AFC4-6F175D3DCCD1}">
+              <a14:hiddenFill xmlns:a14="http://schemas.microsoft.com/office/drawing/2010/main">
+                <a:solidFill>
+                  <a:schemeClr val="accent1"/>
+                </a:solidFill>
+              </a14:hiddenFill>
+            </a:ext>
+            <a:ext uri="{91240B29-F687-4F45-9708-019B960494DF}">
+              <a14:hiddenLine xmlns:a14="http://schemas.microsoft.com/office/drawing/2010/main" w="12700">
+                <a:solidFill>
+                  <a:schemeClr val="tx1"/>
+                </a:solidFill>
+                <a:miter lim="800000"/>
+                <a:headEnd type="none" w="sm" len="sm"/>
+                <a:tailEnd type="none" w="sm" len="sm"/>
+              </a14:hiddenLine>
+            </a:ext>
+            <a:ext uri="{AF507438-7753-43E0-B8FC-AC1667EBCBE1}">
+              <a14:hiddenEffects xmlns:a14="http://schemas.microsoft.com/office/drawing/2010/main">
+                <a:effectLst>
+                  <a:outerShdw dist="35921" dir="2700000" algn="ctr" rotWithShape="0">
+                    <a:schemeClr val="bg2"/>
+                  </a:outerShdw>
+                </a:effectLst>
+              </a14:hiddenEffects>
+            </a:ext>
+          </a:extLst>
+        </p:spPr>
+        <p:txBody>
+          <a:bodyPr vert="horz" wrap="square" lIns="91440" tIns="45720" rIns="91440" bIns="45720" numCol="1" anchor="t" anchorCtr="0" compatLnSpc="1">
+            <a:prstTxWarp prst="textNoShape">
+              <a:avLst/>
+            </a:prstTxWarp>
+          </a:bodyPr>
+          <a:lstStyle>
+            <a:lvl1pPr algn="r">
+              <a:defRPr sz="1200">
+                <a:latin typeface="Times New Roman" pitchFamily="18" charset="0"/>
+              </a:defRPr>
+            </a:lvl1pPr>
+          </a:lstStyle>
+          <a:p>
+            <a:endParaRPr lang="en-US" altLang="ja-JP"/>
+          </a:p>
+        </p:txBody>
+      </p:sp>
+      <p:sp>
+        <p:nvSpPr>
+          <p:cNvPr id="17412" name="Rectangle 4"/>
+          <p:cNvSpPr>
+            <a:spLocks noGrp="1" noRot="1" noChangeAspect="1" noChangeArrowheads="1" noTextEdit="1"/>
+          </p:cNvSpPr>
+          <p:nvPr>
+            <p:ph type="sldImg" idx="2"/>
+          </p:nvPr>
+        </p:nvSpPr>
+        <p:spPr bwMode="auto">
+          <a:xfrm>
+            <a:off x="1143000" y="685800"/>
+            <a:ext cx="4572000" cy="3429000"/>
+          </a:xfrm>
+          <a:prstGeom prst="rect">
+            <a:avLst/>
+          </a:prstGeom>
+          <a:noFill/>
+          <a:ln w="9525">
+            <a:solidFill>
+              <a:srgbClr val="000000"/>
+            </a:solidFill>
+            <a:miter lim="800000"/>
+            <a:headEnd/>
+            <a:tailEnd/>
+          </a:ln>
+          <a:effectLst/>
+          <a:extLst>
+            <a:ext uri="{AF507438-7753-43E0-B8FC-AC1667EBCBE1}">
+              <a14:hiddenEffects xmlns:a14="http://schemas.microsoft.com/office/drawing/2010/main">
+                <a:effectLst>
+                  <a:outerShdw dist="35921" dir="2700000" algn="ctr" rotWithShape="0">
+                    <a:srgbClr val="808080"/>
+                  </a:outerShdw>
+                </a:effectLst>
+              </a14:hiddenEffects>
+            </a:ext>
+            <a:ext uri="{53640926-AAD7-44D8-BBD7-CCE9431645EC}">
+              <a14:shadowObscured xmlns:a14="http://schemas.microsoft.com/office/drawing/2010/main" val="1"/>
+            </a:ext>
+          </a:extLst>
+        </p:spPr>
+      </p:sp>
+      <p:sp>
+        <p:nvSpPr>
+          <p:cNvPr id="17413" name="Rectangle 5"/>
+          <p:cNvSpPr>
+            <a:spLocks noGrp="1" noChangeArrowheads="1"/>
+          </p:cNvSpPr>
+          <p:nvPr>
+            <p:ph type="body" sz="quarter" idx="3"/>
+          </p:nvPr>
+        </p:nvSpPr>
+        <p:spPr bwMode="auto">
+          <a:xfrm>
+            <a:off x="914400" y="4343400"/>
+            <a:ext cx="5029200" cy="4114800"/>
+          </a:xfrm>
+          <a:prstGeom prst="rect">
+            <a:avLst/>
+          </a:prstGeom>
+          <a:noFill/>
+          <a:ln>
+            <a:noFill/>
+          </a:ln>
+          <a:effectLst/>
+          <a:extLst>
+            <a:ext uri="{909E8E84-426E-40DD-AFC4-6F175D3DCCD1}">
+              <a14:hiddenFill xmlns:a14="http://schemas.microsoft.com/office/drawing/2010/main">
+                <a:solidFill>
+                  <a:schemeClr val="accent1"/>
+                </a:solidFill>
+              </a14:hiddenFill>
+            </a:ext>
+            <a:ext uri="{91240B29-F687-4F45-9708-019B960494DF}">
+              <a14:hiddenLine xmlns:a14="http://schemas.microsoft.com/office/drawing/2010/main" w="12700">
+                <a:solidFill>
+                  <a:schemeClr val="tx1"/>
+                </a:solidFill>
+                <a:miter lim="800000"/>
+                <a:headEnd type="none" w="sm" len="sm"/>
+                <a:tailEnd type="none" w="sm" len="sm"/>
+              </a14:hiddenLine>
+            </a:ext>
+            <a:ext uri="{AF507438-7753-43E0-B8FC-AC1667EBCBE1}">
+              <a14:hiddenEffects xmlns:a14="http://schemas.microsoft.com/office/drawing/2010/main">
+                <a:effectLst>
+                  <a:outerShdw dist="35921" dir="2700000" algn="ctr" rotWithShape="0">
+                    <a:schemeClr val="bg2"/>
+                  </a:outerShdw>
+                </a:effectLst>
+              </a14:hiddenEffects>
+            </a:ext>
+          </a:extLst>
+        </p:spPr>
+        <p:txBody>
+          <a:bodyPr vert="horz" wrap="square" lIns="91440" tIns="45720" rIns="91440" bIns="45720" numCol="1" anchor="t" anchorCtr="0" compatLnSpc="1">
+            <a:prstTxWarp prst="textNoShape">
+              <a:avLst/>
+            </a:prstTxWarp>
+          </a:bodyPr>
+          <a:lstStyle/>
+          <a:p>
+            <a:pPr lvl="0"/>
+            <a:r>
+              <a:rPr lang="en-US" altLang="ja-JP"/>
+              <a:t>Click to edit Master text styles</a:t>
+            </a:r>
+          </a:p>
+          <a:p>
+            <a:pPr lvl="1"/>
+            <a:r>
+              <a:rPr lang="en-US" altLang="ja-JP"/>
+              <a:t>Second level</a:t>
+            </a:r>
+          </a:p>
+          <a:p>
+            <a:pPr lvl="2"/>
+            <a:r>
+              <a:rPr lang="en-US" altLang="ja-JP"/>
+              <a:t>Third level</a:t>
+            </a:r>
+          </a:p>
+          <a:p>
+            <a:pPr lvl="3"/>
+            <a:r>
+              <a:rPr lang="en-US" altLang="ja-JP"/>
+              <a:t>Fourth level</a:t>
+            </a:r>
+          </a:p>
+          <a:p>
+            <a:pPr lvl="4"/>
+            <a:r>
+              <a:rPr lang="en-US" altLang="ja-JP"/>
+              <a:t>Fifth level</a:t>
+            </a:r>
+          </a:p>
+        </p:txBody>
+      </p:sp>
+      <p:sp>
+        <p:nvSpPr>
+          <p:cNvPr id="17414" name="Rectangle 6"/>
+          <p:cNvSpPr>
+            <a:spLocks noGrp="1" noChangeArrowheads="1"/>
+          </p:cNvSpPr>
+          <p:nvPr>
+            <p:ph type="ftr" sz="quarter" idx="4"/>
+          </p:nvPr>
+        </p:nvSpPr>
+        <p:spPr bwMode="auto">
+          <a:xfrm>
+            <a:off x="0" y="8686800"/>
+            <a:ext cx="2971800" cy="457200"/>
+          </a:xfrm>
+          <a:prstGeom prst="rect">
+            <a:avLst/>
+          </a:prstGeom>
+          <a:noFill/>
+          <a:ln>
+            <a:noFill/>
+          </a:ln>
+          <a:effectLst/>
+          <a:extLst>
+            <a:ext uri="{909E8E84-426E-40DD-AFC4-6F175D3DCCD1}">
+              <a14:hiddenFill xmlns:a14="http://schemas.microsoft.com/office/drawing/2010/main">
+                <a:solidFill>
+                  <a:schemeClr val="accent1"/>
+                </a:solidFill>
+              </a14:hiddenFill>
+            </a:ext>
+            <a:ext uri="{91240B29-F687-4F45-9708-019B960494DF}">
+              <a14:hiddenLine xmlns:a14="http://schemas.microsoft.com/office/drawing/2010/main" w="12700">
+                <a:solidFill>
+                  <a:schemeClr val="tx1"/>
+                </a:solidFill>
+                <a:miter lim="800000"/>
+                <a:headEnd type="none" w="sm" len="sm"/>
+                <a:tailEnd type="none" w="sm" len="sm"/>
+              </a14:hiddenLine>
+            </a:ext>
+            <a:ext uri="{AF507438-7753-43E0-B8FC-AC1667EBCBE1}">
+              <a14:hiddenEffects xmlns:a14="http://schemas.microsoft.com/office/drawing/2010/main">
+                <a:effectLst>
+                  <a:outerShdw dist="35921" dir="2700000" algn="ctr" rotWithShape="0">
+                    <a:schemeClr val="bg2"/>
+                  </a:outerShdw>
+                </a:effectLst>
+              </a14:hiddenEffects>
+            </a:ext>
+          </a:extLst>
+        </p:spPr>
+        <p:txBody>
+          <a:bodyPr vert="horz" wrap="square" lIns="91440" tIns="45720" rIns="91440" bIns="45720" numCol="1" anchor="b" anchorCtr="0" compatLnSpc="1">
+            <a:prstTxWarp prst="textNoShape">
+              <a:avLst/>
+            </a:prstTxWarp>
+          </a:bodyPr>
+          <a:lstStyle>
+            <a:lvl1pPr>
+              <a:defRPr sz="1200">
+                <a:latin typeface="Times New Roman" pitchFamily="18" charset="0"/>
+              </a:defRPr>
+            </a:lvl1pPr>
+          </a:lstStyle>
+          <a:p>
+            <a:endParaRPr lang="en-US" altLang="ja-JP"/>
+          </a:p>
+        </p:txBody>
+      </p:sp>
+      <p:sp>
+        <p:nvSpPr>
+          <p:cNvPr id="17415" name="Rectangle 7"/>
+          <p:cNvSpPr>
+            <a:spLocks noGrp="1" noChangeArrowheads="1"/>
+          </p:cNvSpPr>
+          <p:nvPr>
+            <p:ph type="sldNum" sz="quarter" idx="5"/>
+          </p:nvPr>
+        </p:nvSpPr>
+        <p:spPr bwMode="auto">
+          <a:xfrm>
+            <a:off x="3886200" y="8686800"/>
+            <a:ext cx="2971800" cy="457200"/>
+          </a:xfrm>
+          <a:prstGeom prst="rect">
+            <a:avLst/>
+          </a:prstGeom>
+          <a:noFill/>
+          <a:ln>
+            <a:noFill/>
+          </a:ln>
+          <a:effectLst/>
+          <a:extLst>
+            <a:ext uri="{909E8E84-426E-40DD-AFC4-6F175D3DCCD1}">
+              <a14:hiddenFill xmlns:a14="http://schemas.microsoft.com/office/drawing/2010/main">
+                <a:solidFill>
+                  <a:schemeClr val="accent1"/>
+                </a:solidFill>
+              </a14:hiddenFill>
+            </a:ext>
+            <a:ext uri="{91240B29-F687-4F45-9708-019B960494DF}">
+              <a14:hiddenLine xmlns:a14="http://schemas.microsoft.com/office/drawing/2010/main" w="12700">
+                <a:solidFill>
+                  <a:schemeClr val="tx1"/>
+                </a:solidFill>
+                <a:miter lim="800000"/>
+                <a:headEnd type="none" w="sm" len="sm"/>
+                <a:tailEnd type="none" w="sm" len="sm"/>
+              </a14:hiddenLine>
+            </a:ext>
+            <a:ext uri="{AF507438-7753-43E0-B8FC-AC1667EBCBE1}">
+              <a14:hiddenEffects xmlns:a14="http://schemas.microsoft.com/office/drawing/2010/main">
+                <a:effectLst>
+                  <a:outerShdw dist="35921" dir="2700000" algn="ctr" rotWithShape="0">
+                    <a:schemeClr val="bg2"/>
+                  </a:outerShdw>
+                </a:effectLst>
+              </a14:hiddenEffects>
+            </a:ext>
+          </a:extLst>
+        </p:spPr>
+        <p:txBody>
+          <a:bodyPr vert="horz" wrap="square" lIns="91440" tIns="45720" rIns="91440" bIns="45720" numCol="1" anchor="b" anchorCtr="0" compatLnSpc="1">
+            <a:prstTxWarp prst="textNoShape">
+              <a:avLst/>
+            </a:prstTxWarp>
+          </a:bodyPr>
+          <a:lstStyle>
+            <a:lvl1pPr algn="r">
+              <a:defRPr sz="1200">
+                <a:latin typeface="Times New Roman" pitchFamily="18" charset="0"/>
+              </a:defRPr>
+            </a:lvl1pPr>
+          </a:lstStyle>
+          <a:p>
+            <a:fld id="{E52881CC-9F38-498C-A2E2-836886D49A11}" type="slidenum">
+              <a:rPr lang="ja-JP" altLang="en-US"/>
+              <a:pPr/>
+              <a:t>‹#›</a:t>
+            </a:fld>
+            <a:endParaRPr lang="en-US" altLang="ja-JP"/>
+          </a:p>
+        </p:txBody>
+      </p:sp>
+    </p:spTree>
+    <p:extLst>
+      <p:ext uri="{BB962C8B-B14F-4D97-AF65-F5344CB8AC3E}">
+        <p14:creationId xmlns:p14="http://schemas.microsoft.com/office/powerpoint/2010/main" val="2936092600"/>
+      </p:ext>
+    </p:extLst>
+  </p:cSld>
+  <p:clrMap bg1="lt1" tx1="dk1" bg2="lt2" tx2="dk2" accent1="accent1" accent2="accent2" accent3="accent3" accent4="accent4" accent5="accent5" accent6="accent6" hlink="hlink" folHlink="folHlink"/>
+  <p:notesStyle>
+    <a:lvl1pPr algn="l" rtl="0" fontAlgn="base">
+      <a:spcBef>
+        <a:spcPct val="30000"/>
+      </a:spcBef>
+      <a:spcAft>
+        <a:spcPct val="0"/>
+      </a:spcAft>
+      <a:defRPr kumimoji="1" sz="1100" kern="1200">
+        <a:solidFill>
+          <a:schemeClr val="tx1"/>
+        </a:solidFill>
+        <a:latin typeface="Times New Roman" pitchFamily="18" charset="0"/>
+        <a:ea typeface="+mn-ea"/>
+        <a:cs typeface="Times New Roman" pitchFamily="18" charset="0"/>
+      </a:defRPr>
+    </a:lvl1pPr>
+    <a:lvl2pPr marL="411456" algn="l" rtl="0" fontAlgn="base">
+      <a:spcBef>
+        <a:spcPct val="30000"/>
+      </a:spcBef>
+      <a:spcAft>
+        <a:spcPct val="0"/>
+      </a:spcAft>
+      <a:defRPr kumimoji="1" sz="1100" kern="1200">
+        <a:solidFill>
+          <a:schemeClr val="tx1"/>
+        </a:solidFill>
+        <a:latin typeface="Times New Roman" pitchFamily="18" charset="0"/>
+        <a:ea typeface="+mn-ea"/>
+        <a:cs typeface="Times New Roman" pitchFamily="18" charset="0"/>
+      </a:defRPr>
+    </a:lvl2pPr>
+    <a:lvl3pPr marL="822912" algn="l" rtl="0" fontAlgn="base">
+      <a:spcBef>
+        <a:spcPct val="30000"/>
+      </a:spcBef>
+      <a:spcAft>
+        <a:spcPct val="0"/>
+      </a:spcAft>
+      <a:defRPr kumimoji="1" sz="1100" kern="1200">
+        <a:solidFill>
+          <a:schemeClr val="tx1"/>
+        </a:solidFill>
+        <a:latin typeface="Times New Roman" pitchFamily="18" charset="0"/>
+        <a:ea typeface="+mn-ea"/>
+        <a:cs typeface="Times New Roman" pitchFamily="18" charset="0"/>
+      </a:defRPr>
+    </a:lvl3pPr>
+    <a:lvl4pPr marL="1234368" algn="l" rtl="0" fontAlgn="base">
+      <a:spcBef>
+        <a:spcPct val="30000"/>
+      </a:spcBef>
+      <a:spcAft>
+        <a:spcPct val="0"/>
+      </a:spcAft>
+      <a:defRPr kumimoji="1" sz="1100" kern="1200">
+        <a:solidFill>
+          <a:schemeClr val="tx1"/>
+        </a:solidFill>
+        <a:latin typeface="Times New Roman" pitchFamily="18" charset="0"/>
+        <a:ea typeface="+mn-ea"/>
+        <a:cs typeface="Times New Roman" pitchFamily="18" charset="0"/>
+      </a:defRPr>
+    </a:lvl4pPr>
+    <a:lvl5pPr marL="1645825" algn="l" rtl="0" fontAlgn="base">
+      <a:spcBef>
+        <a:spcPct val="30000"/>
+      </a:spcBef>
+      <a:spcAft>
+        <a:spcPct val="0"/>
+      </a:spcAft>
+      <a:defRPr kumimoji="1" sz="1100" kern="1200">
+        <a:solidFill>
+          <a:schemeClr val="tx1"/>
+        </a:solidFill>
+        <a:latin typeface="Times New Roman" pitchFamily="18" charset="0"/>
+        <a:ea typeface="+mn-ea"/>
+        <a:cs typeface="Times New Roman" pitchFamily="18" charset="0"/>
+      </a:defRPr>
+    </a:lvl5pPr>
+    <a:lvl6pPr marL="2057281" algn="l" defTabSz="822912" rtl="0" eaLnBrk="1" latinLnBrk="0" hangingPunct="1">
+      <a:defRPr sz="1100" kern="1200">
         <a:solidFill>
           <a:schemeClr val="tx1"/>
         </a:solidFill>
@@ -73,8 +1075,8 @@
         <a:cs typeface="+mn-cs"/>
       </a:defRPr>
     </a:lvl6pPr>
-    <a:lvl7pPr marL="2743200" algn="l" defTabSz="457200" rtl="0" eaLnBrk="1" latinLnBrk="0" hangingPunct="1">
-      <a:defRPr sz="1800" kern="1200">
+    <a:lvl7pPr marL="2468737" algn="l" defTabSz="822912" rtl="0" eaLnBrk="1" latinLnBrk="0" hangingPunct="1">
+      <a:defRPr sz="1100" kern="1200">
         <a:solidFill>
           <a:schemeClr val="tx1"/>
         </a:solidFill>
@@ -83,8 +1085,8 @@
         <a:cs typeface="+mn-cs"/>
       </a:defRPr>
     </a:lvl7pPr>
-    <a:lvl8pPr marL="3200400" algn="l" defTabSz="457200" rtl="0" eaLnBrk="1" latinLnBrk="0" hangingPunct="1">
-      <a:defRPr sz="1800" kern="1200">
+    <a:lvl8pPr marL="2880193" algn="l" defTabSz="822912" rtl="0" eaLnBrk="1" latinLnBrk="0" hangingPunct="1">
+      <a:defRPr sz="1100" kern="1200">
         <a:solidFill>
           <a:schemeClr val="tx1"/>
         </a:solidFill>
@@ -93,8 +1095,8 @@
         <a:cs typeface="+mn-cs"/>
       </a:defRPr>
     </a:lvl8pPr>
-    <a:lvl9pPr marL="3657600" algn="l" defTabSz="457200" rtl="0" eaLnBrk="1" latinLnBrk="0" hangingPunct="1">
-      <a:defRPr sz="1800" kern="1200">
+    <a:lvl9pPr marL="3291649" algn="l" defTabSz="822912" rtl="0" eaLnBrk="1" latinLnBrk="0" hangingPunct="1">
+      <a:defRPr sz="1100" kern="1200">
         <a:solidFill>
           <a:schemeClr val="tx1"/>
         </a:solidFill>
@@ -103,13 +1105,93 @@
         <a:cs typeface="+mn-cs"/>
       </a:defRPr>
     </a:lvl9pPr>
-  </p:defaultTextStyle>
-  <p:extLst>
-    <p:ext uri="{EFAFB233-063F-42B5-8137-9DF3F51BA10A}">
-      <p15:sldGuideLst xmlns:p15="http://schemas.microsoft.com/office/powerpoint/2012/main"/>
-    </p:ext>
-  </p:extLst>
-</p:presentation>
+  </p:notesStyle>
+</p:notesMaster>
+</file>
+
+<file path=ppt/notesSlides/notesSlide1.xml><?xml version="1.0" encoding="utf-8"?>
+<p:notes xmlns:a="http://schemas.openxmlformats.org/drawingml/2006/main" xmlns:r="http://schemas.openxmlformats.org/officeDocument/2006/relationships" xmlns:p="http://schemas.openxmlformats.org/presentationml/2006/main">
+  <p:cSld>
+    <p:spTree>
+      <p:nvGrpSpPr>
+        <p:cNvPr id="1" name=""/>
+        <p:cNvGrpSpPr/>
+        <p:nvPr/>
+      </p:nvGrpSpPr>
+      <p:grpSpPr>
+        <a:xfrm>
+          <a:off x="0" y="0"/>
+          <a:ext cx="0" cy="0"/>
+          <a:chOff x="0" y="0"/>
+          <a:chExt cx="0" cy="0"/>
+        </a:xfrm>
+      </p:grpSpPr>
+      <p:sp>
+        <p:nvSpPr>
+          <p:cNvPr id="2" name="スライド イメージ プレースホルダー 1"/>
+          <p:cNvSpPr>
+            <a:spLocks noGrp="1" noRot="1" noChangeAspect="1"/>
+          </p:cNvSpPr>
+          <p:nvPr>
+            <p:ph type="sldImg"/>
+          </p:nvPr>
+        </p:nvSpPr>
+        <p:spPr/>
+      </p:sp>
+      <p:sp>
+        <p:nvSpPr>
+          <p:cNvPr id="3" name="ノート プレースホルダー 2"/>
+          <p:cNvSpPr>
+            <a:spLocks noGrp="1"/>
+          </p:cNvSpPr>
+          <p:nvPr>
+            <p:ph type="body" idx="1"/>
+          </p:nvPr>
+        </p:nvSpPr>
+        <p:spPr/>
+        <p:txBody>
+          <a:bodyPr/>
+          <a:lstStyle/>
+          <a:p>
+            <a:endParaRPr kumimoji="1" lang="ja-JP" altLang="en-US"/>
+          </a:p>
+        </p:txBody>
+      </p:sp>
+      <p:sp>
+        <p:nvSpPr>
+          <p:cNvPr id="4" name="スライド番号プレースホルダー 3"/>
+          <p:cNvSpPr>
+            <a:spLocks noGrp="1"/>
+          </p:cNvSpPr>
+          <p:nvPr>
+            <p:ph type="sldNum" sz="quarter" idx="10"/>
+          </p:nvPr>
+        </p:nvSpPr>
+        <p:spPr/>
+        <p:txBody>
+          <a:bodyPr/>
+          <a:lstStyle/>
+          <a:p>
+            <a:fld id="{E52881CC-9F38-498C-A2E2-836886D49A11}" type="slidenum">
+              <a:rPr lang="ja-JP" altLang="en-US" smtClean="0"/>
+              <a:pPr/>
+              <a:t>1</a:t>
+            </a:fld>
+            <a:endParaRPr lang="en-US" altLang="ja-JP"/>
+          </a:p>
+        </p:txBody>
+      </p:sp>
+    </p:spTree>
+    <p:extLst>
+      <p:ext uri="{BB962C8B-B14F-4D97-AF65-F5344CB8AC3E}">
+        <p14:creationId xmlns:p14="http://schemas.microsoft.com/office/powerpoint/2010/main" val="2160033090"/>
+      </p:ext>
+    </p:extLst>
+  </p:cSld>
+  <p:clrMapOvr>
+    <a:masterClrMapping/>
+  </p:clrMapOvr>
+</p:notes>
 </file>
 
 <file path=ppt/slideLayouts/slideLayout1.xml><?xml version="1.0" encoding="utf-8"?>
@@ -131,7 +1213,7 @@
       </p:grpSpPr>
       <p:sp>
         <p:nvSpPr>
-          <p:cNvPr id="2" name="Title 1"/>
+          <p:cNvPr id="2" name="タイトル 1"/>
           <p:cNvSpPr>
             <a:spLocks noGrp="1"/>
           </p:cNvSpPr>
@@ -141,29 +1223,24 @@
         </p:nvSpPr>
         <p:spPr>
           <a:xfrm>
-            <a:off x="876419" y="1418022"/>
-            <a:ext cx="9932750" cy="3016556"/>
+            <a:off x="617339" y="1917880"/>
+            <a:ext cx="6996510" cy="1323363"/>
           </a:xfrm>
         </p:spPr>
         <p:txBody>
-          <a:bodyPr anchor="b"/>
-          <a:lstStyle>
-            <a:lvl1pPr algn="ctr">
-              <a:defRPr sz="7580"/>
-            </a:lvl1pPr>
-          </a:lstStyle>
-          <a:p>
-            <a:r>
-              <a:rPr lang="ja-JP" altLang="en-US"/>
+          <a:bodyPr/>
+          <a:lstStyle/>
+          <a:p>
+            <a:r>
+              <a:rPr kumimoji="1" lang="ja-JP" altLang="en-US"/>
               <a:t>マスター タイトルの書式設定</a:t>
             </a:r>
-            <a:endParaRPr lang="en-US" dirty="0"/>
-          </a:p>
-        </p:txBody>
-      </p:sp>
-      <p:sp>
-        <p:nvSpPr>
-          <p:cNvPr id="3" name="Subtitle 2"/>
+          </a:p>
+        </p:txBody>
+      </p:sp>
+      <p:sp>
+        <p:nvSpPr>
+          <p:cNvPr id="3" name="サブタイトル 2"/>
           <p:cNvSpPr>
             <a:spLocks noGrp="1"/>
           </p:cNvSpPr>
@@ -173,8 +1250,8 @@
         </p:nvSpPr>
         <p:spPr>
           <a:xfrm>
-            <a:off x="1460699" y="4550908"/>
-            <a:ext cx="8764191" cy="2091933"/>
+            <a:off x="1234678" y="3498480"/>
+            <a:ext cx="5761832" cy="1577746"/>
           </a:xfrm>
         </p:spPr>
         <p:txBody>
@@ -182,53 +1259,106 @@
           <a:lstStyle>
             <a:lvl1pPr marL="0" indent="0" algn="ctr">
               <a:buNone/>
-              <a:defRPr sz="3032"/>
+              <a:defRPr>
+                <a:solidFill>
+                  <a:schemeClr val="tx1">
+                    <a:tint val="75000"/>
+                  </a:schemeClr>
+                </a:solidFill>
+              </a:defRPr>
             </a:lvl1pPr>
-            <a:lvl2pPr marL="577626" indent="0" algn="ctr">
-              <a:buNone/>
-              <a:defRPr sz="2527"/>
+            <a:lvl2pPr marL="411248" indent="0" algn="ctr">
+              <a:buNone/>
+              <a:defRPr>
+                <a:solidFill>
+                  <a:schemeClr val="tx1">
+                    <a:tint val="75000"/>
+                  </a:schemeClr>
+                </a:solidFill>
+              </a:defRPr>
             </a:lvl2pPr>
-            <a:lvl3pPr marL="1155253" indent="0" algn="ctr">
-              <a:buNone/>
-              <a:defRPr sz="2274"/>
+            <a:lvl3pPr marL="822495" indent="0" algn="ctr">
+              <a:buNone/>
+              <a:defRPr>
+                <a:solidFill>
+                  <a:schemeClr val="tx1">
+                    <a:tint val="75000"/>
+                  </a:schemeClr>
+                </a:solidFill>
+              </a:defRPr>
             </a:lvl3pPr>
-            <a:lvl4pPr marL="1732879" indent="0" algn="ctr">
-              <a:buNone/>
-              <a:defRPr sz="2021"/>
+            <a:lvl4pPr marL="1233744" indent="0" algn="ctr">
+              <a:buNone/>
+              <a:defRPr>
+                <a:solidFill>
+                  <a:schemeClr val="tx1">
+                    <a:tint val="75000"/>
+                  </a:schemeClr>
+                </a:solidFill>
+              </a:defRPr>
             </a:lvl4pPr>
-            <a:lvl5pPr marL="2310506" indent="0" algn="ctr">
-              <a:buNone/>
-              <a:defRPr sz="2021"/>
+            <a:lvl5pPr marL="1644991" indent="0" algn="ctr">
+              <a:buNone/>
+              <a:defRPr>
+                <a:solidFill>
+                  <a:schemeClr val="tx1">
+                    <a:tint val="75000"/>
+                  </a:schemeClr>
+                </a:solidFill>
+              </a:defRPr>
             </a:lvl5pPr>
-            <a:lvl6pPr marL="2888132" indent="0" algn="ctr">
-              <a:buNone/>
-              <a:defRPr sz="2021"/>
+            <a:lvl6pPr marL="2056239" indent="0" algn="ctr">
+              <a:buNone/>
+              <a:defRPr>
+                <a:solidFill>
+                  <a:schemeClr val="tx1">
+                    <a:tint val="75000"/>
+                  </a:schemeClr>
+                </a:solidFill>
+              </a:defRPr>
             </a:lvl6pPr>
-            <a:lvl7pPr marL="3465759" indent="0" algn="ctr">
-              <a:buNone/>
-              <a:defRPr sz="2021"/>
+            <a:lvl7pPr marL="2467486" indent="0" algn="ctr">
+              <a:buNone/>
+              <a:defRPr>
+                <a:solidFill>
+                  <a:schemeClr val="tx1">
+                    <a:tint val="75000"/>
+                  </a:schemeClr>
+                </a:solidFill>
+              </a:defRPr>
             </a:lvl7pPr>
-            <a:lvl8pPr marL="4043385" indent="0" algn="ctr">
-              <a:buNone/>
-              <a:defRPr sz="2021"/>
+            <a:lvl8pPr marL="2878732" indent="0" algn="ctr">
+              <a:buNone/>
+              <a:defRPr>
+                <a:solidFill>
+                  <a:schemeClr val="tx1">
+                    <a:tint val="75000"/>
+                  </a:schemeClr>
+                </a:solidFill>
+              </a:defRPr>
             </a:lvl8pPr>
-            <a:lvl9pPr marL="4621012" indent="0" algn="ctr">
-              <a:buNone/>
-              <a:defRPr sz="2021"/>
+            <a:lvl9pPr marL="3289981" indent="0" algn="ctr">
+              <a:buNone/>
+              <a:defRPr>
+                <a:solidFill>
+                  <a:schemeClr val="tx1">
+                    <a:tint val="75000"/>
+                  </a:schemeClr>
+                </a:solidFill>
+              </a:defRPr>
             </a:lvl9pPr>
           </a:lstStyle>
           <a:p>
             <a:r>
-              <a:rPr lang="ja-JP" altLang="en-US"/>
+              <a:rPr kumimoji="1" lang="ja-JP" altLang="en-US"/>
               <a:t>マスター サブタイトルの書式設定</a:t>
             </a:r>
-            <a:endParaRPr lang="en-US" dirty="0"/>
-          </a:p>
-        </p:txBody>
-      </p:sp>
-      <p:sp>
-        <p:nvSpPr>
-          <p:cNvPr id="4" name="Date Placeholder 3"/>
+          </a:p>
+        </p:txBody>
+      </p:sp>
+      <p:sp>
+        <p:nvSpPr>
+          <p:cNvPr id="4" name="日付プレースホルダー 3"/>
           <p:cNvSpPr>
             <a:spLocks noGrp="1"/>
           </p:cNvSpPr>
@@ -241,17 +1371,13 @@
           <a:bodyPr/>
           <a:lstStyle/>
           <a:p>
-            <a:fld id="{334D96BB-04BE-47A7-A37E-F93A28770C7D}" type="datetimeFigureOut">
-              <a:rPr kumimoji="1" lang="ja-JP" altLang="en-US" smtClean="0"/>
-              <a:t>2026/4/5</a:t>
-            </a:fld>
-            <a:endParaRPr kumimoji="1" lang="ja-JP" altLang="en-US"/>
-          </a:p>
-        </p:txBody>
-      </p:sp>
-      <p:sp>
-        <p:nvSpPr>
-          <p:cNvPr id="5" name="Footer Placeholder 4"/>
+            <a:endParaRPr lang="en-US" altLang="ja-JP"/>
+          </a:p>
+        </p:txBody>
+      </p:sp>
+      <p:sp>
+        <p:nvSpPr>
+          <p:cNvPr id="5" name="フッター プレースホルダー 4"/>
           <p:cNvSpPr>
             <a:spLocks noGrp="1"/>
           </p:cNvSpPr>
@@ -264,13 +1390,13 @@
           <a:bodyPr/>
           <a:lstStyle/>
           <a:p>
-            <a:endParaRPr kumimoji="1" lang="ja-JP" altLang="en-US"/>
-          </a:p>
-        </p:txBody>
-      </p:sp>
-      <p:sp>
-        <p:nvSpPr>
-          <p:cNvPr id="6" name="Slide Number Placeholder 5"/>
+            <a:endParaRPr lang="en-US" altLang="ja-JP"/>
+          </a:p>
+        </p:txBody>
+      </p:sp>
+      <p:sp>
+        <p:nvSpPr>
+          <p:cNvPr id="6" name="スライド番号プレースホルダー 5"/>
           <p:cNvSpPr>
             <a:spLocks noGrp="1"/>
           </p:cNvSpPr>
@@ -283,18 +1409,19 @@
           <a:bodyPr/>
           <a:lstStyle/>
           <a:p>
-            <a:fld id="{B245FAAB-DB64-4F58-895C-CA58F032C6F6}" type="slidenum">
-              <a:rPr kumimoji="1" lang="ja-JP" altLang="en-US" smtClean="0"/>
+            <a:fld id="{7270C3F3-94B9-40C0-8A49-10DDC82DBCB0}" type="slidenum">
+              <a:rPr lang="ja-JP" altLang="en-US" smtClean="0"/>
+              <a:pPr/>
               <a:t>‹#›</a:t>
             </a:fld>
-            <a:endParaRPr kumimoji="1" lang="ja-JP" altLang="en-US"/>
+            <a:endParaRPr lang="en-US" altLang="ja-JP"/>
           </a:p>
         </p:txBody>
       </p:sp>
     </p:spTree>
     <p:extLst>
       <p:ext uri="{BB962C8B-B14F-4D97-AF65-F5344CB8AC3E}">
-        <p14:creationId xmlns:p14="http://schemas.microsoft.com/office/powerpoint/2010/main" val="3951943956"/>
+        <p14:creationId xmlns:p14="http://schemas.microsoft.com/office/powerpoint/2010/main" val="2507688672"/>
       </p:ext>
     </p:extLst>
   </p:cSld>
@@ -306,7 +1433,7 @@
 
 <file path=ppt/slideLayouts/slideLayout10.xml><?xml version="1.0" encoding="utf-8"?>
 <p:sldLayout xmlns:a="http://schemas.openxmlformats.org/drawingml/2006/main" xmlns:r="http://schemas.openxmlformats.org/officeDocument/2006/relationships" xmlns:p="http://schemas.openxmlformats.org/presentationml/2006/main" type="vertTx" preserve="1">
-  <p:cSld name="タイトルと縦書きテキスト">
+  <p:cSld name="タイトルと&#10;縦書きテキスト">
     <p:spTree>
       <p:nvGrpSpPr>
         <p:cNvPr id="1" name=""/>
@@ -323,7 +1450,7 @@
       </p:grpSpPr>
       <p:sp>
         <p:nvSpPr>
-          <p:cNvPr id="2" name="Title 1"/>
+          <p:cNvPr id="2" name="タイトル 1"/>
           <p:cNvSpPr>
             <a:spLocks noGrp="1"/>
           </p:cNvSpPr>
@@ -337,16 +1464,15 @@
           <a:lstStyle/>
           <a:p>
             <a:r>
-              <a:rPr lang="ja-JP" altLang="en-US"/>
+              <a:rPr kumimoji="1" lang="ja-JP" altLang="en-US"/>
               <a:t>マスター タイトルの書式設定</a:t>
             </a:r>
-            <a:endParaRPr lang="en-US" dirty="0"/>
-          </a:p>
-        </p:txBody>
-      </p:sp>
-      <p:sp>
-        <p:nvSpPr>
-          <p:cNvPr id="3" name="Vertical Text Placeholder 2"/>
+          </a:p>
+        </p:txBody>
+      </p:sp>
+      <p:sp>
+        <p:nvSpPr>
+          <p:cNvPr id="3" name="縦書きテキスト プレースホルダー 2"/>
           <p:cNvSpPr>
             <a:spLocks noGrp="1"/>
           </p:cNvSpPr>
@@ -361,76 +1487,75 @@
           <a:p>
             <a:pPr lvl="0"/>
             <a:r>
-              <a:rPr lang="ja-JP" altLang="en-US"/>
+              <a:rPr kumimoji="1" lang="ja-JP" altLang="en-US"/>
               <a:t>マスター テキストの書式設定</a:t>
             </a:r>
           </a:p>
           <a:p>
             <a:pPr lvl="1"/>
             <a:r>
-              <a:rPr lang="ja-JP" altLang="en-US"/>
+              <a:rPr kumimoji="1" lang="ja-JP" altLang="en-US"/>
               <a:t>第 </a:t>
             </a:r>
             <a:r>
-              <a:rPr lang="en-US" altLang="ja-JP"/>
+              <a:rPr kumimoji="1" lang="en-US" altLang="ja-JP"/>
               <a:t>2 </a:t>
             </a:r>
             <a:r>
-              <a:rPr lang="ja-JP" altLang="en-US"/>
+              <a:rPr kumimoji="1" lang="ja-JP" altLang="en-US"/>
               <a:t>レベル</a:t>
             </a:r>
           </a:p>
           <a:p>
             <a:pPr lvl="2"/>
             <a:r>
-              <a:rPr lang="ja-JP" altLang="en-US"/>
+              <a:rPr kumimoji="1" lang="ja-JP" altLang="en-US"/>
               <a:t>第 </a:t>
             </a:r>
             <a:r>
-              <a:rPr lang="en-US" altLang="ja-JP"/>
+              <a:rPr kumimoji="1" lang="en-US" altLang="ja-JP"/>
               <a:t>3 </a:t>
             </a:r>
             <a:r>
-              <a:rPr lang="ja-JP" altLang="en-US"/>
+              <a:rPr kumimoji="1" lang="ja-JP" altLang="en-US"/>
               <a:t>レベル</a:t>
             </a:r>
           </a:p>
           <a:p>
             <a:pPr lvl="3"/>
             <a:r>
-              <a:rPr lang="ja-JP" altLang="en-US"/>
+              <a:rPr kumimoji="1" lang="ja-JP" altLang="en-US"/>
               <a:t>第 </a:t>
             </a:r>
             <a:r>
-              <a:rPr lang="en-US" altLang="ja-JP"/>
+              <a:rPr kumimoji="1" lang="en-US" altLang="ja-JP"/>
               <a:t>4 </a:t>
             </a:r>
             <a:r>
-              <a:rPr lang="ja-JP" altLang="en-US"/>
+              <a:rPr kumimoji="1" lang="ja-JP" altLang="en-US"/>
               <a:t>レベル</a:t>
             </a:r>
           </a:p>
           <a:p>
             <a:pPr lvl="4"/>
             <a:r>
-              <a:rPr lang="ja-JP" altLang="en-US"/>
+              <a:rPr kumimoji="1" lang="ja-JP" altLang="en-US"/>
               <a:t>第 </a:t>
             </a:r>
             <a:r>
-              <a:rPr lang="en-US" altLang="ja-JP"/>
+              <a:rPr kumimoji="1" lang="en-US" altLang="ja-JP"/>
               <a:t>5 </a:t>
             </a:r>
             <a:r>
-              <a:rPr lang="ja-JP" altLang="en-US"/>
+              <a:rPr kumimoji="1" lang="ja-JP" altLang="en-US"/>
               <a:t>レベル</a:t>
             </a:r>
-            <a:endParaRPr lang="en-US" dirty="0"/>
-          </a:p>
-        </p:txBody>
-      </p:sp>
-      <p:sp>
-        <p:nvSpPr>
-          <p:cNvPr id="4" name="Date Placeholder 3"/>
+          </a:p>
+        </p:txBody>
+      </p:sp>
+      <p:sp>
+        <p:nvSpPr>
+          <p:cNvPr id="4" name="日付プレースホルダー 3"/>
           <p:cNvSpPr>
             <a:spLocks noGrp="1"/>
           </p:cNvSpPr>
@@ -443,17 +1568,13 @@
           <a:bodyPr/>
           <a:lstStyle/>
           <a:p>
-            <a:fld id="{334D96BB-04BE-47A7-A37E-F93A28770C7D}" type="datetimeFigureOut">
-              <a:rPr kumimoji="1" lang="ja-JP" altLang="en-US" smtClean="0"/>
-              <a:t>2026/4/5</a:t>
-            </a:fld>
-            <a:endParaRPr kumimoji="1" lang="ja-JP" altLang="en-US"/>
-          </a:p>
-        </p:txBody>
-      </p:sp>
-      <p:sp>
-        <p:nvSpPr>
-          <p:cNvPr id="5" name="Footer Placeholder 4"/>
+            <a:endParaRPr lang="en-US" altLang="ja-JP"/>
+          </a:p>
+        </p:txBody>
+      </p:sp>
+      <p:sp>
+        <p:nvSpPr>
+          <p:cNvPr id="5" name="フッター プレースホルダー 4"/>
           <p:cNvSpPr>
             <a:spLocks noGrp="1"/>
           </p:cNvSpPr>
@@ -466,13 +1587,13 @@
           <a:bodyPr/>
           <a:lstStyle/>
           <a:p>
-            <a:endParaRPr kumimoji="1" lang="ja-JP" altLang="en-US"/>
-          </a:p>
-        </p:txBody>
-      </p:sp>
-      <p:sp>
-        <p:nvSpPr>
-          <p:cNvPr id="6" name="Slide Number Placeholder 5"/>
+            <a:endParaRPr lang="en-US" altLang="ja-JP"/>
+          </a:p>
+        </p:txBody>
+      </p:sp>
+      <p:sp>
+        <p:nvSpPr>
+          <p:cNvPr id="6" name="スライド番号プレースホルダー 5"/>
           <p:cNvSpPr>
             <a:spLocks noGrp="1"/>
           </p:cNvSpPr>
@@ -485,18 +1606,19 @@
           <a:bodyPr/>
           <a:lstStyle/>
           <a:p>
-            <a:fld id="{B245FAAB-DB64-4F58-895C-CA58F032C6F6}" type="slidenum">
-              <a:rPr kumimoji="1" lang="ja-JP" altLang="en-US" smtClean="0"/>
+            <a:fld id="{4EF1931B-EDBD-4598-B658-7F3F301CC654}" type="slidenum">
+              <a:rPr lang="ja-JP" altLang="en-US" smtClean="0"/>
+              <a:pPr/>
               <a:t>‹#›</a:t>
             </a:fld>
-            <a:endParaRPr kumimoji="1" lang="ja-JP" altLang="en-US"/>
+            <a:endParaRPr lang="en-US" altLang="ja-JP"/>
           </a:p>
         </p:txBody>
       </p:sp>
     </p:spTree>
     <p:extLst>
       <p:ext uri="{BB962C8B-B14F-4D97-AF65-F5344CB8AC3E}">
-        <p14:creationId xmlns:p14="http://schemas.microsoft.com/office/powerpoint/2010/main" val="931548303"/>
+        <p14:creationId xmlns:p14="http://schemas.microsoft.com/office/powerpoint/2010/main" val="1454053746"/>
       </p:ext>
     </p:extLst>
   </p:cSld>
@@ -525,7 +1647,7 @@
       </p:grpSpPr>
       <p:sp>
         <p:nvSpPr>
-          <p:cNvPr id="2" name="Vertical Title 1"/>
+          <p:cNvPr id="2" name="縦書きタイトル 1"/>
           <p:cNvSpPr>
             <a:spLocks noGrp="1"/>
           </p:cNvSpPr>
@@ -535,8 +1657,8 @@
         </p:nvSpPr>
         <p:spPr>
           <a:xfrm>
-            <a:off x="8362500" y="461308"/>
-            <a:ext cx="2519705" cy="7342827"/>
+            <a:off x="5373137" y="222946"/>
+            <a:ext cx="1666244" cy="4741812"/>
           </a:xfrm>
         </p:spPr>
         <p:txBody>
@@ -544,16 +1666,15 @@
           <a:lstStyle/>
           <a:p>
             <a:r>
-              <a:rPr lang="ja-JP" altLang="en-US"/>
+              <a:rPr kumimoji="1" lang="ja-JP" altLang="en-US"/>
               <a:t>マスター タイトルの書式設定</a:t>
             </a:r>
-            <a:endParaRPr lang="en-US" dirty="0"/>
-          </a:p>
-        </p:txBody>
-      </p:sp>
-      <p:sp>
-        <p:nvSpPr>
-          <p:cNvPr id="3" name="Vertical Text Placeholder 2"/>
+          </a:p>
+        </p:txBody>
+      </p:sp>
+      <p:sp>
+        <p:nvSpPr>
+          <p:cNvPr id="3" name="縦書きテキスト プレースホルダー 2"/>
           <p:cNvSpPr>
             <a:spLocks noGrp="1"/>
           </p:cNvSpPr>
@@ -563,8 +1684,8 @@
         </p:nvSpPr>
         <p:spPr>
           <a:xfrm>
-            <a:off x="803385" y="461308"/>
-            <a:ext cx="7413045" cy="7342827"/>
+            <a:off x="370119" y="222946"/>
+            <a:ext cx="4865832" cy="4741812"/>
           </a:xfrm>
         </p:spPr>
         <p:txBody>
@@ -573,76 +1694,75 @@
           <a:p>
             <a:pPr lvl="0"/>
             <a:r>
-              <a:rPr lang="ja-JP" altLang="en-US"/>
+              <a:rPr kumimoji="1" lang="ja-JP" altLang="en-US"/>
               <a:t>マスター テキストの書式設定</a:t>
             </a:r>
           </a:p>
           <a:p>
             <a:pPr lvl="1"/>
             <a:r>
-              <a:rPr lang="ja-JP" altLang="en-US"/>
+              <a:rPr kumimoji="1" lang="ja-JP" altLang="en-US"/>
               <a:t>第 </a:t>
             </a:r>
             <a:r>
-              <a:rPr lang="en-US" altLang="ja-JP"/>
+              <a:rPr kumimoji="1" lang="en-US" altLang="ja-JP"/>
               <a:t>2 </a:t>
             </a:r>
             <a:r>
-              <a:rPr lang="ja-JP" altLang="en-US"/>
+              <a:rPr kumimoji="1" lang="ja-JP" altLang="en-US"/>
               <a:t>レベル</a:t>
             </a:r>
           </a:p>
           <a:p>
             <a:pPr lvl="2"/>
             <a:r>
-              <a:rPr lang="ja-JP" altLang="en-US"/>
+              <a:rPr kumimoji="1" lang="ja-JP" altLang="en-US"/>
               <a:t>第 </a:t>
             </a:r>
             <a:r>
-              <a:rPr lang="en-US" altLang="ja-JP"/>
+              <a:rPr kumimoji="1" lang="en-US" altLang="ja-JP"/>
               <a:t>3 </a:t>
             </a:r>
             <a:r>
-              <a:rPr lang="ja-JP" altLang="en-US"/>
+              <a:rPr kumimoji="1" lang="ja-JP" altLang="en-US"/>
               <a:t>レベル</a:t>
             </a:r>
           </a:p>
           <a:p>
             <a:pPr lvl="3"/>
             <a:r>
-              <a:rPr lang="ja-JP" altLang="en-US"/>
+              <a:rPr kumimoji="1" lang="ja-JP" altLang="en-US"/>
               <a:t>第 </a:t>
             </a:r>
             <a:r>
-              <a:rPr lang="en-US" altLang="ja-JP"/>
+              <a:rPr kumimoji="1" lang="en-US" altLang="ja-JP"/>
               <a:t>4 </a:t>
             </a:r>
             <a:r>
-              <a:rPr lang="ja-JP" altLang="en-US"/>
+              <a:rPr kumimoji="1" lang="ja-JP" altLang="en-US"/>
               <a:t>レベル</a:t>
             </a:r>
           </a:p>
           <a:p>
             <a:pPr lvl="4"/>
             <a:r>
-              <a:rPr lang="ja-JP" altLang="en-US"/>
+              <a:rPr kumimoji="1" lang="ja-JP" altLang="en-US"/>
               <a:t>第 </a:t>
             </a:r>
             <a:r>
-              <a:rPr lang="en-US" altLang="ja-JP"/>
+              <a:rPr kumimoji="1" lang="en-US" altLang="ja-JP"/>
               <a:t>5 </a:t>
             </a:r>
             <a:r>
-              <a:rPr lang="ja-JP" altLang="en-US"/>
+              <a:rPr kumimoji="1" lang="ja-JP" altLang="en-US"/>
               <a:t>レベル</a:t>
             </a:r>
-            <a:endParaRPr lang="en-US" dirty="0"/>
-          </a:p>
-        </p:txBody>
-      </p:sp>
-      <p:sp>
-        <p:nvSpPr>
-          <p:cNvPr id="4" name="Date Placeholder 3"/>
+          </a:p>
+        </p:txBody>
+      </p:sp>
+      <p:sp>
+        <p:nvSpPr>
+          <p:cNvPr id="4" name="日付プレースホルダー 3"/>
           <p:cNvSpPr>
             <a:spLocks noGrp="1"/>
           </p:cNvSpPr>
@@ -655,17 +1775,13 @@
           <a:bodyPr/>
           <a:lstStyle/>
           <a:p>
-            <a:fld id="{334D96BB-04BE-47A7-A37E-F93A28770C7D}" type="datetimeFigureOut">
-              <a:rPr kumimoji="1" lang="ja-JP" altLang="en-US" smtClean="0"/>
-              <a:t>2026/4/5</a:t>
-            </a:fld>
-            <a:endParaRPr kumimoji="1" lang="ja-JP" altLang="en-US"/>
-          </a:p>
-        </p:txBody>
-      </p:sp>
-      <p:sp>
-        <p:nvSpPr>
-          <p:cNvPr id="5" name="Footer Placeholder 4"/>
+            <a:endParaRPr lang="en-US" altLang="ja-JP"/>
+          </a:p>
+        </p:txBody>
+      </p:sp>
+      <p:sp>
+        <p:nvSpPr>
+          <p:cNvPr id="5" name="フッター プレースホルダー 4"/>
           <p:cNvSpPr>
             <a:spLocks noGrp="1"/>
           </p:cNvSpPr>
@@ -678,13 +1794,13 @@
           <a:bodyPr/>
           <a:lstStyle/>
           <a:p>
-            <a:endParaRPr kumimoji="1" lang="ja-JP" altLang="en-US"/>
-          </a:p>
-        </p:txBody>
-      </p:sp>
-      <p:sp>
-        <p:nvSpPr>
-          <p:cNvPr id="6" name="Slide Number Placeholder 5"/>
+            <a:endParaRPr lang="en-US" altLang="ja-JP"/>
+          </a:p>
+        </p:txBody>
+      </p:sp>
+      <p:sp>
+        <p:nvSpPr>
+          <p:cNvPr id="6" name="スライド番号プレースホルダー 5"/>
           <p:cNvSpPr>
             <a:spLocks noGrp="1"/>
           </p:cNvSpPr>
@@ -697,18 +1813,19 @@
           <a:bodyPr/>
           <a:lstStyle/>
           <a:p>
-            <a:fld id="{B245FAAB-DB64-4F58-895C-CA58F032C6F6}" type="slidenum">
-              <a:rPr kumimoji="1" lang="ja-JP" altLang="en-US" smtClean="0"/>
+            <a:fld id="{9F7BFB91-B03B-4102-856F-5C50DEE1D6DF}" type="slidenum">
+              <a:rPr lang="ja-JP" altLang="en-US" smtClean="0"/>
+              <a:pPr/>
               <a:t>‹#›</a:t>
             </a:fld>
-            <a:endParaRPr kumimoji="1" lang="ja-JP" altLang="en-US"/>
+            <a:endParaRPr lang="en-US" altLang="ja-JP"/>
           </a:p>
         </p:txBody>
       </p:sp>
     </p:spTree>
     <p:extLst>
       <p:ext uri="{BB962C8B-B14F-4D97-AF65-F5344CB8AC3E}">
-        <p14:creationId xmlns:p14="http://schemas.microsoft.com/office/powerpoint/2010/main" val="534232319"/>
+        <p14:creationId xmlns:p14="http://schemas.microsoft.com/office/powerpoint/2010/main" val="2250233715"/>
       </p:ext>
     </p:extLst>
   </p:cSld>
@@ -737,7 +1854,7 @@
       </p:grpSpPr>
       <p:sp>
         <p:nvSpPr>
-          <p:cNvPr id="2" name="Title 1"/>
+          <p:cNvPr id="2" name="タイトル 1"/>
           <p:cNvSpPr>
             <a:spLocks noGrp="1"/>
           </p:cNvSpPr>
@@ -751,16 +1868,15 @@
           <a:lstStyle/>
           <a:p>
             <a:r>
-              <a:rPr lang="ja-JP" altLang="en-US"/>
+              <a:rPr kumimoji="1" lang="ja-JP" altLang="en-US"/>
               <a:t>マスター タイトルの書式設定</a:t>
             </a:r>
-            <a:endParaRPr lang="en-US" dirty="0"/>
-          </a:p>
-        </p:txBody>
-      </p:sp>
-      <p:sp>
-        <p:nvSpPr>
-          <p:cNvPr id="3" name="Content Placeholder 2"/>
+          </a:p>
+        </p:txBody>
+      </p:sp>
+      <p:sp>
+        <p:nvSpPr>
+          <p:cNvPr id="3" name="コンテンツ プレースホルダー 2"/>
           <p:cNvSpPr>
             <a:spLocks noGrp="1"/>
           </p:cNvSpPr>
@@ -775,76 +1891,75 @@
           <a:p>
             <a:pPr lvl="0"/>
             <a:r>
-              <a:rPr lang="ja-JP" altLang="en-US"/>
+              <a:rPr kumimoji="1" lang="ja-JP" altLang="en-US"/>
               <a:t>マスター テキストの書式設定</a:t>
             </a:r>
           </a:p>
           <a:p>
             <a:pPr lvl="1"/>
             <a:r>
-              <a:rPr lang="ja-JP" altLang="en-US"/>
+              <a:rPr kumimoji="1" lang="ja-JP" altLang="en-US"/>
               <a:t>第 </a:t>
             </a:r>
             <a:r>
-              <a:rPr lang="en-US" altLang="ja-JP"/>
+              <a:rPr kumimoji="1" lang="en-US" altLang="ja-JP"/>
               <a:t>2 </a:t>
             </a:r>
             <a:r>
-              <a:rPr lang="ja-JP" altLang="en-US"/>
+              <a:rPr kumimoji="1" lang="ja-JP" altLang="en-US"/>
               <a:t>レベル</a:t>
             </a:r>
           </a:p>
           <a:p>
             <a:pPr lvl="2"/>
             <a:r>
-              <a:rPr lang="ja-JP" altLang="en-US"/>
+              <a:rPr kumimoji="1" lang="ja-JP" altLang="en-US"/>
               <a:t>第 </a:t>
             </a:r>
             <a:r>
-              <a:rPr lang="en-US" altLang="ja-JP"/>
+              <a:rPr kumimoji="1" lang="en-US" altLang="ja-JP"/>
               <a:t>3 </a:t>
             </a:r>
             <a:r>
-              <a:rPr lang="ja-JP" altLang="en-US"/>
+              <a:rPr kumimoji="1" lang="ja-JP" altLang="en-US"/>
               <a:t>レベル</a:t>
             </a:r>
           </a:p>
           <a:p>
             <a:pPr lvl="3"/>
             <a:r>
-              <a:rPr lang="ja-JP" altLang="en-US"/>
+              <a:rPr kumimoji="1" lang="ja-JP" altLang="en-US"/>
               <a:t>第 </a:t>
             </a:r>
             <a:r>
-              <a:rPr lang="en-US" altLang="ja-JP"/>
+              <a:rPr kumimoji="1" lang="en-US" altLang="ja-JP"/>
               <a:t>4 </a:t>
             </a:r>
             <a:r>
-              <a:rPr lang="ja-JP" altLang="en-US"/>
+              <a:rPr kumimoji="1" lang="ja-JP" altLang="en-US"/>
               <a:t>レベル</a:t>
             </a:r>
           </a:p>
           <a:p>
             <a:pPr lvl="4"/>
             <a:r>
-              <a:rPr lang="ja-JP" altLang="en-US"/>
+              <a:rPr kumimoji="1" lang="ja-JP" altLang="en-US"/>
               <a:t>第 </a:t>
             </a:r>
             <a:r>
-              <a:rPr lang="en-US" altLang="ja-JP"/>
+              <a:rPr kumimoji="1" lang="en-US" altLang="ja-JP"/>
               <a:t>5 </a:t>
             </a:r>
             <a:r>
-              <a:rPr lang="ja-JP" altLang="en-US"/>
+              <a:rPr kumimoji="1" lang="ja-JP" altLang="en-US"/>
               <a:t>レベル</a:t>
             </a:r>
-            <a:endParaRPr lang="en-US" dirty="0"/>
-          </a:p>
-        </p:txBody>
-      </p:sp>
-      <p:sp>
-        <p:nvSpPr>
-          <p:cNvPr id="4" name="Date Placeholder 3"/>
+          </a:p>
+        </p:txBody>
+      </p:sp>
+      <p:sp>
+        <p:nvSpPr>
+          <p:cNvPr id="4" name="日付プレースホルダー 3"/>
           <p:cNvSpPr>
             <a:spLocks noGrp="1"/>
           </p:cNvSpPr>
@@ -857,17 +1972,13 @@
           <a:bodyPr/>
           <a:lstStyle/>
           <a:p>
-            <a:fld id="{334D96BB-04BE-47A7-A37E-F93A28770C7D}" type="datetimeFigureOut">
-              <a:rPr kumimoji="1" lang="ja-JP" altLang="en-US" smtClean="0"/>
-              <a:t>2026/4/5</a:t>
-            </a:fld>
-            <a:endParaRPr kumimoji="1" lang="ja-JP" altLang="en-US"/>
-          </a:p>
-        </p:txBody>
-      </p:sp>
-      <p:sp>
-        <p:nvSpPr>
-          <p:cNvPr id="5" name="Footer Placeholder 4"/>
+            <a:endParaRPr lang="en-US" altLang="ja-JP"/>
+          </a:p>
+        </p:txBody>
+      </p:sp>
+      <p:sp>
+        <p:nvSpPr>
+          <p:cNvPr id="5" name="フッター プレースホルダー 4"/>
           <p:cNvSpPr>
             <a:spLocks noGrp="1"/>
           </p:cNvSpPr>
@@ -880,13 +1991,13 @@
           <a:bodyPr/>
           <a:lstStyle/>
           <a:p>
-            <a:endParaRPr kumimoji="1" lang="ja-JP" altLang="en-US"/>
-          </a:p>
-        </p:txBody>
-      </p:sp>
-      <p:sp>
-        <p:nvSpPr>
-          <p:cNvPr id="6" name="Slide Number Placeholder 5"/>
+            <a:endParaRPr lang="en-US" altLang="ja-JP"/>
+          </a:p>
+        </p:txBody>
+      </p:sp>
+      <p:sp>
+        <p:nvSpPr>
+          <p:cNvPr id="6" name="スライド番号プレースホルダー 5"/>
           <p:cNvSpPr>
             <a:spLocks noGrp="1"/>
           </p:cNvSpPr>
@@ -899,18 +2010,19 @@
           <a:bodyPr/>
           <a:lstStyle/>
           <a:p>
-            <a:fld id="{B245FAAB-DB64-4F58-895C-CA58F032C6F6}" type="slidenum">
-              <a:rPr kumimoji="1" lang="ja-JP" altLang="en-US" smtClean="0"/>
+            <a:fld id="{2E44B6F3-74B2-4A91-BBB6-A386C3594F89}" type="slidenum">
+              <a:rPr lang="ja-JP" altLang="en-US" smtClean="0"/>
+              <a:pPr/>
               <a:t>‹#›</a:t>
             </a:fld>
-            <a:endParaRPr kumimoji="1" lang="ja-JP" altLang="en-US"/>
+            <a:endParaRPr lang="en-US" altLang="ja-JP"/>
           </a:p>
         </p:txBody>
       </p:sp>
     </p:spTree>
     <p:extLst>
       <p:ext uri="{BB962C8B-B14F-4D97-AF65-F5344CB8AC3E}">
-        <p14:creationId xmlns:p14="http://schemas.microsoft.com/office/powerpoint/2010/main" val="663039022"/>
+        <p14:creationId xmlns:p14="http://schemas.microsoft.com/office/powerpoint/2010/main" val="2564728848"/>
       </p:ext>
     </p:extLst>
   </p:cSld>
@@ -939,7 +2051,7 @@
       </p:grpSpPr>
       <p:sp>
         <p:nvSpPr>
-          <p:cNvPr id="2" name="Title 1"/>
+          <p:cNvPr id="2" name="タイトル 1"/>
           <p:cNvSpPr>
             <a:spLocks noGrp="1"/>
           </p:cNvSpPr>
@@ -949,131 +2061,130 @@
         </p:nvSpPr>
         <p:spPr>
           <a:xfrm>
-            <a:off x="797298" y="2160129"/>
-            <a:ext cx="10078820" cy="3604222"/>
+            <a:off x="650207" y="3967235"/>
+            <a:ext cx="6996510" cy="1226183"/>
           </a:xfrm>
         </p:spPr>
         <p:txBody>
+          <a:bodyPr anchor="t"/>
+          <a:lstStyle>
+            <a:lvl1pPr algn="l">
+              <a:defRPr sz="3600" b="1" cap="all"/>
+            </a:lvl1pPr>
+          </a:lstStyle>
+          <a:p>
+            <a:r>
+              <a:rPr kumimoji="1" lang="ja-JP" altLang="en-US"/>
+              <a:t>マスター タイトルの書式設定</a:t>
+            </a:r>
+          </a:p>
+        </p:txBody>
+      </p:sp>
+      <p:sp>
+        <p:nvSpPr>
+          <p:cNvPr id="3" name="テキスト プレースホルダー 2"/>
+          <p:cNvSpPr>
+            <a:spLocks noGrp="1"/>
+          </p:cNvSpPr>
+          <p:nvPr>
+            <p:ph type="body" idx="1"/>
+          </p:nvPr>
+        </p:nvSpPr>
+        <p:spPr>
+          <a:xfrm>
+            <a:off x="650207" y="2616715"/>
+            <a:ext cx="6996510" cy="1350516"/>
+          </a:xfrm>
+        </p:spPr>
+        <p:txBody>
           <a:bodyPr anchor="b"/>
           <a:lstStyle>
-            <a:lvl1pPr>
-              <a:defRPr sz="7580"/>
-            </a:lvl1pPr>
-          </a:lstStyle>
-          <a:p>
-            <a:r>
-              <a:rPr lang="ja-JP" altLang="en-US"/>
-              <a:t>マスター タイトルの書式設定</a:t>
-            </a:r>
-            <a:endParaRPr lang="en-US" dirty="0"/>
-          </a:p>
-        </p:txBody>
-      </p:sp>
-      <p:sp>
-        <p:nvSpPr>
-          <p:cNvPr id="3" name="Text Placeholder 2"/>
-          <p:cNvSpPr>
-            <a:spLocks noGrp="1"/>
-          </p:cNvSpPr>
-          <p:nvPr>
-            <p:ph type="body" idx="1"/>
-          </p:nvPr>
-        </p:nvSpPr>
-        <p:spPr>
-          <a:xfrm>
-            <a:off x="797298" y="5798449"/>
-            <a:ext cx="10078820" cy="1895375"/>
-          </a:xfrm>
-        </p:spPr>
-        <p:txBody>
-          <a:bodyPr/>
-          <a:lstStyle>
             <a:lvl1pPr marL="0" indent="0">
               <a:buNone/>
-              <a:defRPr sz="3032">
+              <a:defRPr sz="1800">
                 <a:solidFill>
                   <a:schemeClr val="tx1">
-                    <a:tint val="82000"/>
+                    <a:tint val="75000"/>
                   </a:schemeClr>
                 </a:solidFill>
               </a:defRPr>
             </a:lvl1pPr>
-            <a:lvl2pPr marL="577626" indent="0">
-              <a:buNone/>
-              <a:defRPr sz="2527">
+            <a:lvl2pPr marL="411248" indent="0">
+              <a:buNone/>
+              <a:defRPr sz="1600">
                 <a:solidFill>
                   <a:schemeClr val="tx1">
-                    <a:tint val="82000"/>
+                    <a:tint val="75000"/>
                   </a:schemeClr>
                 </a:solidFill>
               </a:defRPr>
             </a:lvl2pPr>
-            <a:lvl3pPr marL="1155253" indent="0">
-              <a:buNone/>
-              <a:defRPr sz="2274">
+            <a:lvl3pPr marL="822495" indent="0">
+              <a:buNone/>
+              <a:defRPr sz="1400">
                 <a:solidFill>
                   <a:schemeClr val="tx1">
-                    <a:tint val="82000"/>
+                    <a:tint val="75000"/>
                   </a:schemeClr>
                 </a:solidFill>
               </a:defRPr>
             </a:lvl3pPr>
-            <a:lvl4pPr marL="1732879" indent="0">
-              <a:buNone/>
-              <a:defRPr sz="2021">
+            <a:lvl4pPr marL="1233744" indent="0">
+              <a:buNone/>
+              <a:defRPr sz="1300">
                 <a:solidFill>
                   <a:schemeClr val="tx1">
-                    <a:tint val="82000"/>
+                    <a:tint val="75000"/>
                   </a:schemeClr>
                 </a:solidFill>
               </a:defRPr>
             </a:lvl4pPr>
-            <a:lvl5pPr marL="2310506" indent="0">
-              <a:buNone/>
-              <a:defRPr sz="2021">
+            <a:lvl5pPr marL="1644991" indent="0">
+              <a:buNone/>
+              <a:defRPr sz="1300">
                 <a:solidFill>
                   <a:schemeClr val="tx1">
-                    <a:tint val="82000"/>
+                    <a:tint val="75000"/>
                   </a:schemeClr>
                 </a:solidFill>
               </a:defRPr>
             </a:lvl5pPr>
-            <a:lvl6pPr marL="2888132" indent="0">
-              <a:buNone/>
-              <a:defRPr sz="2021">
+            <a:lvl6pPr marL="2056239" indent="0">
+              <a:buNone/>
+              <a:defRPr sz="1300">
                 <a:solidFill>
                   <a:schemeClr val="tx1">
-                    <a:tint val="82000"/>
+                    <a:tint val="75000"/>
                   </a:schemeClr>
                 </a:solidFill>
               </a:defRPr>
             </a:lvl6pPr>
-            <a:lvl7pPr marL="3465759" indent="0">
-              <a:buNone/>
-              <a:defRPr sz="2021">
+            <a:lvl7pPr marL="2467486" indent="0">
+              <a:buNone/>
+              <a:defRPr sz="1300">
                 <a:solidFill>
                   <a:schemeClr val="tx1">
-                    <a:tint val="82000"/>
+                    <a:tint val="75000"/>
                   </a:schemeClr>
                 </a:solidFill>
               </a:defRPr>
             </a:lvl7pPr>
-            <a:lvl8pPr marL="4043385" indent="0">
-              <a:buNone/>
-              <a:defRPr sz="2021">
+            <a:lvl8pPr marL="2878732" indent="0">
+              <a:buNone/>
+              <a:defRPr sz="1300">
                 <a:solidFill>
                   <a:schemeClr val="tx1">
-                    <a:tint val="82000"/>
+                    <a:tint val="75000"/>
                   </a:schemeClr>
                 </a:solidFill>
               </a:defRPr>
             </a:lvl8pPr>
-            <a:lvl9pPr marL="4621012" indent="0">
-              <a:buNone/>
-              <a:defRPr sz="2021">
+            <a:lvl9pPr marL="3289981" indent="0">
+              <a:buNone/>
+              <a:defRPr sz="1300">
                 <a:solidFill>
                   <a:schemeClr val="tx1">
-                    <a:tint val="82000"/>
+                    <a:tint val="75000"/>
                   </a:schemeClr>
                 </a:solidFill>
               </a:defRPr>
@@ -1082,7 +2193,7 @@
           <a:p>
             <a:pPr lvl="0"/>
             <a:r>
-              <a:rPr lang="ja-JP" altLang="en-US"/>
+              <a:rPr kumimoji="1" lang="ja-JP" altLang="en-US"/>
               <a:t>マスター テキストの書式設定</a:t>
             </a:r>
           </a:p>
@@ -1090,7 +2201,7 @@
       </p:sp>
       <p:sp>
         <p:nvSpPr>
-          <p:cNvPr id="4" name="Date Placeholder 3"/>
+          <p:cNvPr id="4" name="日付プレースホルダー 3"/>
           <p:cNvSpPr>
             <a:spLocks noGrp="1"/>
           </p:cNvSpPr>
@@ -1103,17 +2214,13 @@
           <a:bodyPr/>
           <a:lstStyle/>
           <a:p>
-            <a:fld id="{334D96BB-04BE-47A7-A37E-F93A28770C7D}" type="datetimeFigureOut">
-              <a:rPr kumimoji="1" lang="ja-JP" altLang="en-US" smtClean="0"/>
-              <a:t>2026/4/5</a:t>
-            </a:fld>
-            <a:endParaRPr kumimoji="1" lang="ja-JP" altLang="en-US"/>
-          </a:p>
-        </p:txBody>
-      </p:sp>
-      <p:sp>
-        <p:nvSpPr>
-          <p:cNvPr id="5" name="Footer Placeholder 4"/>
+            <a:endParaRPr lang="en-US" altLang="ja-JP"/>
+          </a:p>
+        </p:txBody>
+      </p:sp>
+      <p:sp>
+        <p:nvSpPr>
+          <p:cNvPr id="5" name="フッター プレースホルダー 4"/>
           <p:cNvSpPr>
             <a:spLocks noGrp="1"/>
           </p:cNvSpPr>
@@ -1126,13 +2233,13 @@
           <a:bodyPr/>
           <a:lstStyle/>
           <a:p>
-            <a:endParaRPr kumimoji="1" lang="ja-JP" altLang="en-US"/>
-          </a:p>
-        </p:txBody>
-      </p:sp>
-      <p:sp>
-        <p:nvSpPr>
-          <p:cNvPr id="6" name="Slide Number Placeholder 5"/>
+            <a:endParaRPr lang="en-US" altLang="ja-JP"/>
+          </a:p>
+        </p:txBody>
+      </p:sp>
+      <p:sp>
+        <p:nvSpPr>
+          <p:cNvPr id="6" name="スライド番号プレースホルダー 5"/>
           <p:cNvSpPr>
             <a:spLocks noGrp="1"/>
           </p:cNvSpPr>
@@ -1145,18 +2252,19 @@
           <a:bodyPr/>
           <a:lstStyle/>
           <a:p>
-            <a:fld id="{B245FAAB-DB64-4F58-895C-CA58F032C6F6}" type="slidenum">
-              <a:rPr kumimoji="1" lang="ja-JP" altLang="en-US" smtClean="0"/>
+            <a:fld id="{87210180-55FF-4CC3-9B05-098F04E84E58}" type="slidenum">
+              <a:rPr lang="ja-JP" altLang="en-US" smtClean="0"/>
+              <a:pPr/>
               <a:t>‹#›</a:t>
             </a:fld>
-            <a:endParaRPr kumimoji="1" lang="ja-JP" altLang="en-US"/>
+            <a:endParaRPr lang="en-US" altLang="ja-JP"/>
           </a:p>
         </p:txBody>
       </p:sp>
     </p:spTree>
     <p:extLst>
       <p:ext uri="{BB962C8B-B14F-4D97-AF65-F5344CB8AC3E}">
-        <p14:creationId xmlns:p14="http://schemas.microsoft.com/office/powerpoint/2010/main" val="3295516548"/>
+        <p14:creationId xmlns:p14="http://schemas.microsoft.com/office/powerpoint/2010/main" val="635784468"/>
       </p:ext>
     </p:extLst>
   </p:cSld>
@@ -1185,7 +2293,7 @@
       </p:grpSpPr>
       <p:sp>
         <p:nvSpPr>
-          <p:cNvPr id="2" name="Title 1"/>
+          <p:cNvPr id="2" name="タイトル 1"/>
           <p:cNvSpPr>
             <a:spLocks noGrp="1"/>
           </p:cNvSpPr>
@@ -1199,16 +2307,15 @@
           <a:lstStyle/>
           <a:p>
             <a:r>
-              <a:rPr lang="ja-JP" altLang="en-US"/>
+              <a:rPr kumimoji="1" lang="ja-JP" altLang="en-US"/>
               <a:t>マスター タイトルの書式設定</a:t>
             </a:r>
-            <a:endParaRPr lang="en-US" dirty="0"/>
-          </a:p>
-        </p:txBody>
-      </p:sp>
-      <p:sp>
-        <p:nvSpPr>
-          <p:cNvPr id="3" name="Content Placeholder 2"/>
+          </a:p>
+        </p:txBody>
+      </p:sp>
+      <p:sp>
+        <p:nvSpPr>
+          <p:cNvPr id="3" name="コンテンツ プレースホルダー 2"/>
           <p:cNvSpPr>
             <a:spLocks noGrp="1"/>
           </p:cNvSpPr>
@@ -1218,86 +2325,113 @@
         </p:nvSpPr>
         <p:spPr>
           <a:xfrm>
-            <a:off x="803384" y="2306542"/>
-            <a:ext cx="4966375" cy="5497593"/>
+            <a:off x="370123" y="1296210"/>
+            <a:ext cx="3265323" cy="3668544"/>
           </a:xfrm>
         </p:spPr>
         <p:txBody>
           <a:bodyPr/>
-          <a:lstStyle/>
+          <a:lstStyle>
+            <a:lvl1pPr>
+              <a:defRPr sz="2500"/>
+            </a:lvl1pPr>
+            <a:lvl2pPr>
+              <a:defRPr sz="2200"/>
+            </a:lvl2pPr>
+            <a:lvl3pPr>
+              <a:defRPr sz="1800"/>
+            </a:lvl3pPr>
+            <a:lvl4pPr>
+              <a:defRPr sz="1600"/>
+            </a:lvl4pPr>
+            <a:lvl5pPr>
+              <a:defRPr sz="1600"/>
+            </a:lvl5pPr>
+            <a:lvl6pPr>
+              <a:defRPr sz="1600"/>
+            </a:lvl6pPr>
+            <a:lvl7pPr>
+              <a:defRPr sz="1600"/>
+            </a:lvl7pPr>
+            <a:lvl8pPr>
+              <a:defRPr sz="1600"/>
+            </a:lvl8pPr>
+            <a:lvl9pPr>
+              <a:defRPr sz="1600"/>
+            </a:lvl9pPr>
+          </a:lstStyle>
           <a:p>
             <a:pPr lvl="0"/>
             <a:r>
-              <a:rPr lang="ja-JP" altLang="en-US"/>
+              <a:rPr kumimoji="1" lang="ja-JP" altLang="en-US"/>
               <a:t>マスター テキストの書式設定</a:t>
             </a:r>
           </a:p>
           <a:p>
             <a:pPr lvl="1"/>
             <a:r>
-              <a:rPr lang="ja-JP" altLang="en-US"/>
+              <a:rPr kumimoji="1" lang="ja-JP" altLang="en-US"/>
               <a:t>第 </a:t>
             </a:r>
             <a:r>
-              <a:rPr lang="en-US" altLang="ja-JP"/>
+              <a:rPr kumimoji="1" lang="en-US" altLang="ja-JP"/>
               <a:t>2 </a:t>
             </a:r>
             <a:r>
-              <a:rPr lang="ja-JP" altLang="en-US"/>
+              <a:rPr kumimoji="1" lang="ja-JP" altLang="en-US"/>
               <a:t>レベル</a:t>
             </a:r>
           </a:p>
           <a:p>
             <a:pPr lvl="2"/>
             <a:r>
-              <a:rPr lang="ja-JP" altLang="en-US"/>
+              <a:rPr kumimoji="1" lang="ja-JP" altLang="en-US"/>
               <a:t>第 </a:t>
             </a:r>
             <a:r>
-              <a:rPr lang="en-US" altLang="ja-JP"/>
+              <a:rPr kumimoji="1" lang="en-US" altLang="ja-JP"/>
               <a:t>3 </a:t>
             </a:r>
             <a:r>
-              <a:rPr lang="ja-JP" altLang="en-US"/>
+              <a:rPr kumimoji="1" lang="ja-JP" altLang="en-US"/>
               <a:t>レベル</a:t>
             </a:r>
           </a:p>
           <a:p>
             <a:pPr lvl="3"/>
             <a:r>
-              <a:rPr lang="ja-JP" altLang="en-US"/>
+              <a:rPr kumimoji="1" lang="ja-JP" altLang="en-US"/>
               <a:t>第 </a:t>
             </a:r>
             <a:r>
-              <a:rPr lang="en-US" altLang="ja-JP"/>
+              <a:rPr kumimoji="1" lang="en-US" altLang="ja-JP"/>
               <a:t>4 </a:t>
             </a:r>
             <a:r>
-              <a:rPr lang="ja-JP" altLang="en-US"/>
+              <a:rPr kumimoji="1" lang="ja-JP" altLang="en-US"/>
               <a:t>レベル</a:t>
             </a:r>
           </a:p>
           <a:p>
             <a:pPr lvl="4"/>
             <a:r>
-              <a:rPr lang="ja-JP" altLang="en-US"/>
+              <a:rPr kumimoji="1" lang="ja-JP" altLang="en-US"/>
               <a:t>第 </a:t>
             </a:r>
             <a:r>
-              <a:rPr lang="en-US" altLang="ja-JP"/>
+              <a:rPr kumimoji="1" lang="en-US" altLang="ja-JP"/>
               <a:t>5 </a:t>
             </a:r>
             <a:r>
-              <a:rPr lang="ja-JP" altLang="en-US"/>
+              <a:rPr kumimoji="1" lang="ja-JP" altLang="en-US"/>
               <a:t>レベル</a:t>
             </a:r>
-            <a:endParaRPr lang="en-US" dirty="0"/>
-          </a:p>
-        </p:txBody>
-      </p:sp>
-      <p:sp>
-        <p:nvSpPr>
-          <p:cNvPr id="4" name="Content Placeholder 3"/>
+          </a:p>
+        </p:txBody>
+      </p:sp>
+      <p:sp>
+        <p:nvSpPr>
+          <p:cNvPr id="4" name="コンテンツ プレースホルダー 3"/>
           <p:cNvSpPr>
             <a:spLocks noGrp="1"/>
           </p:cNvSpPr>
@@ -1307,86 +2441,113 @@
         </p:nvSpPr>
         <p:spPr>
           <a:xfrm>
-            <a:off x="5915829" y="2306542"/>
-            <a:ext cx="4966375" cy="5497593"/>
+            <a:off x="3772632" y="1296210"/>
+            <a:ext cx="3266753" cy="3668544"/>
           </a:xfrm>
         </p:spPr>
         <p:txBody>
           <a:bodyPr/>
-          <a:lstStyle/>
+          <a:lstStyle>
+            <a:lvl1pPr>
+              <a:defRPr sz="2500"/>
+            </a:lvl1pPr>
+            <a:lvl2pPr>
+              <a:defRPr sz="2200"/>
+            </a:lvl2pPr>
+            <a:lvl3pPr>
+              <a:defRPr sz="1800"/>
+            </a:lvl3pPr>
+            <a:lvl4pPr>
+              <a:defRPr sz="1600"/>
+            </a:lvl4pPr>
+            <a:lvl5pPr>
+              <a:defRPr sz="1600"/>
+            </a:lvl5pPr>
+            <a:lvl6pPr>
+              <a:defRPr sz="1600"/>
+            </a:lvl6pPr>
+            <a:lvl7pPr>
+              <a:defRPr sz="1600"/>
+            </a:lvl7pPr>
+            <a:lvl8pPr>
+              <a:defRPr sz="1600"/>
+            </a:lvl8pPr>
+            <a:lvl9pPr>
+              <a:defRPr sz="1600"/>
+            </a:lvl9pPr>
+          </a:lstStyle>
           <a:p>
             <a:pPr lvl="0"/>
             <a:r>
-              <a:rPr lang="ja-JP" altLang="en-US"/>
+              <a:rPr kumimoji="1" lang="ja-JP" altLang="en-US"/>
               <a:t>マスター テキストの書式設定</a:t>
             </a:r>
           </a:p>
           <a:p>
             <a:pPr lvl="1"/>
             <a:r>
-              <a:rPr lang="ja-JP" altLang="en-US"/>
+              <a:rPr kumimoji="1" lang="ja-JP" altLang="en-US"/>
               <a:t>第 </a:t>
             </a:r>
             <a:r>
-              <a:rPr lang="en-US" altLang="ja-JP"/>
+              <a:rPr kumimoji="1" lang="en-US" altLang="ja-JP"/>
               <a:t>2 </a:t>
             </a:r>
             <a:r>
-              <a:rPr lang="ja-JP" altLang="en-US"/>
+              <a:rPr kumimoji="1" lang="ja-JP" altLang="en-US"/>
               <a:t>レベル</a:t>
             </a:r>
           </a:p>
           <a:p>
             <a:pPr lvl="2"/>
             <a:r>
-              <a:rPr lang="ja-JP" altLang="en-US"/>
+              <a:rPr kumimoji="1" lang="ja-JP" altLang="en-US"/>
               <a:t>第 </a:t>
             </a:r>
             <a:r>
-              <a:rPr lang="en-US" altLang="ja-JP"/>
+              <a:rPr kumimoji="1" lang="en-US" altLang="ja-JP"/>
               <a:t>3 </a:t>
             </a:r>
             <a:r>
-              <a:rPr lang="ja-JP" altLang="en-US"/>
+              <a:rPr kumimoji="1" lang="ja-JP" altLang="en-US"/>
               <a:t>レベル</a:t>
             </a:r>
           </a:p>
           <a:p>
             <a:pPr lvl="3"/>
             <a:r>
-              <a:rPr lang="ja-JP" altLang="en-US"/>
+              <a:rPr kumimoji="1" lang="ja-JP" altLang="en-US"/>
               <a:t>第 </a:t>
             </a:r>
             <a:r>
-              <a:rPr lang="en-US" altLang="ja-JP"/>
+              <a:rPr kumimoji="1" lang="en-US" altLang="ja-JP"/>
               <a:t>4 </a:t>
             </a:r>
             <a:r>
-              <a:rPr lang="ja-JP" altLang="en-US"/>
+              <a:rPr kumimoji="1" lang="ja-JP" altLang="en-US"/>
               <a:t>レベル</a:t>
             </a:r>
           </a:p>
           <a:p>
             <a:pPr lvl="4"/>
             <a:r>
-              <a:rPr lang="ja-JP" altLang="en-US"/>
+              <a:rPr kumimoji="1" lang="ja-JP" altLang="en-US"/>
               <a:t>第 </a:t>
             </a:r>
             <a:r>
-              <a:rPr lang="en-US" altLang="ja-JP"/>
+              <a:rPr kumimoji="1" lang="en-US" altLang="ja-JP"/>
               <a:t>5 </a:t>
             </a:r>
             <a:r>
-              <a:rPr lang="ja-JP" altLang="en-US"/>
+              <a:rPr kumimoji="1" lang="ja-JP" altLang="en-US"/>
               <a:t>レベル</a:t>
             </a:r>
-            <a:endParaRPr lang="en-US" dirty="0"/>
-          </a:p>
-        </p:txBody>
-      </p:sp>
-      <p:sp>
-        <p:nvSpPr>
-          <p:cNvPr id="5" name="Date Placeholder 4"/>
+          </a:p>
+        </p:txBody>
+      </p:sp>
+      <p:sp>
+        <p:nvSpPr>
+          <p:cNvPr id="5" name="日付プレースホルダー 4"/>
           <p:cNvSpPr>
             <a:spLocks noGrp="1"/>
           </p:cNvSpPr>
@@ -1399,17 +2560,13 @@
           <a:bodyPr/>
           <a:lstStyle/>
           <a:p>
-            <a:fld id="{334D96BB-04BE-47A7-A37E-F93A28770C7D}" type="datetimeFigureOut">
-              <a:rPr kumimoji="1" lang="ja-JP" altLang="en-US" smtClean="0"/>
-              <a:t>2026/4/5</a:t>
-            </a:fld>
-            <a:endParaRPr kumimoji="1" lang="ja-JP" altLang="en-US"/>
-          </a:p>
-        </p:txBody>
-      </p:sp>
-      <p:sp>
-        <p:nvSpPr>
-          <p:cNvPr id="6" name="Footer Placeholder 5"/>
+            <a:endParaRPr lang="en-US" altLang="ja-JP"/>
+          </a:p>
+        </p:txBody>
+      </p:sp>
+      <p:sp>
+        <p:nvSpPr>
+          <p:cNvPr id="6" name="フッター プレースホルダー 5"/>
           <p:cNvSpPr>
             <a:spLocks noGrp="1"/>
           </p:cNvSpPr>
@@ -1422,13 +2579,13 @@
           <a:bodyPr/>
           <a:lstStyle/>
           <a:p>
-            <a:endParaRPr kumimoji="1" lang="ja-JP" altLang="en-US"/>
-          </a:p>
-        </p:txBody>
-      </p:sp>
-      <p:sp>
-        <p:nvSpPr>
-          <p:cNvPr id="7" name="Slide Number Placeholder 6"/>
+            <a:endParaRPr lang="en-US" altLang="ja-JP"/>
+          </a:p>
+        </p:txBody>
+      </p:sp>
+      <p:sp>
+        <p:nvSpPr>
+          <p:cNvPr id="7" name="スライド番号プレースホルダー 6"/>
           <p:cNvSpPr>
             <a:spLocks noGrp="1"/>
           </p:cNvSpPr>
@@ -1441,18 +2598,19 @@
           <a:bodyPr/>
           <a:lstStyle/>
           <a:p>
-            <a:fld id="{B245FAAB-DB64-4F58-895C-CA58F032C6F6}" type="slidenum">
-              <a:rPr kumimoji="1" lang="ja-JP" altLang="en-US" smtClean="0"/>
+            <a:fld id="{5B562646-42CA-4CBC-A377-697FC10FD983}" type="slidenum">
+              <a:rPr lang="ja-JP" altLang="en-US" smtClean="0"/>
+              <a:pPr/>
               <a:t>‹#›</a:t>
             </a:fld>
-            <a:endParaRPr kumimoji="1" lang="ja-JP" altLang="en-US"/>
+            <a:endParaRPr lang="en-US" altLang="ja-JP"/>
           </a:p>
         </p:txBody>
       </p:sp>
     </p:spTree>
     <p:extLst>
       <p:ext uri="{BB962C8B-B14F-4D97-AF65-F5344CB8AC3E}">
-        <p14:creationId xmlns:p14="http://schemas.microsoft.com/office/powerpoint/2010/main" val="3757866691"/>
+        <p14:creationId xmlns:p14="http://schemas.microsoft.com/office/powerpoint/2010/main" val="101901055"/>
       </p:ext>
     </p:extLst>
   </p:cSld>
@@ -1481,7 +2639,7 @@
       </p:grpSpPr>
       <p:sp>
         <p:nvSpPr>
-          <p:cNvPr id="2" name="Title 1"/>
+          <p:cNvPr id="2" name="タイトル 1"/>
           <p:cNvSpPr>
             <a:spLocks noGrp="1"/>
           </p:cNvSpPr>
@@ -1491,25 +2649,28 @@
         </p:nvSpPr>
         <p:spPr>
           <a:xfrm>
-            <a:off x="804906" y="461310"/>
-            <a:ext cx="10078820" cy="1674751"/>
+            <a:off x="411560" y="247239"/>
+            <a:ext cx="7408069" cy="1028965"/>
           </a:xfrm>
         </p:spPr>
         <p:txBody>
           <a:bodyPr/>
-          <a:lstStyle/>
-          <a:p>
-            <a:r>
-              <a:rPr lang="ja-JP" altLang="en-US"/>
+          <a:lstStyle>
+            <a:lvl1pPr>
+              <a:defRPr/>
+            </a:lvl1pPr>
+          </a:lstStyle>
+          <a:p>
+            <a:r>
+              <a:rPr kumimoji="1" lang="ja-JP" altLang="en-US"/>
               <a:t>マスター タイトルの書式設定</a:t>
             </a:r>
-            <a:endParaRPr lang="en-US" dirty="0"/>
-          </a:p>
-        </p:txBody>
-      </p:sp>
-      <p:sp>
-        <p:nvSpPr>
-          <p:cNvPr id="3" name="Text Placeholder 2"/>
+          </a:p>
+        </p:txBody>
+      </p:sp>
+      <p:sp>
+        <p:nvSpPr>
+          <p:cNvPr id="3" name="テキスト プレースホルダー 2"/>
           <p:cNvSpPr>
             <a:spLocks noGrp="1"/>
           </p:cNvSpPr>
@@ -1519,8 +2680,8 @@
         </p:nvSpPr>
         <p:spPr>
           <a:xfrm>
-            <a:off x="804907" y="2124025"/>
-            <a:ext cx="4943551" cy="1040952"/>
+            <a:off x="411559" y="1381957"/>
+            <a:ext cx="3636871" cy="575934"/>
           </a:xfrm>
         </p:spPr>
         <p:txBody>
@@ -1528,45 +2689,45 @@
           <a:lstStyle>
             <a:lvl1pPr marL="0" indent="0">
               <a:buNone/>
-              <a:defRPr sz="3032" b="1"/>
+              <a:defRPr sz="2200" b="1"/>
             </a:lvl1pPr>
-            <a:lvl2pPr marL="577626" indent="0">
-              <a:buNone/>
-              <a:defRPr sz="2527" b="1"/>
+            <a:lvl2pPr marL="411248" indent="0">
+              <a:buNone/>
+              <a:defRPr sz="1800" b="1"/>
             </a:lvl2pPr>
-            <a:lvl3pPr marL="1155253" indent="0">
-              <a:buNone/>
-              <a:defRPr sz="2274" b="1"/>
+            <a:lvl3pPr marL="822495" indent="0">
+              <a:buNone/>
+              <a:defRPr sz="1600" b="1"/>
             </a:lvl3pPr>
-            <a:lvl4pPr marL="1732879" indent="0">
-              <a:buNone/>
-              <a:defRPr sz="2021" b="1"/>
+            <a:lvl4pPr marL="1233744" indent="0">
+              <a:buNone/>
+              <a:defRPr sz="1400" b="1"/>
             </a:lvl4pPr>
-            <a:lvl5pPr marL="2310506" indent="0">
-              <a:buNone/>
-              <a:defRPr sz="2021" b="1"/>
+            <a:lvl5pPr marL="1644991" indent="0">
+              <a:buNone/>
+              <a:defRPr sz="1400" b="1"/>
             </a:lvl5pPr>
-            <a:lvl6pPr marL="2888132" indent="0">
-              <a:buNone/>
-              <a:defRPr sz="2021" b="1"/>
+            <a:lvl6pPr marL="2056239" indent="0">
+              <a:buNone/>
+              <a:defRPr sz="1400" b="1"/>
             </a:lvl6pPr>
-            <a:lvl7pPr marL="3465759" indent="0">
-              <a:buNone/>
-              <a:defRPr sz="2021" b="1"/>
+            <a:lvl7pPr marL="2467486" indent="0">
+              <a:buNone/>
+              <a:defRPr sz="1400" b="1"/>
             </a:lvl7pPr>
-            <a:lvl8pPr marL="4043385" indent="0">
-              <a:buNone/>
-              <a:defRPr sz="2021" b="1"/>
+            <a:lvl8pPr marL="2878732" indent="0">
+              <a:buNone/>
+              <a:defRPr sz="1400" b="1"/>
             </a:lvl8pPr>
-            <a:lvl9pPr marL="4621012" indent="0">
-              <a:buNone/>
-              <a:defRPr sz="2021" b="1"/>
+            <a:lvl9pPr marL="3289981" indent="0">
+              <a:buNone/>
+              <a:defRPr sz="1400" b="1"/>
             </a:lvl9pPr>
           </a:lstStyle>
           <a:p>
             <a:pPr lvl="0"/>
             <a:r>
-              <a:rPr lang="ja-JP" altLang="en-US"/>
+              <a:rPr kumimoji="1" lang="ja-JP" altLang="en-US"/>
               <a:t>マスター テキストの書式設定</a:t>
             </a:r>
           </a:p>
@@ -1574,7 +2735,7 @@
       </p:sp>
       <p:sp>
         <p:nvSpPr>
-          <p:cNvPr id="4" name="Content Placeholder 3"/>
+          <p:cNvPr id="4" name="コンテンツ プレースホルダー 3"/>
           <p:cNvSpPr>
             <a:spLocks noGrp="1"/>
           </p:cNvSpPr>
@@ -1584,86 +2745,113 @@
         </p:nvSpPr>
         <p:spPr>
           <a:xfrm>
-            <a:off x="804907" y="3164977"/>
-            <a:ext cx="4943551" cy="4655204"/>
+            <a:off x="411559" y="1957891"/>
+            <a:ext cx="3636871" cy="3557074"/>
           </a:xfrm>
         </p:spPr>
         <p:txBody>
           <a:bodyPr/>
-          <a:lstStyle/>
+          <a:lstStyle>
+            <a:lvl1pPr>
+              <a:defRPr sz="2200"/>
+            </a:lvl1pPr>
+            <a:lvl2pPr>
+              <a:defRPr sz="1800"/>
+            </a:lvl2pPr>
+            <a:lvl3pPr>
+              <a:defRPr sz="1600"/>
+            </a:lvl3pPr>
+            <a:lvl4pPr>
+              <a:defRPr sz="1400"/>
+            </a:lvl4pPr>
+            <a:lvl5pPr>
+              <a:defRPr sz="1400"/>
+            </a:lvl5pPr>
+            <a:lvl6pPr>
+              <a:defRPr sz="1400"/>
+            </a:lvl6pPr>
+            <a:lvl7pPr>
+              <a:defRPr sz="1400"/>
+            </a:lvl7pPr>
+            <a:lvl8pPr>
+              <a:defRPr sz="1400"/>
+            </a:lvl8pPr>
+            <a:lvl9pPr>
+              <a:defRPr sz="1400"/>
+            </a:lvl9pPr>
+          </a:lstStyle>
           <a:p>
             <a:pPr lvl="0"/>
             <a:r>
-              <a:rPr lang="ja-JP" altLang="en-US"/>
+              <a:rPr kumimoji="1" lang="ja-JP" altLang="en-US"/>
               <a:t>マスター テキストの書式設定</a:t>
             </a:r>
           </a:p>
           <a:p>
             <a:pPr lvl="1"/>
             <a:r>
-              <a:rPr lang="ja-JP" altLang="en-US"/>
+              <a:rPr kumimoji="1" lang="ja-JP" altLang="en-US"/>
               <a:t>第 </a:t>
             </a:r>
             <a:r>
-              <a:rPr lang="en-US" altLang="ja-JP"/>
+              <a:rPr kumimoji="1" lang="en-US" altLang="ja-JP"/>
               <a:t>2 </a:t>
             </a:r>
             <a:r>
-              <a:rPr lang="ja-JP" altLang="en-US"/>
+              <a:rPr kumimoji="1" lang="ja-JP" altLang="en-US"/>
               <a:t>レベル</a:t>
             </a:r>
           </a:p>
           <a:p>
             <a:pPr lvl="2"/>
             <a:r>
-              <a:rPr lang="ja-JP" altLang="en-US"/>
+              <a:rPr kumimoji="1" lang="ja-JP" altLang="en-US"/>
               <a:t>第 </a:t>
             </a:r>
             <a:r>
-              <a:rPr lang="en-US" altLang="ja-JP"/>
+              <a:rPr kumimoji="1" lang="en-US" altLang="ja-JP"/>
               <a:t>3 </a:t>
             </a:r>
             <a:r>
-              <a:rPr lang="ja-JP" altLang="en-US"/>
+              <a:rPr kumimoji="1" lang="ja-JP" altLang="en-US"/>
               <a:t>レベル</a:t>
             </a:r>
           </a:p>
           <a:p>
             <a:pPr lvl="3"/>
             <a:r>
-              <a:rPr lang="ja-JP" altLang="en-US"/>
+              <a:rPr kumimoji="1" lang="ja-JP" altLang="en-US"/>
               <a:t>第 </a:t>
             </a:r>
             <a:r>
-              <a:rPr lang="en-US" altLang="ja-JP"/>
+              <a:rPr kumimoji="1" lang="en-US" altLang="ja-JP"/>
               <a:t>4 </a:t>
             </a:r>
             <a:r>
-              <a:rPr lang="ja-JP" altLang="en-US"/>
+              <a:rPr kumimoji="1" lang="ja-JP" altLang="en-US"/>
               <a:t>レベル</a:t>
             </a:r>
           </a:p>
           <a:p>
             <a:pPr lvl="4"/>
             <a:r>
-              <a:rPr lang="ja-JP" altLang="en-US"/>
+              <a:rPr kumimoji="1" lang="ja-JP" altLang="en-US"/>
               <a:t>第 </a:t>
             </a:r>
             <a:r>
-              <a:rPr lang="en-US" altLang="ja-JP"/>
+              <a:rPr kumimoji="1" lang="en-US" altLang="ja-JP"/>
               <a:t>5 </a:t>
             </a:r>
             <a:r>
-              <a:rPr lang="ja-JP" altLang="en-US"/>
+              <a:rPr kumimoji="1" lang="ja-JP" altLang="en-US"/>
               <a:t>レベル</a:t>
             </a:r>
-            <a:endParaRPr lang="en-US" dirty="0"/>
-          </a:p>
-        </p:txBody>
-      </p:sp>
-      <p:sp>
-        <p:nvSpPr>
-          <p:cNvPr id="5" name="Text Placeholder 4"/>
+          </a:p>
+        </p:txBody>
+      </p:sp>
+      <p:sp>
+        <p:nvSpPr>
+          <p:cNvPr id="5" name="テキスト プレースホルダー 4"/>
           <p:cNvSpPr>
             <a:spLocks noGrp="1"/>
           </p:cNvSpPr>
@@ -1673,8 +2861,8 @@
         </p:nvSpPr>
         <p:spPr>
           <a:xfrm>
-            <a:off x="5915830" y="2124025"/>
-            <a:ext cx="4967897" cy="1040952"/>
+            <a:off x="4181334" y="1381957"/>
+            <a:ext cx="3638299" cy="575934"/>
           </a:xfrm>
         </p:spPr>
         <p:txBody>
@@ -1682,45 +2870,45 @@
           <a:lstStyle>
             <a:lvl1pPr marL="0" indent="0">
               <a:buNone/>
-              <a:defRPr sz="3032" b="1"/>
+              <a:defRPr sz="2200" b="1"/>
             </a:lvl1pPr>
-            <a:lvl2pPr marL="577626" indent="0">
-              <a:buNone/>
-              <a:defRPr sz="2527" b="1"/>
+            <a:lvl2pPr marL="411248" indent="0">
+              <a:buNone/>
+              <a:defRPr sz="1800" b="1"/>
             </a:lvl2pPr>
-            <a:lvl3pPr marL="1155253" indent="0">
-              <a:buNone/>
-              <a:defRPr sz="2274" b="1"/>
+            <a:lvl3pPr marL="822495" indent="0">
+              <a:buNone/>
+              <a:defRPr sz="1600" b="1"/>
             </a:lvl3pPr>
-            <a:lvl4pPr marL="1732879" indent="0">
-              <a:buNone/>
-              <a:defRPr sz="2021" b="1"/>
+            <a:lvl4pPr marL="1233744" indent="0">
+              <a:buNone/>
+              <a:defRPr sz="1400" b="1"/>
             </a:lvl4pPr>
-            <a:lvl5pPr marL="2310506" indent="0">
-              <a:buNone/>
-              <a:defRPr sz="2021" b="1"/>
+            <a:lvl5pPr marL="1644991" indent="0">
+              <a:buNone/>
+              <a:defRPr sz="1400" b="1"/>
             </a:lvl5pPr>
-            <a:lvl6pPr marL="2888132" indent="0">
-              <a:buNone/>
-              <a:defRPr sz="2021" b="1"/>
+            <a:lvl6pPr marL="2056239" indent="0">
+              <a:buNone/>
+              <a:defRPr sz="1400" b="1"/>
             </a:lvl6pPr>
-            <a:lvl7pPr marL="3465759" indent="0">
-              <a:buNone/>
-              <a:defRPr sz="2021" b="1"/>
+            <a:lvl7pPr marL="2467486" indent="0">
+              <a:buNone/>
+              <a:defRPr sz="1400" b="1"/>
             </a:lvl7pPr>
-            <a:lvl8pPr marL="4043385" indent="0">
-              <a:buNone/>
-              <a:defRPr sz="2021" b="1"/>
+            <a:lvl8pPr marL="2878732" indent="0">
+              <a:buNone/>
+              <a:defRPr sz="1400" b="1"/>
             </a:lvl8pPr>
-            <a:lvl9pPr marL="4621012" indent="0">
-              <a:buNone/>
-              <a:defRPr sz="2021" b="1"/>
+            <a:lvl9pPr marL="3289981" indent="0">
+              <a:buNone/>
+              <a:defRPr sz="1400" b="1"/>
             </a:lvl9pPr>
           </a:lstStyle>
           <a:p>
             <a:pPr lvl="0"/>
             <a:r>
-              <a:rPr lang="ja-JP" altLang="en-US"/>
+              <a:rPr kumimoji="1" lang="ja-JP" altLang="en-US"/>
               <a:t>マスター テキストの書式設定</a:t>
             </a:r>
           </a:p>
@@ -1728,7 +2916,7 @@
       </p:sp>
       <p:sp>
         <p:nvSpPr>
-          <p:cNvPr id="6" name="Content Placeholder 5"/>
+          <p:cNvPr id="6" name="コンテンツ プレースホルダー 5"/>
           <p:cNvSpPr>
             <a:spLocks noGrp="1"/>
           </p:cNvSpPr>
@@ -1738,86 +2926,113 @@
         </p:nvSpPr>
         <p:spPr>
           <a:xfrm>
-            <a:off x="5915830" y="3164977"/>
-            <a:ext cx="4967897" cy="4655204"/>
+            <a:off x="4181334" y="1957891"/>
+            <a:ext cx="3638299" cy="3557074"/>
           </a:xfrm>
         </p:spPr>
         <p:txBody>
           <a:bodyPr/>
-          <a:lstStyle/>
+          <a:lstStyle>
+            <a:lvl1pPr>
+              <a:defRPr sz="2200"/>
+            </a:lvl1pPr>
+            <a:lvl2pPr>
+              <a:defRPr sz="1800"/>
+            </a:lvl2pPr>
+            <a:lvl3pPr>
+              <a:defRPr sz="1600"/>
+            </a:lvl3pPr>
+            <a:lvl4pPr>
+              <a:defRPr sz="1400"/>
+            </a:lvl4pPr>
+            <a:lvl5pPr>
+              <a:defRPr sz="1400"/>
+            </a:lvl5pPr>
+            <a:lvl6pPr>
+              <a:defRPr sz="1400"/>
+            </a:lvl6pPr>
+            <a:lvl7pPr>
+              <a:defRPr sz="1400"/>
+            </a:lvl7pPr>
+            <a:lvl8pPr>
+              <a:defRPr sz="1400"/>
+            </a:lvl8pPr>
+            <a:lvl9pPr>
+              <a:defRPr sz="1400"/>
+            </a:lvl9pPr>
+          </a:lstStyle>
           <a:p>
             <a:pPr lvl="0"/>
             <a:r>
-              <a:rPr lang="ja-JP" altLang="en-US"/>
+              <a:rPr kumimoji="1" lang="ja-JP" altLang="en-US"/>
               <a:t>マスター テキストの書式設定</a:t>
             </a:r>
           </a:p>
           <a:p>
             <a:pPr lvl="1"/>
             <a:r>
-              <a:rPr lang="ja-JP" altLang="en-US"/>
+              <a:rPr kumimoji="1" lang="ja-JP" altLang="en-US"/>
               <a:t>第 </a:t>
             </a:r>
             <a:r>
-              <a:rPr lang="en-US" altLang="ja-JP"/>
+              <a:rPr kumimoji="1" lang="en-US" altLang="ja-JP"/>
               <a:t>2 </a:t>
             </a:r>
             <a:r>
-              <a:rPr lang="ja-JP" altLang="en-US"/>
+              <a:rPr kumimoji="1" lang="ja-JP" altLang="en-US"/>
               <a:t>レベル</a:t>
             </a:r>
           </a:p>
           <a:p>
             <a:pPr lvl="2"/>
             <a:r>
-              <a:rPr lang="ja-JP" altLang="en-US"/>
+              <a:rPr kumimoji="1" lang="ja-JP" altLang="en-US"/>
               <a:t>第 </a:t>
             </a:r>
             <a:r>
-              <a:rPr lang="en-US" altLang="ja-JP"/>
+              <a:rPr kumimoji="1" lang="en-US" altLang="ja-JP"/>
               <a:t>3 </a:t>
             </a:r>
             <a:r>
-              <a:rPr lang="ja-JP" altLang="en-US"/>
+              <a:rPr kumimoji="1" lang="ja-JP" altLang="en-US"/>
               <a:t>レベル</a:t>
             </a:r>
           </a:p>
           <a:p>
             <a:pPr lvl="3"/>
             <a:r>
-              <a:rPr lang="ja-JP" altLang="en-US"/>
+              <a:rPr kumimoji="1" lang="ja-JP" altLang="en-US"/>
               <a:t>第 </a:t>
             </a:r>
             <a:r>
-              <a:rPr lang="en-US" altLang="ja-JP"/>
+              <a:rPr kumimoji="1" lang="en-US" altLang="ja-JP"/>
               <a:t>4 </a:t>
             </a:r>
             <a:r>
-              <a:rPr lang="ja-JP" altLang="en-US"/>
+              <a:rPr kumimoji="1" lang="ja-JP" altLang="en-US"/>
               <a:t>レベル</a:t>
             </a:r>
           </a:p>
           <a:p>
             <a:pPr lvl="4"/>
             <a:r>
-              <a:rPr lang="ja-JP" altLang="en-US"/>
+              <a:rPr kumimoji="1" lang="ja-JP" altLang="en-US"/>
               <a:t>第 </a:t>
             </a:r>
             <a:r>
-              <a:rPr lang="en-US" altLang="ja-JP"/>
+              <a:rPr kumimoji="1" lang="en-US" altLang="ja-JP"/>
               <a:t>5 </a:t>
             </a:r>
             <a:r>
-              <a:rPr lang="ja-JP" altLang="en-US"/>
+              <a:rPr kumimoji="1" lang="ja-JP" altLang="en-US"/>
               <a:t>レベル</a:t>
             </a:r>
-            <a:endParaRPr lang="en-US" dirty="0"/>
-          </a:p>
-        </p:txBody>
-      </p:sp>
-      <p:sp>
-        <p:nvSpPr>
-          <p:cNvPr id="7" name="Date Placeholder 6"/>
+          </a:p>
+        </p:txBody>
+      </p:sp>
+      <p:sp>
+        <p:nvSpPr>
+          <p:cNvPr id="7" name="日付プレースホルダー 6"/>
           <p:cNvSpPr>
             <a:spLocks noGrp="1"/>
           </p:cNvSpPr>
@@ -1830,17 +3045,13 @@
           <a:bodyPr/>
           <a:lstStyle/>
           <a:p>
-            <a:fld id="{334D96BB-04BE-47A7-A37E-F93A28770C7D}" type="datetimeFigureOut">
-              <a:rPr kumimoji="1" lang="ja-JP" altLang="en-US" smtClean="0"/>
-              <a:t>2026/4/5</a:t>
-            </a:fld>
-            <a:endParaRPr kumimoji="1" lang="ja-JP" altLang="en-US"/>
-          </a:p>
-        </p:txBody>
-      </p:sp>
-      <p:sp>
-        <p:nvSpPr>
-          <p:cNvPr id="8" name="Footer Placeholder 7"/>
+            <a:endParaRPr lang="en-US" altLang="ja-JP"/>
+          </a:p>
+        </p:txBody>
+      </p:sp>
+      <p:sp>
+        <p:nvSpPr>
+          <p:cNvPr id="8" name="フッター プレースホルダー 7"/>
           <p:cNvSpPr>
             <a:spLocks noGrp="1"/>
           </p:cNvSpPr>
@@ -1853,13 +3064,13 @@
           <a:bodyPr/>
           <a:lstStyle/>
           <a:p>
-            <a:endParaRPr kumimoji="1" lang="ja-JP" altLang="en-US"/>
-          </a:p>
-        </p:txBody>
-      </p:sp>
-      <p:sp>
-        <p:nvSpPr>
-          <p:cNvPr id="9" name="Slide Number Placeholder 8"/>
+            <a:endParaRPr lang="en-US" altLang="ja-JP"/>
+          </a:p>
+        </p:txBody>
+      </p:sp>
+      <p:sp>
+        <p:nvSpPr>
+          <p:cNvPr id="9" name="スライド番号プレースホルダー 8"/>
           <p:cNvSpPr>
             <a:spLocks noGrp="1"/>
           </p:cNvSpPr>
@@ -1872,18 +3083,19 @@
           <a:bodyPr/>
           <a:lstStyle/>
           <a:p>
-            <a:fld id="{B245FAAB-DB64-4F58-895C-CA58F032C6F6}" type="slidenum">
-              <a:rPr kumimoji="1" lang="ja-JP" altLang="en-US" smtClean="0"/>
+            <a:fld id="{740F94A4-144A-4912-AA7E-865B7A278216}" type="slidenum">
+              <a:rPr lang="ja-JP" altLang="en-US" smtClean="0"/>
+              <a:pPr/>
               <a:t>‹#›</a:t>
             </a:fld>
-            <a:endParaRPr kumimoji="1" lang="ja-JP" altLang="en-US"/>
+            <a:endParaRPr lang="en-US" altLang="ja-JP"/>
           </a:p>
         </p:txBody>
       </p:sp>
     </p:spTree>
     <p:extLst>
       <p:ext uri="{BB962C8B-B14F-4D97-AF65-F5344CB8AC3E}">
-        <p14:creationId xmlns:p14="http://schemas.microsoft.com/office/powerpoint/2010/main" val="1597467759"/>
+        <p14:creationId xmlns:p14="http://schemas.microsoft.com/office/powerpoint/2010/main" val="1900904770"/>
       </p:ext>
     </p:extLst>
   </p:cSld>
@@ -1912,7 +3124,7 @@
       </p:grpSpPr>
       <p:sp>
         <p:nvSpPr>
-          <p:cNvPr id="2" name="Title 1"/>
+          <p:cNvPr id="2" name="タイトル 1"/>
           <p:cNvSpPr>
             <a:spLocks noGrp="1"/>
           </p:cNvSpPr>
@@ -1926,16 +3138,15 @@
           <a:lstStyle/>
           <a:p>
             <a:r>
-              <a:rPr lang="ja-JP" altLang="en-US"/>
+              <a:rPr kumimoji="1" lang="ja-JP" altLang="en-US"/>
               <a:t>マスター タイトルの書式設定</a:t>
             </a:r>
-            <a:endParaRPr lang="en-US" dirty="0"/>
-          </a:p>
-        </p:txBody>
-      </p:sp>
-      <p:sp>
-        <p:nvSpPr>
-          <p:cNvPr id="3" name="Date Placeholder 2"/>
+          </a:p>
+        </p:txBody>
+      </p:sp>
+      <p:sp>
+        <p:nvSpPr>
+          <p:cNvPr id="3" name="日付プレースホルダー 2"/>
           <p:cNvSpPr>
             <a:spLocks noGrp="1"/>
           </p:cNvSpPr>
@@ -1948,17 +3159,13 @@
           <a:bodyPr/>
           <a:lstStyle/>
           <a:p>
-            <a:fld id="{334D96BB-04BE-47A7-A37E-F93A28770C7D}" type="datetimeFigureOut">
-              <a:rPr kumimoji="1" lang="ja-JP" altLang="en-US" smtClean="0"/>
-              <a:t>2026/4/5</a:t>
-            </a:fld>
-            <a:endParaRPr kumimoji="1" lang="ja-JP" altLang="en-US"/>
-          </a:p>
-        </p:txBody>
-      </p:sp>
-      <p:sp>
-        <p:nvSpPr>
-          <p:cNvPr id="4" name="Footer Placeholder 3"/>
+            <a:endParaRPr lang="en-US" altLang="ja-JP"/>
+          </a:p>
+        </p:txBody>
+      </p:sp>
+      <p:sp>
+        <p:nvSpPr>
+          <p:cNvPr id="4" name="フッター プレースホルダー 3"/>
           <p:cNvSpPr>
             <a:spLocks noGrp="1"/>
           </p:cNvSpPr>
@@ -1971,13 +3178,13 @@
           <a:bodyPr/>
           <a:lstStyle/>
           <a:p>
-            <a:endParaRPr kumimoji="1" lang="ja-JP" altLang="en-US"/>
-          </a:p>
-        </p:txBody>
-      </p:sp>
-      <p:sp>
-        <p:nvSpPr>
-          <p:cNvPr id="5" name="Slide Number Placeholder 4"/>
+            <a:endParaRPr lang="en-US" altLang="ja-JP"/>
+          </a:p>
+        </p:txBody>
+      </p:sp>
+      <p:sp>
+        <p:nvSpPr>
+          <p:cNvPr id="5" name="スライド番号プレースホルダー 4"/>
           <p:cNvSpPr>
             <a:spLocks noGrp="1"/>
           </p:cNvSpPr>
@@ -1990,18 +3197,19 @@
           <a:bodyPr/>
           <a:lstStyle/>
           <a:p>
-            <a:fld id="{B245FAAB-DB64-4F58-895C-CA58F032C6F6}" type="slidenum">
-              <a:rPr kumimoji="1" lang="ja-JP" altLang="en-US" smtClean="0"/>
+            <a:fld id="{E1EE5797-CA3B-400F-983A-DFD7419CD079}" type="slidenum">
+              <a:rPr lang="ja-JP" altLang="en-US" smtClean="0"/>
+              <a:pPr/>
               <a:t>‹#›</a:t>
             </a:fld>
-            <a:endParaRPr kumimoji="1" lang="ja-JP" altLang="en-US"/>
+            <a:endParaRPr lang="en-US" altLang="ja-JP"/>
           </a:p>
         </p:txBody>
       </p:sp>
     </p:spTree>
     <p:extLst>
       <p:ext uri="{BB962C8B-B14F-4D97-AF65-F5344CB8AC3E}">
-        <p14:creationId xmlns:p14="http://schemas.microsoft.com/office/powerpoint/2010/main" val="3227482825"/>
+        <p14:creationId xmlns:p14="http://schemas.microsoft.com/office/powerpoint/2010/main" val="745929040"/>
       </p:ext>
     </p:extLst>
   </p:cSld>
@@ -2030,7 +3238,7 @@
       </p:grpSpPr>
       <p:sp>
         <p:nvSpPr>
-          <p:cNvPr id="2" name="Date Placeholder 1"/>
+          <p:cNvPr id="2" name="日付プレースホルダー 1"/>
           <p:cNvSpPr>
             <a:spLocks noGrp="1"/>
           </p:cNvSpPr>
@@ -2043,17 +3251,13 @@
           <a:bodyPr/>
           <a:lstStyle/>
           <a:p>
-            <a:fld id="{334D96BB-04BE-47A7-A37E-F93A28770C7D}" type="datetimeFigureOut">
-              <a:rPr kumimoji="1" lang="ja-JP" altLang="en-US" smtClean="0"/>
-              <a:t>2026/4/5</a:t>
-            </a:fld>
-            <a:endParaRPr kumimoji="1" lang="ja-JP" altLang="en-US"/>
-          </a:p>
-        </p:txBody>
-      </p:sp>
-      <p:sp>
-        <p:nvSpPr>
-          <p:cNvPr id="3" name="Footer Placeholder 2"/>
+            <a:endParaRPr lang="en-US" altLang="ja-JP"/>
+          </a:p>
+        </p:txBody>
+      </p:sp>
+      <p:sp>
+        <p:nvSpPr>
+          <p:cNvPr id="3" name="フッター プレースホルダー 2"/>
           <p:cNvSpPr>
             <a:spLocks noGrp="1"/>
           </p:cNvSpPr>
@@ -2066,13 +3270,13 @@
           <a:bodyPr/>
           <a:lstStyle/>
           <a:p>
-            <a:endParaRPr kumimoji="1" lang="ja-JP" altLang="en-US"/>
-          </a:p>
-        </p:txBody>
-      </p:sp>
-      <p:sp>
-        <p:nvSpPr>
-          <p:cNvPr id="4" name="Slide Number Placeholder 3"/>
+            <a:endParaRPr lang="en-US" altLang="ja-JP"/>
+          </a:p>
+        </p:txBody>
+      </p:sp>
+      <p:sp>
+        <p:nvSpPr>
+          <p:cNvPr id="4" name="スライド番号プレースホルダー 3"/>
           <p:cNvSpPr>
             <a:spLocks noGrp="1"/>
           </p:cNvSpPr>
@@ -2085,18 +3289,19 @@
           <a:bodyPr/>
           <a:lstStyle/>
           <a:p>
-            <a:fld id="{B245FAAB-DB64-4F58-895C-CA58F032C6F6}" type="slidenum">
-              <a:rPr kumimoji="1" lang="ja-JP" altLang="en-US" smtClean="0"/>
+            <a:fld id="{0E3D12FF-940E-4B4F-B5EB-59EFBAA3AF17}" type="slidenum">
+              <a:rPr lang="ja-JP" altLang="en-US" smtClean="0"/>
+              <a:pPr/>
               <a:t>‹#›</a:t>
             </a:fld>
-            <a:endParaRPr kumimoji="1" lang="ja-JP" altLang="en-US"/>
+            <a:endParaRPr lang="en-US" altLang="ja-JP"/>
           </a:p>
         </p:txBody>
       </p:sp>
     </p:spTree>
     <p:extLst>
       <p:ext uri="{BB962C8B-B14F-4D97-AF65-F5344CB8AC3E}">
-        <p14:creationId xmlns:p14="http://schemas.microsoft.com/office/powerpoint/2010/main" val="3897809078"/>
+        <p14:creationId xmlns:p14="http://schemas.microsoft.com/office/powerpoint/2010/main" val="2610164908"/>
       </p:ext>
     </p:extLst>
   </p:cSld>
@@ -2108,7 +3313,7 @@
 
 <file path=ppt/slideLayouts/slideLayout8.xml><?xml version="1.0" encoding="utf-8"?>
 <p:sldLayout xmlns:a="http://schemas.openxmlformats.org/drawingml/2006/main" xmlns:r="http://schemas.openxmlformats.org/officeDocument/2006/relationships" xmlns:p="http://schemas.openxmlformats.org/presentationml/2006/main" type="objTx" preserve="1">
-  <p:cSld name="タイトル付きのコンテンツ">
+  <p:cSld name="タイトル付きの&#10;コンテンツ">
     <p:spTree>
       <p:nvGrpSpPr>
         <p:cNvPr id="1" name=""/>
@@ -2125,7 +3330,7 @@
       </p:grpSpPr>
       <p:sp>
         <p:nvSpPr>
-          <p:cNvPr id="2" name="Title 1"/>
+          <p:cNvPr id="2" name="タイトル 1"/>
           <p:cNvSpPr>
             <a:spLocks noGrp="1"/>
           </p:cNvSpPr>
@@ -2135,29 +3340,28 @@
         </p:nvSpPr>
         <p:spPr>
           <a:xfrm>
-            <a:off x="804906" y="577638"/>
-            <a:ext cx="3768906" cy="2021734"/>
+            <a:off x="411564" y="245808"/>
+            <a:ext cx="2708004" cy="1046114"/>
           </a:xfrm>
         </p:spPr>
         <p:txBody>
           <a:bodyPr anchor="b"/>
           <a:lstStyle>
-            <a:lvl1pPr>
-              <a:defRPr sz="4043"/>
+            <a:lvl1pPr algn="l">
+              <a:defRPr sz="1800" b="1"/>
             </a:lvl1pPr>
           </a:lstStyle>
           <a:p>
             <a:r>
-              <a:rPr lang="ja-JP" altLang="en-US"/>
+              <a:rPr kumimoji="1" lang="ja-JP" altLang="en-US"/>
               <a:t>マスター タイトルの書式設定</a:t>
             </a:r>
-            <a:endParaRPr lang="en-US" dirty="0"/>
-          </a:p>
-        </p:txBody>
-      </p:sp>
-      <p:sp>
-        <p:nvSpPr>
-          <p:cNvPr id="3" name="Content Placeholder 2"/>
+          </a:p>
+        </p:txBody>
+      </p:sp>
+      <p:sp>
+        <p:nvSpPr>
+          <p:cNvPr id="3" name="コンテンツ プレースホルダー 2"/>
           <p:cNvSpPr>
             <a:spLocks noGrp="1"/>
           </p:cNvSpPr>
@@ -2167,114 +3371,113 @@
         </p:nvSpPr>
         <p:spPr>
           <a:xfrm>
-            <a:off x="4967897" y="1247540"/>
-            <a:ext cx="5915829" cy="6157464"/>
+            <a:off x="3218168" y="245813"/>
+            <a:ext cx="4601463" cy="5269157"/>
           </a:xfrm>
         </p:spPr>
         <p:txBody>
           <a:bodyPr/>
           <a:lstStyle>
             <a:lvl1pPr>
-              <a:defRPr sz="4043"/>
+              <a:defRPr sz="2900"/>
             </a:lvl1pPr>
             <a:lvl2pPr>
-              <a:defRPr sz="3538"/>
+              <a:defRPr sz="2500"/>
             </a:lvl2pPr>
             <a:lvl3pPr>
-              <a:defRPr sz="3032"/>
+              <a:defRPr sz="2200"/>
             </a:lvl3pPr>
             <a:lvl4pPr>
-              <a:defRPr sz="2527"/>
+              <a:defRPr sz="1800"/>
             </a:lvl4pPr>
             <a:lvl5pPr>
-              <a:defRPr sz="2527"/>
+              <a:defRPr sz="1800"/>
             </a:lvl5pPr>
             <a:lvl6pPr>
-              <a:defRPr sz="2527"/>
+              <a:defRPr sz="1800"/>
             </a:lvl6pPr>
             <a:lvl7pPr>
-              <a:defRPr sz="2527"/>
+              <a:defRPr sz="1800"/>
             </a:lvl7pPr>
             <a:lvl8pPr>
-              <a:defRPr sz="2527"/>
+              <a:defRPr sz="1800"/>
             </a:lvl8pPr>
             <a:lvl9pPr>
-              <a:defRPr sz="2527"/>
+              <a:defRPr sz="1800"/>
             </a:lvl9pPr>
           </a:lstStyle>
           <a:p>
             <a:pPr lvl="0"/>
             <a:r>
-              <a:rPr lang="ja-JP" altLang="en-US"/>
+              <a:rPr kumimoji="1" lang="ja-JP" altLang="en-US"/>
               <a:t>マスター テキストの書式設定</a:t>
             </a:r>
           </a:p>
           <a:p>
             <a:pPr lvl="1"/>
             <a:r>
-              <a:rPr lang="ja-JP" altLang="en-US"/>
+              <a:rPr kumimoji="1" lang="ja-JP" altLang="en-US"/>
               <a:t>第 </a:t>
             </a:r>
             <a:r>
-              <a:rPr lang="en-US" altLang="ja-JP"/>
+              <a:rPr kumimoji="1" lang="en-US" altLang="ja-JP"/>
               <a:t>2 </a:t>
             </a:r>
             <a:r>
-              <a:rPr lang="ja-JP" altLang="en-US"/>
+              <a:rPr kumimoji="1" lang="ja-JP" altLang="en-US"/>
               <a:t>レベル</a:t>
             </a:r>
           </a:p>
           <a:p>
             <a:pPr lvl="2"/>
             <a:r>
-              <a:rPr lang="ja-JP" altLang="en-US"/>
+              <a:rPr kumimoji="1" lang="ja-JP" altLang="en-US"/>
               <a:t>第 </a:t>
             </a:r>
             <a:r>
-              <a:rPr lang="en-US" altLang="ja-JP"/>
+              <a:rPr kumimoji="1" lang="en-US" altLang="ja-JP"/>
               <a:t>3 </a:t>
             </a:r>
             <a:r>
-              <a:rPr lang="ja-JP" altLang="en-US"/>
+              <a:rPr kumimoji="1" lang="ja-JP" altLang="en-US"/>
               <a:t>レベル</a:t>
             </a:r>
           </a:p>
           <a:p>
             <a:pPr lvl="3"/>
             <a:r>
-              <a:rPr lang="ja-JP" altLang="en-US"/>
+              <a:rPr kumimoji="1" lang="ja-JP" altLang="en-US"/>
               <a:t>第 </a:t>
             </a:r>
             <a:r>
-              <a:rPr lang="en-US" altLang="ja-JP"/>
+              <a:rPr kumimoji="1" lang="en-US" altLang="ja-JP"/>
               <a:t>4 </a:t>
             </a:r>
             <a:r>
-              <a:rPr lang="ja-JP" altLang="en-US"/>
+              <a:rPr kumimoji="1" lang="ja-JP" altLang="en-US"/>
               <a:t>レベル</a:t>
             </a:r>
           </a:p>
           <a:p>
             <a:pPr lvl="4"/>
             <a:r>
-              <a:rPr lang="ja-JP" altLang="en-US"/>
+              <a:rPr kumimoji="1" lang="ja-JP" altLang="en-US"/>
               <a:t>第 </a:t>
             </a:r>
             <a:r>
-              <a:rPr lang="en-US" altLang="ja-JP"/>
+              <a:rPr kumimoji="1" lang="en-US" altLang="ja-JP"/>
               <a:t>5 </a:t>
             </a:r>
             <a:r>
-              <a:rPr lang="ja-JP" altLang="en-US"/>
+              <a:rPr kumimoji="1" lang="ja-JP" altLang="en-US"/>
               <a:t>レベル</a:t>
             </a:r>
-            <a:endParaRPr lang="en-US" dirty="0"/>
-          </a:p>
-        </p:txBody>
-      </p:sp>
-      <p:sp>
-        <p:nvSpPr>
-          <p:cNvPr id="4" name="Text Placeholder 3"/>
+          </a:p>
+        </p:txBody>
+      </p:sp>
+      <p:sp>
+        <p:nvSpPr>
+          <p:cNvPr id="4" name="テキスト プレースホルダー 3"/>
           <p:cNvSpPr>
             <a:spLocks noGrp="1"/>
           </p:cNvSpPr>
@@ -2284,8 +3487,8 @@
         </p:nvSpPr>
         <p:spPr>
           <a:xfrm>
-            <a:off x="804906" y="2599373"/>
-            <a:ext cx="3768906" cy="4815659"/>
+            <a:off x="411564" y="1291927"/>
+            <a:ext cx="2708004" cy="4223043"/>
           </a:xfrm>
         </p:spPr>
         <p:txBody>
@@ -2293,45 +3496,45 @@
           <a:lstStyle>
             <a:lvl1pPr marL="0" indent="0">
               <a:buNone/>
-              <a:defRPr sz="2021"/>
+              <a:defRPr sz="1300"/>
             </a:lvl1pPr>
-            <a:lvl2pPr marL="577626" indent="0">
-              <a:buNone/>
-              <a:defRPr sz="1769"/>
+            <a:lvl2pPr marL="411248" indent="0">
+              <a:buNone/>
+              <a:defRPr sz="1100"/>
             </a:lvl2pPr>
-            <a:lvl3pPr marL="1155253" indent="0">
-              <a:buNone/>
-              <a:defRPr sz="1516"/>
+            <a:lvl3pPr marL="822495" indent="0">
+              <a:buNone/>
+              <a:defRPr sz="900"/>
             </a:lvl3pPr>
-            <a:lvl4pPr marL="1732879" indent="0">
-              <a:buNone/>
-              <a:defRPr sz="1263"/>
+            <a:lvl4pPr marL="1233744" indent="0">
+              <a:buNone/>
+              <a:defRPr sz="800"/>
             </a:lvl4pPr>
-            <a:lvl5pPr marL="2310506" indent="0">
-              <a:buNone/>
-              <a:defRPr sz="1263"/>
+            <a:lvl5pPr marL="1644991" indent="0">
+              <a:buNone/>
+              <a:defRPr sz="800"/>
             </a:lvl5pPr>
-            <a:lvl6pPr marL="2888132" indent="0">
-              <a:buNone/>
-              <a:defRPr sz="1263"/>
+            <a:lvl6pPr marL="2056239" indent="0">
+              <a:buNone/>
+              <a:defRPr sz="800"/>
             </a:lvl6pPr>
-            <a:lvl7pPr marL="3465759" indent="0">
-              <a:buNone/>
-              <a:defRPr sz="1263"/>
+            <a:lvl7pPr marL="2467486" indent="0">
+              <a:buNone/>
+              <a:defRPr sz="800"/>
             </a:lvl7pPr>
-            <a:lvl8pPr marL="4043385" indent="0">
-              <a:buNone/>
-              <a:defRPr sz="1263"/>
+            <a:lvl8pPr marL="2878732" indent="0">
+              <a:buNone/>
+              <a:defRPr sz="800"/>
             </a:lvl8pPr>
-            <a:lvl9pPr marL="4621012" indent="0">
-              <a:buNone/>
-              <a:defRPr sz="1263"/>
+            <a:lvl9pPr marL="3289981" indent="0">
+              <a:buNone/>
+              <a:defRPr sz="800"/>
             </a:lvl9pPr>
           </a:lstStyle>
           <a:p>
             <a:pPr lvl="0"/>
             <a:r>
-              <a:rPr lang="ja-JP" altLang="en-US"/>
+              <a:rPr kumimoji="1" lang="ja-JP" altLang="en-US"/>
               <a:t>マスター テキストの書式設定</a:t>
             </a:r>
           </a:p>
@@ -2339,7 +3542,7 @@
       </p:sp>
       <p:sp>
         <p:nvSpPr>
-          <p:cNvPr id="5" name="Date Placeholder 4"/>
+          <p:cNvPr id="5" name="日付プレースホルダー 4"/>
           <p:cNvSpPr>
             <a:spLocks noGrp="1"/>
           </p:cNvSpPr>
@@ -2352,17 +3555,13 @@
           <a:bodyPr/>
           <a:lstStyle/>
           <a:p>
-            <a:fld id="{334D96BB-04BE-47A7-A37E-F93A28770C7D}" type="datetimeFigureOut">
-              <a:rPr kumimoji="1" lang="ja-JP" altLang="en-US" smtClean="0"/>
-              <a:t>2026/4/5</a:t>
-            </a:fld>
-            <a:endParaRPr kumimoji="1" lang="ja-JP" altLang="en-US"/>
-          </a:p>
-        </p:txBody>
-      </p:sp>
-      <p:sp>
-        <p:nvSpPr>
-          <p:cNvPr id="6" name="Footer Placeholder 5"/>
+            <a:endParaRPr lang="en-US" altLang="ja-JP"/>
+          </a:p>
+        </p:txBody>
+      </p:sp>
+      <p:sp>
+        <p:nvSpPr>
+          <p:cNvPr id="6" name="フッター プレースホルダー 5"/>
           <p:cNvSpPr>
             <a:spLocks noGrp="1"/>
           </p:cNvSpPr>
@@ -2375,13 +3574,13 @@
           <a:bodyPr/>
           <a:lstStyle/>
           <a:p>
-            <a:endParaRPr kumimoji="1" lang="ja-JP" altLang="en-US"/>
-          </a:p>
-        </p:txBody>
-      </p:sp>
-      <p:sp>
-        <p:nvSpPr>
-          <p:cNvPr id="7" name="Slide Number Placeholder 6"/>
+            <a:endParaRPr lang="en-US" altLang="ja-JP"/>
+          </a:p>
+        </p:txBody>
+      </p:sp>
+      <p:sp>
+        <p:nvSpPr>
+          <p:cNvPr id="7" name="スライド番号プレースホルダー 6"/>
           <p:cNvSpPr>
             <a:spLocks noGrp="1"/>
           </p:cNvSpPr>
@@ -2394,18 +3593,19 @@
           <a:bodyPr/>
           <a:lstStyle/>
           <a:p>
-            <a:fld id="{B245FAAB-DB64-4F58-895C-CA58F032C6F6}" type="slidenum">
-              <a:rPr kumimoji="1" lang="ja-JP" altLang="en-US" smtClean="0"/>
+            <a:fld id="{127BC41B-8305-41C5-AB68-8BCB82AEBE80}" type="slidenum">
+              <a:rPr lang="ja-JP" altLang="en-US" smtClean="0"/>
+              <a:pPr/>
               <a:t>‹#›</a:t>
             </a:fld>
-            <a:endParaRPr kumimoji="1" lang="ja-JP" altLang="en-US"/>
+            <a:endParaRPr lang="en-US" altLang="ja-JP"/>
           </a:p>
         </p:txBody>
       </p:sp>
     </p:spTree>
     <p:extLst>
       <p:ext uri="{BB962C8B-B14F-4D97-AF65-F5344CB8AC3E}">
-        <p14:creationId xmlns:p14="http://schemas.microsoft.com/office/powerpoint/2010/main" val="2904684524"/>
+        <p14:creationId xmlns:p14="http://schemas.microsoft.com/office/powerpoint/2010/main" val="2497403357"/>
       </p:ext>
     </p:extLst>
   </p:cSld>
@@ -2434,7 +3634,7 @@
       </p:grpSpPr>
       <p:sp>
         <p:nvSpPr>
-          <p:cNvPr id="2" name="Title 1"/>
+          <p:cNvPr id="2" name="タイトル 1"/>
           <p:cNvSpPr>
             <a:spLocks noGrp="1"/>
           </p:cNvSpPr>
@@ -2444,31 +3644,30 @@
         </p:nvSpPr>
         <p:spPr>
           <a:xfrm>
-            <a:off x="804906" y="577638"/>
-            <a:ext cx="3768906" cy="2021734"/>
+            <a:off x="1613370" y="4321655"/>
+            <a:ext cx="4938713" cy="510195"/>
           </a:xfrm>
         </p:spPr>
         <p:txBody>
           <a:bodyPr anchor="b"/>
           <a:lstStyle>
-            <a:lvl1pPr>
-              <a:defRPr sz="4043"/>
+            <a:lvl1pPr algn="l">
+              <a:defRPr sz="1800" b="1"/>
             </a:lvl1pPr>
           </a:lstStyle>
           <a:p>
             <a:r>
-              <a:rPr lang="ja-JP" altLang="en-US"/>
+              <a:rPr kumimoji="1" lang="ja-JP" altLang="en-US"/>
               <a:t>マスター タイトルの書式設定</a:t>
             </a:r>
-            <a:endParaRPr lang="en-US" dirty="0"/>
-          </a:p>
-        </p:txBody>
-      </p:sp>
-      <p:sp>
-        <p:nvSpPr>
-          <p:cNvPr id="3" name="Picture Placeholder 2"/>
-          <p:cNvSpPr>
-            <a:spLocks noGrp="1" noChangeAspect="1"/>
+          </a:p>
+        </p:txBody>
+      </p:sp>
+      <p:sp>
+        <p:nvSpPr>
+          <p:cNvPr id="3" name="図プレースホルダー 2"/>
+          <p:cNvSpPr>
+            <a:spLocks noGrp="1"/>
           </p:cNvSpPr>
           <p:nvPr>
             <p:ph type="pic" idx="1"/>
@@ -2476,73 +3675,8 @@
         </p:nvSpPr>
         <p:spPr>
           <a:xfrm>
-            <a:off x="4967897" y="1247540"/>
-            <a:ext cx="5915829" cy="6157464"/>
-          </a:xfrm>
-        </p:spPr>
-        <p:txBody>
-          <a:bodyPr anchor="t"/>
-          <a:lstStyle>
-            <a:lvl1pPr marL="0" indent="0">
-              <a:buNone/>
-              <a:defRPr sz="4043"/>
-            </a:lvl1pPr>
-            <a:lvl2pPr marL="577626" indent="0">
-              <a:buNone/>
-              <a:defRPr sz="3538"/>
-            </a:lvl2pPr>
-            <a:lvl3pPr marL="1155253" indent="0">
-              <a:buNone/>
-              <a:defRPr sz="3032"/>
-            </a:lvl3pPr>
-            <a:lvl4pPr marL="1732879" indent="0">
-              <a:buNone/>
-              <a:defRPr sz="2527"/>
-            </a:lvl4pPr>
-            <a:lvl5pPr marL="2310506" indent="0">
-              <a:buNone/>
-              <a:defRPr sz="2527"/>
-            </a:lvl5pPr>
-            <a:lvl6pPr marL="2888132" indent="0">
-              <a:buNone/>
-              <a:defRPr sz="2527"/>
-            </a:lvl6pPr>
-            <a:lvl7pPr marL="3465759" indent="0">
-              <a:buNone/>
-              <a:defRPr sz="2527"/>
-            </a:lvl7pPr>
-            <a:lvl8pPr marL="4043385" indent="0">
-              <a:buNone/>
-              <a:defRPr sz="2527"/>
-            </a:lvl8pPr>
-            <a:lvl9pPr marL="4621012" indent="0">
-              <a:buNone/>
-              <a:defRPr sz="2527"/>
-            </a:lvl9pPr>
-          </a:lstStyle>
-          <a:p>
-            <a:r>
-              <a:rPr lang="ja-JP" altLang="en-US"/>
-              <a:t>アイコンをクリックして図を追加</a:t>
-            </a:r>
-            <a:endParaRPr lang="en-US" dirty="0"/>
-          </a:p>
-        </p:txBody>
-      </p:sp>
-      <p:sp>
-        <p:nvSpPr>
-          <p:cNvPr id="4" name="Text Placeholder 3"/>
-          <p:cNvSpPr>
-            <a:spLocks noGrp="1"/>
-          </p:cNvSpPr>
-          <p:nvPr>
-            <p:ph type="body" sz="half" idx="2"/>
-          </p:nvPr>
-        </p:nvSpPr>
-        <p:spPr>
-          <a:xfrm>
-            <a:off x="804906" y="2599373"/>
-            <a:ext cx="3768906" cy="4815659"/>
+            <a:off x="1613370" y="551639"/>
+            <a:ext cx="4938713" cy="3704273"/>
           </a:xfrm>
         </p:spPr>
         <p:txBody>
@@ -2550,45 +3684,106 @@
           <a:lstStyle>
             <a:lvl1pPr marL="0" indent="0">
               <a:buNone/>
-              <a:defRPr sz="2021"/>
+              <a:defRPr sz="2900"/>
             </a:lvl1pPr>
-            <a:lvl2pPr marL="577626" indent="0">
-              <a:buNone/>
-              <a:defRPr sz="1769"/>
+            <a:lvl2pPr marL="411248" indent="0">
+              <a:buNone/>
+              <a:defRPr sz="2500"/>
             </a:lvl2pPr>
-            <a:lvl3pPr marL="1155253" indent="0">
-              <a:buNone/>
-              <a:defRPr sz="1516"/>
+            <a:lvl3pPr marL="822495" indent="0">
+              <a:buNone/>
+              <a:defRPr sz="2200"/>
             </a:lvl3pPr>
-            <a:lvl4pPr marL="1732879" indent="0">
-              <a:buNone/>
-              <a:defRPr sz="1263"/>
+            <a:lvl4pPr marL="1233744" indent="0">
+              <a:buNone/>
+              <a:defRPr sz="1800"/>
             </a:lvl4pPr>
-            <a:lvl5pPr marL="2310506" indent="0">
-              <a:buNone/>
-              <a:defRPr sz="1263"/>
+            <a:lvl5pPr marL="1644991" indent="0">
+              <a:buNone/>
+              <a:defRPr sz="1800"/>
             </a:lvl5pPr>
-            <a:lvl6pPr marL="2888132" indent="0">
-              <a:buNone/>
-              <a:defRPr sz="1263"/>
+            <a:lvl6pPr marL="2056239" indent="0">
+              <a:buNone/>
+              <a:defRPr sz="1800"/>
             </a:lvl6pPr>
-            <a:lvl7pPr marL="3465759" indent="0">
-              <a:buNone/>
-              <a:defRPr sz="1263"/>
+            <a:lvl7pPr marL="2467486" indent="0">
+              <a:buNone/>
+              <a:defRPr sz="1800"/>
             </a:lvl7pPr>
-            <a:lvl8pPr marL="4043385" indent="0">
-              <a:buNone/>
-              <a:defRPr sz="1263"/>
+            <a:lvl8pPr marL="2878732" indent="0">
+              <a:buNone/>
+              <a:defRPr sz="1800"/>
             </a:lvl8pPr>
-            <a:lvl9pPr marL="4621012" indent="0">
-              <a:buNone/>
-              <a:defRPr sz="1263"/>
+            <a:lvl9pPr marL="3289981" indent="0">
+              <a:buNone/>
+              <a:defRPr sz="1800"/>
             </a:lvl9pPr>
           </a:lstStyle>
           <a:p>
+            <a:endParaRPr kumimoji="1" lang="ja-JP" altLang="en-US"/>
+          </a:p>
+        </p:txBody>
+      </p:sp>
+      <p:sp>
+        <p:nvSpPr>
+          <p:cNvPr id="4" name="テキスト プレースホルダー 3"/>
+          <p:cNvSpPr>
+            <a:spLocks noGrp="1"/>
+          </p:cNvSpPr>
+          <p:nvPr>
+            <p:ph type="body" sz="half" idx="2"/>
+          </p:nvPr>
+        </p:nvSpPr>
+        <p:spPr>
+          <a:xfrm>
+            <a:off x="1613370" y="4831847"/>
+            <a:ext cx="4938713" cy="724562"/>
+          </a:xfrm>
+        </p:spPr>
+        <p:txBody>
+          <a:bodyPr/>
+          <a:lstStyle>
+            <a:lvl1pPr marL="0" indent="0">
+              <a:buNone/>
+              <a:defRPr sz="1300"/>
+            </a:lvl1pPr>
+            <a:lvl2pPr marL="411248" indent="0">
+              <a:buNone/>
+              <a:defRPr sz="1100"/>
+            </a:lvl2pPr>
+            <a:lvl3pPr marL="822495" indent="0">
+              <a:buNone/>
+              <a:defRPr sz="900"/>
+            </a:lvl3pPr>
+            <a:lvl4pPr marL="1233744" indent="0">
+              <a:buNone/>
+              <a:defRPr sz="800"/>
+            </a:lvl4pPr>
+            <a:lvl5pPr marL="1644991" indent="0">
+              <a:buNone/>
+              <a:defRPr sz="800"/>
+            </a:lvl5pPr>
+            <a:lvl6pPr marL="2056239" indent="0">
+              <a:buNone/>
+              <a:defRPr sz="800"/>
+            </a:lvl6pPr>
+            <a:lvl7pPr marL="2467486" indent="0">
+              <a:buNone/>
+              <a:defRPr sz="800"/>
+            </a:lvl7pPr>
+            <a:lvl8pPr marL="2878732" indent="0">
+              <a:buNone/>
+              <a:defRPr sz="800"/>
+            </a:lvl8pPr>
+            <a:lvl9pPr marL="3289981" indent="0">
+              <a:buNone/>
+              <a:defRPr sz="800"/>
+            </a:lvl9pPr>
+          </a:lstStyle>
+          <a:p>
             <a:pPr lvl="0"/>
             <a:r>
-              <a:rPr lang="ja-JP" altLang="en-US"/>
+              <a:rPr kumimoji="1" lang="ja-JP" altLang="en-US"/>
               <a:t>マスター テキストの書式設定</a:t>
             </a:r>
           </a:p>
@@ -2596,7 +3791,7 @@
       </p:sp>
       <p:sp>
         <p:nvSpPr>
-          <p:cNvPr id="5" name="Date Placeholder 4"/>
+          <p:cNvPr id="5" name="日付プレースホルダー 4"/>
           <p:cNvSpPr>
             <a:spLocks noGrp="1"/>
           </p:cNvSpPr>
@@ -2609,17 +3804,13 @@
           <a:bodyPr/>
           <a:lstStyle/>
           <a:p>
-            <a:fld id="{334D96BB-04BE-47A7-A37E-F93A28770C7D}" type="datetimeFigureOut">
-              <a:rPr kumimoji="1" lang="ja-JP" altLang="en-US" smtClean="0"/>
-              <a:t>2026/4/5</a:t>
-            </a:fld>
-            <a:endParaRPr kumimoji="1" lang="ja-JP" altLang="en-US"/>
-          </a:p>
-        </p:txBody>
-      </p:sp>
-      <p:sp>
-        <p:nvSpPr>
-          <p:cNvPr id="6" name="Footer Placeholder 5"/>
+            <a:endParaRPr lang="en-US" altLang="ja-JP"/>
+          </a:p>
+        </p:txBody>
+      </p:sp>
+      <p:sp>
+        <p:nvSpPr>
+          <p:cNvPr id="6" name="フッター プレースホルダー 5"/>
           <p:cNvSpPr>
             <a:spLocks noGrp="1"/>
           </p:cNvSpPr>
@@ -2632,13 +3823,13 @@
           <a:bodyPr/>
           <a:lstStyle/>
           <a:p>
-            <a:endParaRPr kumimoji="1" lang="ja-JP" altLang="en-US"/>
-          </a:p>
-        </p:txBody>
-      </p:sp>
-      <p:sp>
-        <p:nvSpPr>
-          <p:cNvPr id="7" name="Slide Number Placeholder 6"/>
+            <a:endParaRPr lang="en-US" altLang="ja-JP"/>
+          </a:p>
+        </p:txBody>
+      </p:sp>
+      <p:sp>
+        <p:nvSpPr>
+          <p:cNvPr id="7" name="スライド番号プレースホルダー 6"/>
           <p:cNvSpPr>
             <a:spLocks noGrp="1"/>
           </p:cNvSpPr>
@@ -2651,18 +3842,19 @@
           <a:bodyPr/>
           <a:lstStyle/>
           <a:p>
-            <a:fld id="{B245FAAB-DB64-4F58-895C-CA58F032C6F6}" type="slidenum">
-              <a:rPr kumimoji="1" lang="ja-JP" altLang="en-US" smtClean="0"/>
+            <a:fld id="{D204DF61-DE99-41F8-B886-F6E900930AAF}" type="slidenum">
+              <a:rPr lang="ja-JP" altLang="en-US" smtClean="0"/>
+              <a:pPr/>
               <a:t>‹#›</a:t>
             </a:fld>
-            <a:endParaRPr kumimoji="1" lang="ja-JP" altLang="en-US"/>
+            <a:endParaRPr lang="en-US" altLang="ja-JP"/>
           </a:p>
         </p:txBody>
       </p:sp>
     </p:spTree>
     <p:extLst>
       <p:ext uri="{BB962C8B-B14F-4D97-AF65-F5344CB8AC3E}">
-        <p14:creationId xmlns:p14="http://schemas.microsoft.com/office/powerpoint/2010/main" val="1677516641"/>
+        <p14:creationId xmlns:p14="http://schemas.microsoft.com/office/powerpoint/2010/main" val="3874258343"/>
       </p:ext>
     </p:extLst>
   </p:cSld>
@@ -2696,7 +3888,7 @@
       </p:grpSpPr>
       <p:sp>
         <p:nvSpPr>
-          <p:cNvPr id="2" name="Title Placeholder 1"/>
+          <p:cNvPr id="2" name="タイトル プレースホルダー 1"/>
           <p:cNvSpPr>
             <a:spLocks noGrp="1"/>
           </p:cNvSpPr>
@@ -2706,30 +3898,29 @@
         </p:nvSpPr>
         <p:spPr>
           <a:xfrm>
-            <a:off x="803384" y="461310"/>
-            <a:ext cx="10078820" cy="1674751"/>
+            <a:off x="411560" y="247239"/>
+            <a:ext cx="7408069" cy="1028965"/>
           </a:xfrm>
           <a:prstGeom prst="rect">
             <a:avLst/>
           </a:prstGeom>
         </p:spPr>
         <p:txBody>
-          <a:bodyPr vert="horz" lIns="91440" tIns="45720" rIns="91440" bIns="45720" rtlCol="0" anchor="ctr">
+          <a:bodyPr vert="horz" lIns="82249" tIns="41125" rIns="82249" bIns="41125" rtlCol="0" anchor="ctr">
             <a:normAutofit/>
           </a:bodyPr>
           <a:lstStyle/>
           <a:p>
             <a:r>
-              <a:rPr lang="ja-JP" altLang="en-US"/>
+              <a:rPr kumimoji="1" lang="ja-JP" altLang="en-US"/>
               <a:t>マスター タイトルの書式設定</a:t>
             </a:r>
-            <a:endParaRPr lang="en-US" dirty="0"/>
-          </a:p>
-        </p:txBody>
-      </p:sp>
-      <p:sp>
-        <p:nvSpPr>
-          <p:cNvPr id="3" name="Text Placeholder 2"/>
+          </a:p>
+        </p:txBody>
+      </p:sp>
+      <p:sp>
+        <p:nvSpPr>
+          <p:cNvPr id="3" name="テキスト プレースホルダー 2"/>
           <p:cNvSpPr>
             <a:spLocks noGrp="1"/>
           </p:cNvSpPr>
@@ -2739,91 +3930,90 @@
         </p:nvSpPr>
         <p:spPr>
           <a:xfrm>
-            <a:off x="803384" y="2306542"/>
-            <a:ext cx="10078820" cy="5497593"/>
+            <a:off x="411560" y="1440555"/>
+            <a:ext cx="7408069" cy="4074415"/>
           </a:xfrm>
           <a:prstGeom prst="rect">
             <a:avLst/>
           </a:prstGeom>
         </p:spPr>
         <p:txBody>
-          <a:bodyPr vert="horz" lIns="91440" tIns="45720" rIns="91440" bIns="45720" rtlCol="0">
+          <a:bodyPr vert="horz" lIns="82249" tIns="41125" rIns="82249" bIns="41125" rtlCol="0">
             <a:normAutofit/>
           </a:bodyPr>
           <a:lstStyle/>
           <a:p>
             <a:pPr lvl="0"/>
             <a:r>
-              <a:rPr lang="ja-JP" altLang="en-US"/>
+              <a:rPr kumimoji="1" lang="ja-JP" altLang="en-US"/>
               <a:t>マスター テキストの書式設定</a:t>
             </a:r>
           </a:p>
           <a:p>
             <a:pPr lvl="1"/>
             <a:r>
-              <a:rPr lang="ja-JP" altLang="en-US"/>
+              <a:rPr kumimoji="1" lang="ja-JP" altLang="en-US"/>
               <a:t>第 </a:t>
             </a:r>
             <a:r>
-              <a:rPr lang="en-US" altLang="ja-JP"/>
+              <a:rPr kumimoji="1" lang="en-US" altLang="ja-JP"/>
               <a:t>2 </a:t>
             </a:r>
             <a:r>
-              <a:rPr lang="ja-JP" altLang="en-US"/>
+              <a:rPr kumimoji="1" lang="ja-JP" altLang="en-US"/>
               <a:t>レベル</a:t>
             </a:r>
           </a:p>
           <a:p>
             <a:pPr lvl="2"/>
             <a:r>
-              <a:rPr lang="ja-JP" altLang="en-US"/>
+              <a:rPr kumimoji="1" lang="ja-JP" altLang="en-US"/>
               <a:t>第 </a:t>
             </a:r>
             <a:r>
-              <a:rPr lang="en-US" altLang="ja-JP"/>
+              <a:rPr kumimoji="1" lang="en-US" altLang="ja-JP"/>
               <a:t>3 </a:t>
             </a:r>
             <a:r>
-              <a:rPr lang="ja-JP" altLang="en-US"/>
+              <a:rPr kumimoji="1" lang="ja-JP" altLang="en-US"/>
               <a:t>レベル</a:t>
             </a:r>
           </a:p>
           <a:p>
             <a:pPr lvl="3"/>
             <a:r>
-              <a:rPr lang="ja-JP" altLang="en-US"/>
+              <a:rPr kumimoji="1" lang="ja-JP" altLang="en-US"/>
               <a:t>第 </a:t>
             </a:r>
             <a:r>
-              <a:rPr lang="en-US" altLang="ja-JP"/>
+              <a:rPr kumimoji="1" lang="en-US" altLang="ja-JP"/>
               <a:t>4 </a:t>
             </a:r>
             <a:r>
-              <a:rPr lang="ja-JP" altLang="en-US"/>
+              <a:rPr kumimoji="1" lang="ja-JP" altLang="en-US"/>
               <a:t>レベル</a:t>
             </a:r>
           </a:p>
           <a:p>
             <a:pPr lvl="4"/>
             <a:r>
-              <a:rPr lang="ja-JP" altLang="en-US"/>
+              <a:rPr kumimoji="1" lang="ja-JP" altLang="en-US"/>
               <a:t>第 </a:t>
             </a:r>
             <a:r>
-              <a:rPr lang="en-US" altLang="ja-JP"/>
+              <a:rPr kumimoji="1" lang="en-US" altLang="ja-JP"/>
               <a:t>5 </a:t>
             </a:r>
             <a:r>
-              <a:rPr lang="ja-JP" altLang="en-US"/>
+              <a:rPr kumimoji="1" lang="ja-JP" altLang="en-US"/>
               <a:t>レベル</a:t>
             </a:r>
-            <a:endParaRPr lang="en-US" dirty="0"/>
-          </a:p>
-        </p:txBody>
-      </p:sp>
-      <p:sp>
-        <p:nvSpPr>
-          <p:cNvPr id="4" name="Date Placeholder 3"/>
+          </a:p>
+        </p:txBody>
+      </p:sp>
+      <p:sp>
+        <p:nvSpPr>
+          <p:cNvPr id="4" name="日付プレースホルダー 3"/>
           <p:cNvSpPr>
             <a:spLocks noGrp="1"/>
           </p:cNvSpPr>
@@ -2833,38 +4023,34 @@
         </p:nvSpPr>
         <p:spPr>
           <a:xfrm>
-            <a:off x="803384" y="8030779"/>
-            <a:ext cx="2629257" cy="461308"/>
+            <a:off x="411563" y="5722191"/>
+            <a:ext cx="1920611" cy="328697"/>
           </a:xfrm>
           <a:prstGeom prst="rect">
             <a:avLst/>
           </a:prstGeom>
         </p:spPr>
         <p:txBody>
-          <a:bodyPr vert="horz" lIns="91440" tIns="45720" rIns="91440" bIns="45720" rtlCol="0" anchor="ctr"/>
+          <a:bodyPr vert="horz" lIns="82249" tIns="41125" rIns="82249" bIns="41125" rtlCol="0" anchor="ctr"/>
           <a:lstStyle>
             <a:lvl1pPr algn="l">
-              <a:defRPr sz="1516">
+              <a:defRPr sz="1100">
                 <a:solidFill>
                   <a:schemeClr val="tx1">
-                    <a:tint val="82000"/>
+                    <a:tint val="75000"/>
                   </a:schemeClr>
                 </a:solidFill>
               </a:defRPr>
             </a:lvl1pPr>
           </a:lstStyle>
           <a:p>
-            <a:fld id="{334D96BB-04BE-47A7-A37E-F93A28770C7D}" type="datetimeFigureOut">
-              <a:rPr kumimoji="1" lang="ja-JP" altLang="en-US" smtClean="0"/>
-              <a:t>2026/4/5</a:t>
-            </a:fld>
-            <a:endParaRPr kumimoji="1" lang="ja-JP" altLang="en-US"/>
-          </a:p>
-        </p:txBody>
-      </p:sp>
-      <p:sp>
-        <p:nvSpPr>
-          <p:cNvPr id="5" name="Footer Placeholder 4"/>
+            <a:endParaRPr lang="en-US" altLang="ja-JP"/>
+          </a:p>
+        </p:txBody>
+      </p:sp>
+      <p:sp>
+        <p:nvSpPr>
+          <p:cNvPr id="5" name="フッター プレースホルダー 4"/>
           <p:cNvSpPr>
             <a:spLocks noGrp="1"/>
           </p:cNvSpPr>
@@ -2874,34 +4060,34 @@
         </p:nvSpPr>
         <p:spPr>
           <a:xfrm>
-            <a:off x="3870851" y="8030779"/>
-            <a:ext cx="3943886" cy="461308"/>
+            <a:off x="2812323" y="5722191"/>
+            <a:ext cx="2606543" cy="328697"/>
           </a:xfrm>
           <a:prstGeom prst="rect">
             <a:avLst/>
           </a:prstGeom>
         </p:spPr>
         <p:txBody>
-          <a:bodyPr vert="horz" lIns="91440" tIns="45720" rIns="91440" bIns="45720" rtlCol="0" anchor="ctr"/>
+          <a:bodyPr vert="horz" lIns="82249" tIns="41125" rIns="82249" bIns="41125" rtlCol="0" anchor="ctr"/>
           <a:lstStyle>
             <a:lvl1pPr algn="ctr">
-              <a:defRPr sz="1516">
+              <a:defRPr sz="1100">
                 <a:solidFill>
                   <a:schemeClr val="tx1">
-                    <a:tint val="82000"/>
+                    <a:tint val="75000"/>
                   </a:schemeClr>
                 </a:solidFill>
               </a:defRPr>
             </a:lvl1pPr>
           </a:lstStyle>
           <a:p>
-            <a:endParaRPr kumimoji="1" lang="ja-JP" altLang="en-US"/>
-          </a:p>
-        </p:txBody>
-      </p:sp>
-      <p:sp>
-        <p:nvSpPr>
-          <p:cNvPr id="6" name="Slide Number Placeholder 5"/>
+            <a:endParaRPr lang="en-US" altLang="ja-JP"/>
+          </a:p>
+        </p:txBody>
+      </p:sp>
+      <p:sp>
+        <p:nvSpPr>
+          <p:cNvPr id="6" name="スライド番号プレースホルダー 5"/>
           <p:cNvSpPr>
             <a:spLocks noGrp="1"/>
           </p:cNvSpPr>
@@ -2911,67 +4097,65 @@
         </p:nvSpPr>
         <p:spPr>
           <a:xfrm>
-            <a:off x="8252947" y="8030779"/>
-            <a:ext cx="2629257" cy="461308"/>
+            <a:off x="5899022" y="5722191"/>
+            <a:ext cx="1920611" cy="328697"/>
           </a:xfrm>
           <a:prstGeom prst="rect">
             <a:avLst/>
           </a:prstGeom>
         </p:spPr>
         <p:txBody>
-          <a:bodyPr vert="horz" lIns="91440" tIns="45720" rIns="91440" bIns="45720" rtlCol="0" anchor="ctr"/>
+          <a:bodyPr vert="horz" lIns="82249" tIns="41125" rIns="82249" bIns="41125" rtlCol="0" anchor="ctr"/>
           <a:lstStyle>
             <a:lvl1pPr algn="r">
-              <a:defRPr sz="1516">
+              <a:defRPr sz="1100">
                 <a:solidFill>
                   <a:schemeClr val="tx1">
-                    <a:tint val="82000"/>
+                    <a:tint val="75000"/>
                   </a:schemeClr>
                 </a:solidFill>
               </a:defRPr>
             </a:lvl1pPr>
           </a:lstStyle>
           <a:p>
-            <a:fld id="{B245FAAB-DB64-4F58-895C-CA58F032C6F6}" type="slidenum">
-              <a:rPr kumimoji="1" lang="ja-JP" altLang="en-US" smtClean="0"/>
+            <a:fld id="{8B50D56A-C676-4AC9-88C5-29501BFC9F25}" type="slidenum">
+              <a:rPr lang="ja-JP" altLang="en-US" smtClean="0"/>
+              <a:pPr/>
               <a:t>‹#›</a:t>
             </a:fld>
-            <a:endParaRPr kumimoji="1" lang="ja-JP" altLang="en-US"/>
+            <a:endParaRPr lang="en-US" altLang="ja-JP"/>
           </a:p>
         </p:txBody>
       </p:sp>
     </p:spTree>
     <p:extLst>
       <p:ext uri="{BB962C8B-B14F-4D97-AF65-F5344CB8AC3E}">
-        <p14:creationId xmlns:p14="http://schemas.microsoft.com/office/powerpoint/2010/main" val="2802714713"/>
+        <p14:creationId xmlns:p14="http://schemas.microsoft.com/office/powerpoint/2010/main" val="978977276"/>
       </p:ext>
     </p:extLst>
   </p:cSld>
   <p:clrMap bg1="lt1" tx1="dk1" bg2="lt2" tx2="dk2" accent1="accent1" accent2="accent2" accent3="accent3" accent4="accent4" accent5="accent5" accent6="accent6" hlink="hlink" folHlink="folHlink"/>
   <p:sldLayoutIdLst>
-    <p:sldLayoutId id="2147483673" r:id="rId1"/>
-    <p:sldLayoutId id="2147483674" r:id="rId2"/>
-    <p:sldLayoutId id="2147483675" r:id="rId3"/>
-    <p:sldLayoutId id="2147483676" r:id="rId4"/>
-    <p:sldLayoutId id="2147483677" r:id="rId5"/>
-    <p:sldLayoutId id="2147483678" r:id="rId6"/>
-    <p:sldLayoutId id="2147483679" r:id="rId7"/>
-    <p:sldLayoutId id="2147483680" r:id="rId8"/>
-    <p:sldLayoutId id="2147483681" r:id="rId9"/>
-    <p:sldLayoutId id="2147483682" r:id="rId10"/>
-    <p:sldLayoutId id="2147483683" r:id="rId11"/>
+    <p:sldLayoutId id="2147483689" r:id="rId1"/>
+    <p:sldLayoutId id="2147483690" r:id="rId2"/>
+    <p:sldLayoutId id="2147483691" r:id="rId3"/>
+    <p:sldLayoutId id="2147483692" r:id="rId4"/>
+    <p:sldLayoutId id="2147483693" r:id="rId5"/>
+    <p:sldLayoutId id="2147483694" r:id="rId6"/>
+    <p:sldLayoutId id="2147483695" r:id="rId7"/>
+    <p:sldLayoutId id="2147483696" r:id="rId8"/>
+    <p:sldLayoutId id="2147483697" r:id="rId9"/>
+    <p:sldLayoutId id="2147483698" r:id="rId10"/>
+    <p:sldLayoutId id="2147483699" r:id="rId11"/>
   </p:sldLayoutIdLst>
   <p:txStyles>
     <p:titleStyle>
-      <a:lvl1pPr algn="l" defTabSz="1155253" rtl="0" eaLnBrk="1" latinLnBrk="0" hangingPunct="1">
-        <a:lnSpc>
-          <a:spcPct val="90000"/>
-        </a:lnSpc>
+      <a:lvl1pPr algn="ctr" defTabSz="822495" rtl="0" eaLnBrk="1" latinLnBrk="0" hangingPunct="1">
         <a:spcBef>
           <a:spcPct val="0"/>
         </a:spcBef>
         <a:buNone/>
-        <a:defRPr kumimoji="1" sz="5559" kern="1200">
+        <a:defRPr kumimoji="1" sz="4000" kern="1200">
           <a:solidFill>
             <a:schemeClr val="tx1"/>
           </a:solidFill>
@@ -2982,16 +4166,13 @@
       </a:lvl1pPr>
     </p:titleStyle>
     <p:bodyStyle>
-      <a:lvl1pPr marL="288813" indent="-288813" algn="l" defTabSz="1155253" rtl="0" eaLnBrk="1" latinLnBrk="0" hangingPunct="1">
-        <a:lnSpc>
-          <a:spcPct val="90000"/>
-        </a:lnSpc>
+      <a:lvl1pPr marL="308435" indent="-308435" algn="l" defTabSz="822495" rtl="0" eaLnBrk="1" latinLnBrk="0" hangingPunct="1">
         <a:spcBef>
-          <a:spcPts val="1263"/>
+          <a:spcPct val="20000"/>
         </a:spcBef>
         <a:buFont typeface="Arial" panose="020B0604020202020204" pitchFamily="34" charset="0"/>
         <a:buChar char="•"/>
-        <a:defRPr kumimoji="1" sz="3538" kern="1200">
+        <a:defRPr kumimoji="1" sz="2900" kern="1200">
           <a:solidFill>
             <a:schemeClr val="tx1"/>
           </a:solidFill>
@@ -3000,16 +4181,13 @@
           <a:cs typeface="+mn-cs"/>
         </a:defRPr>
       </a:lvl1pPr>
-      <a:lvl2pPr marL="866440" indent="-288813" algn="l" defTabSz="1155253" rtl="0" eaLnBrk="1" latinLnBrk="0" hangingPunct="1">
-        <a:lnSpc>
-          <a:spcPct val="90000"/>
-        </a:lnSpc>
+      <a:lvl2pPr marL="668277" indent="-257029" algn="l" defTabSz="822495" rtl="0" eaLnBrk="1" latinLnBrk="0" hangingPunct="1">
         <a:spcBef>
-          <a:spcPts val="632"/>
+          <a:spcPct val="20000"/>
         </a:spcBef>
         <a:buFont typeface="Arial" panose="020B0604020202020204" pitchFamily="34" charset="0"/>
-        <a:buChar char="•"/>
-        <a:defRPr kumimoji="1" sz="3032" kern="1200">
+        <a:buChar char="–"/>
+        <a:defRPr kumimoji="1" sz="2500" kern="1200">
           <a:solidFill>
             <a:schemeClr val="tx1"/>
           </a:solidFill>
@@ -3018,16 +4196,13 @@
           <a:cs typeface="+mn-cs"/>
         </a:defRPr>
       </a:lvl2pPr>
-      <a:lvl3pPr marL="1444066" indent="-288813" algn="l" defTabSz="1155253" rtl="0" eaLnBrk="1" latinLnBrk="0" hangingPunct="1">
-        <a:lnSpc>
-          <a:spcPct val="90000"/>
-        </a:lnSpc>
+      <a:lvl3pPr marL="1028119" indent="-205624" algn="l" defTabSz="822495" rtl="0" eaLnBrk="1" latinLnBrk="0" hangingPunct="1">
         <a:spcBef>
-          <a:spcPts val="632"/>
+          <a:spcPct val="20000"/>
         </a:spcBef>
         <a:buFont typeface="Arial" panose="020B0604020202020204" pitchFamily="34" charset="0"/>
         <a:buChar char="•"/>
-        <a:defRPr kumimoji="1" sz="2527" kern="1200">
+        <a:defRPr kumimoji="1" sz="2200" kern="1200">
           <a:solidFill>
             <a:schemeClr val="tx1"/>
           </a:solidFill>
@@ -3036,16 +4211,13 @@
           <a:cs typeface="+mn-cs"/>
         </a:defRPr>
       </a:lvl3pPr>
-      <a:lvl4pPr marL="2021693" indent="-288813" algn="l" defTabSz="1155253" rtl="0" eaLnBrk="1" latinLnBrk="0" hangingPunct="1">
-        <a:lnSpc>
-          <a:spcPct val="90000"/>
-        </a:lnSpc>
+      <a:lvl4pPr marL="1439368" indent="-205624" algn="l" defTabSz="822495" rtl="0" eaLnBrk="1" latinLnBrk="0" hangingPunct="1">
         <a:spcBef>
-          <a:spcPts val="632"/>
+          <a:spcPct val="20000"/>
         </a:spcBef>
         <a:buFont typeface="Arial" panose="020B0604020202020204" pitchFamily="34" charset="0"/>
-        <a:buChar char="•"/>
-        <a:defRPr kumimoji="1" sz="2274" kern="1200">
+        <a:buChar char="–"/>
+        <a:defRPr kumimoji="1" sz="1800" kern="1200">
           <a:solidFill>
             <a:schemeClr val="tx1"/>
           </a:solidFill>
@@ -3054,16 +4226,13 @@
           <a:cs typeface="+mn-cs"/>
         </a:defRPr>
       </a:lvl4pPr>
-      <a:lvl5pPr marL="2599319" indent="-288813" algn="l" defTabSz="1155253" rtl="0" eaLnBrk="1" latinLnBrk="0" hangingPunct="1">
-        <a:lnSpc>
-          <a:spcPct val="90000"/>
-        </a:lnSpc>
+      <a:lvl5pPr marL="1850615" indent="-205624" algn="l" defTabSz="822495" rtl="0" eaLnBrk="1" latinLnBrk="0" hangingPunct="1">
         <a:spcBef>
-          <a:spcPts val="632"/>
+          <a:spcPct val="20000"/>
         </a:spcBef>
         <a:buFont typeface="Arial" panose="020B0604020202020204" pitchFamily="34" charset="0"/>
-        <a:buChar char="•"/>
-        <a:defRPr kumimoji="1" sz="2274" kern="1200">
+        <a:buChar char="»"/>
+        <a:defRPr kumimoji="1" sz="1800" kern="1200">
           <a:solidFill>
             <a:schemeClr val="tx1"/>
           </a:solidFill>
@@ -3072,16 +4241,13 @@
           <a:cs typeface="+mn-cs"/>
         </a:defRPr>
       </a:lvl5pPr>
-      <a:lvl6pPr marL="3176946" indent="-288813" algn="l" defTabSz="1155253" rtl="0" eaLnBrk="1" latinLnBrk="0" hangingPunct="1">
-        <a:lnSpc>
-          <a:spcPct val="90000"/>
-        </a:lnSpc>
+      <a:lvl6pPr marL="2261862" indent="-205624" algn="l" defTabSz="822495" rtl="0" eaLnBrk="1" latinLnBrk="0" hangingPunct="1">
         <a:spcBef>
-          <a:spcPts val="632"/>
+          <a:spcPct val="20000"/>
         </a:spcBef>
         <a:buFont typeface="Arial" panose="020B0604020202020204" pitchFamily="34" charset="0"/>
         <a:buChar char="•"/>
-        <a:defRPr kumimoji="1" sz="2274" kern="1200">
+        <a:defRPr kumimoji="1" sz="1800" kern="1200">
           <a:solidFill>
             <a:schemeClr val="tx1"/>
           </a:solidFill>
@@ -3090,16 +4256,13 @@
           <a:cs typeface="+mn-cs"/>
         </a:defRPr>
       </a:lvl6pPr>
-      <a:lvl7pPr marL="3754572" indent="-288813" algn="l" defTabSz="1155253" rtl="0" eaLnBrk="1" latinLnBrk="0" hangingPunct="1">
-        <a:lnSpc>
-          <a:spcPct val="90000"/>
-        </a:lnSpc>
+      <a:lvl7pPr marL="2673111" indent="-205624" algn="l" defTabSz="822495" rtl="0" eaLnBrk="1" latinLnBrk="0" hangingPunct="1">
         <a:spcBef>
-          <a:spcPts val="632"/>
+          <a:spcPct val="20000"/>
         </a:spcBef>
         <a:buFont typeface="Arial" panose="020B0604020202020204" pitchFamily="34" charset="0"/>
         <a:buChar char="•"/>
-        <a:defRPr kumimoji="1" sz="2274" kern="1200">
+        <a:defRPr kumimoji="1" sz="1800" kern="1200">
           <a:solidFill>
             <a:schemeClr val="tx1"/>
           </a:solidFill>
@@ -3108,16 +4271,13 @@
           <a:cs typeface="+mn-cs"/>
         </a:defRPr>
       </a:lvl7pPr>
-      <a:lvl8pPr marL="4332199" indent="-288813" algn="l" defTabSz="1155253" rtl="0" eaLnBrk="1" latinLnBrk="0" hangingPunct="1">
-        <a:lnSpc>
-          <a:spcPct val="90000"/>
-        </a:lnSpc>
+      <a:lvl8pPr marL="3084358" indent="-205624" algn="l" defTabSz="822495" rtl="0" eaLnBrk="1" latinLnBrk="0" hangingPunct="1">
         <a:spcBef>
-          <a:spcPts val="632"/>
+          <a:spcPct val="20000"/>
         </a:spcBef>
         <a:buFont typeface="Arial" panose="020B0604020202020204" pitchFamily="34" charset="0"/>
         <a:buChar char="•"/>
-        <a:defRPr kumimoji="1" sz="2274" kern="1200">
+        <a:defRPr kumimoji="1" sz="1800" kern="1200">
           <a:solidFill>
             <a:schemeClr val="tx1"/>
           </a:solidFill>
@@ -3126,16 +4286,13 @@
           <a:cs typeface="+mn-cs"/>
         </a:defRPr>
       </a:lvl8pPr>
-      <a:lvl9pPr marL="4909825" indent="-288813" algn="l" defTabSz="1155253" rtl="0" eaLnBrk="1" latinLnBrk="0" hangingPunct="1">
-        <a:lnSpc>
-          <a:spcPct val="90000"/>
-        </a:lnSpc>
+      <a:lvl9pPr marL="3495606" indent="-205624" algn="l" defTabSz="822495" rtl="0" eaLnBrk="1" latinLnBrk="0" hangingPunct="1">
         <a:spcBef>
-          <a:spcPts val="632"/>
+          <a:spcPct val="20000"/>
         </a:spcBef>
         <a:buFont typeface="Arial" panose="020B0604020202020204" pitchFamily="34" charset="0"/>
         <a:buChar char="•"/>
-        <a:defRPr kumimoji="1" sz="2274" kern="1200">
+        <a:defRPr kumimoji="1" sz="1800" kern="1200">
           <a:solidFill>
             <a:schemeClr val="tx1"/>
           </a:solidFill>
@@ -3147,10 +4304,10 @@
     </p:bodyStyle>
     <p:otherStyle>
       <a:defPPr>
-        <a:defRPr lang="en-US"/>
+        <a:defRPr lang="ja-JP"/>
       </a:defPPr>
-      <a:lvl1pPr marL="0" algn="l" defTabSz="1155253" rtl="0" eaLnBrk="1" latinLnBrk="0" hangingPunct="1">
-        <a:defRPr kumimoji="1" sz="2274" kern="1200">
+      <a:lvl1pPr marL="0" algn="l" defTabSz="822495" rtl="0" eaLnBrk="1" latinLnBrk="0" hangingPunct="1">
+        <a:defRPr kumimoji="1" sz="1600" kern="1200">
           <a:solidFill>
             <a:schemeClr val="tx1"/>
           </a:solidFill>
@@ -3159,8 +4316,8 @@
           <a:cs typeface="+mn-cs"/>
         </a:defRPr>
       </a:lvl1pPr>
-      <a:lvl2pPr marL="577626" algn="l" defTabSz="1155253" rtl="0" eaLnBrk="1" latinLnBrk="0" hangingPunct="1">
-        <a:defRPr kumimoji="1" sz="2274" kern="1200">
+      <a:lvl2pPr marL="411248" algn="l" defTabSz="822495" rtl="0" eaLnBrk="1" latinLnBrk="0" hangingPunct="1">
+        <a:defRPr kumimoji="1" sz="1600" kern="1200">
           <a:solidFill>
             <a:schemeClr val="tx1"/>
           </a:solidFill>
@@ -3169,8 +4326,8 @@
           <a:cs typeface="+mn-cs"/>
         </a:defRPr>
       </a:lvl2pPr>
-      <a:lvl3pPr marL="1155253" algn="l" defTabSz="1155253" rtl="0" eaLnBrk="1" latinLnBrk="0" hangingPunct="1">
-        <a:defRPr kumimoji="1" sz="2274" kern="1200">
+      <a:lvl3pPr marL="822495" algn="l" defTabSz="822495" rtl="0" eaLnBrk="1" latinLnBrk="0" hangingPunct="1">
+        <a:defRPr kumimoji="1" sz="1600" kern="1200">
           <a:solidFill>
             <a:schemeClr val="tx1"/>
           </a:solidFill>
@@ -3179,8 +4336,8 @@
           <a:cs typeface="+mn-cs"/>
         </a:defRPr>
       </a:lvl3pPr>
-      <a:lvl4pPr marL="1732879" algn="l" defTabSz="1155253" rtl="0" eaLnBrk="1" latinLnBrk="0" hangingPunct="1">
-        <a:defRPr kumimoji="1" sz="2274" kern="1200">
+      <a:lvl4pPr marL="1233744" algn="l" defTabSz="822495" rtl="0" eaLnBrk="1" latinLnBrk="0" hangingPunct="1">
+        <a:defRPr kumimoji="1" sz="1600" kern="1200">
           <a:solidFill>
             <a:schemeClr val="tx1"/>
           </a:solidFill>
@@ -3189,8 +4346,8 @@
           <a:cs typeface="+mn-cs"/>
         </a:defRPr>
       </a:lvl4pPr>
-      <a:lvl5pPr marL="2310506" algn="l" defTabSz="1155253" rtl="0" eaLnBrk="1" latinLnBrk="0" hangingPunct="1">
-        <a:defRPr kumimoji="1" sz="2274" kern="1200">
+      <a:lvl5pPr marL="1644991" algn="l" defTabSz="822495" rtl="0" eaLnBrk="1" latinLnBrk="0" hangingPunct="1">
+        <a:defRPr kumimoji="1" sz="1600" kern="1200">
           <a:solidFill>
             <a:schemeClr val="tx1"/>
           </a:solidFill>
@@ -3199,8 +4356,8 @@
           <a:cs typeface="+mn-cs"/>
         </a:defRPr>
       </a:lvl5pPr>
-      <a:lvl6pPr marL="2888132" algn="l" defTabSz="1155253" rtl="0" eaLnBrk="1" latinLnBrk="0" hangingPunct="1">
-        <a:defRPr kumimoji="1" sz="2274" kern="1200">
+      <a:lvl6pPr marL="2056239" algn="l" defTabSz="822495" rtl="0" eaLnBrk="1" latinLnBrk="0" hangingPunct="1">
+        <a:defRPr kumimoji="1" sz="1600" kern="1200">
           <a:solidFill>
             <a:schemeClr val="tx1"/>
           </a:solidFill>
@@ -3209,8 +4366,8 @@
           <a:cs typeface="+mn-cs"/>
         </a:defRPr>
       </a:lvl6pPr>
-      <a:lvl7pPr marL="3465759" algn="l" defTabSz="1155253" rtl="0" eaLnBrk="1" latinLnBrk="0" hangingPunct="1">
-        <a:defRPr kumimoji="1" sz="2274" kern="1200">
+      <a:lvl7pPr marL="2467486" algn="l" defTabSz="822495" rtl="0" eaLnBrk="1" latinLnBrk="0" hangingPunct="1">
+        <a:defRPr kumimoji="1" sz="1600" kern="1200">
           <a:solidFill>
             <a:schemeClr val="tx1"/>
           </a:solidFill>
@@ -3219,8 +4376,8 @@
           <a:cs typeface="+mn-cs"/>
         </a:defRPr>
       </a:lvl7pPr>
-      <a:lvl8pPr marL="4043385" algn="l" defTabSz="1155253" rtl="0" eaLnBrk="1" latinLnBrk="0" hangingPunct="1">
-        <a:defRPr kumimoji="1" sz="2274" kern="1200">
+      <a:lvl8pPr marL="2878732" algn="l" defTabSz="822495" rtl="0" eaLnBrk="1" latinLnBrk="0" hangingPunct="1">
+        <a:defRPr kumimoji="1" sz="1600" kern="1200">
           <a:solidFill>
             <a:schemeClr val="tx1"/>
           </a:solidFill>
@@ -3229,8 +4386,8 @@
           <a:cs typeface="+mn-cs"/>
         </a:defRPr>
       </a:lvl8pPr>
-      <a:lvl9pPr marL="4621012" algn="l" defTabSz="1155253" rtl="0" eaLnBrk="1" latinLnBrk="0" hangingPunct="1">
-        <a:defRPr kumimoji="1" sz="2274" kern="1200">
+      <a:lvl9pPr marL="3289981" algn="l" defTabSz="822495" rtl="0" eaLnBrk="1" latinLnBrk="0" hangingPunct="1">
+        <a:defRPr kumimoji="1" sz="1600" kern="1200">
           <a:solidFill>
             <a:schemeClr val="tx1"/>
           </a:solidFill>
@@ -3245,19 +4402,8 @@
 </file>
 
 <file path=ppt/slides/slide1.xml><?xml version="1.0" encoding="utf-8"?>
-<p:sld xmlns:a="http://schemas.openxmlformats.org/drawingml/2006/main" xmlns:r="http://schemas.openxmlformats.org/officeDocument/2006/relationships" xmlns:p="http://schemas.openxmlformats.org/presentationml/2006/main">
+<p:sld xmlns:a="http://schemas.openxmlformats.org/drawingml/2006/main" xmlns:r="http://schemas.openxmlformats.org/officeDocument/2006/relationships" xmlns:p="http://schemas.openxmlformats.org/presentationml/2006/main" showMasterPhAnim="0">
   <p:cSld>
-    <p:bg>
-      <p:bgPr>
-        <a:solidFill>
-          <a:schemeClr val="accent4">
-            <a:lumMod val="20000"/>
-            <a:lumOff val="80000"/>
-          </a:schemeClr>
-        </a:solidFill>
-        <a:effectLst/>
-      </p:bgPr>
-    </p:bg>
     <p:spTree>
       <p:nvGrpSpPr>
         <p:cNvPr id="1" name=""/>
@@ -3274,20 +4420,14 @@
       </p:grpSpPr>
       <p:sp>
         <p:nvSpPr>
-          <p:cNvPr id="8" name="テキスト ボックス 7">
-            <a:extLst>
-              <a:ext uri="{FF2B5EF4-FFF2-40B4-BE49-F238E27FC236}">
-                <a16:creationId xmlns:a16="http://schemas.microsoft.com/office/drawing/2014/main" id="{9672A190-062A-98CC-929B-7A16E9D3B459}"/>
-              </a:ext>
-            </a:extLst>
-          </p:cNvPr>
+          <p:cNvPr id="2" name="テキスト ボックス 1"/>
           <p:cNvSpPr txBox="1"/>
           <p:nvPr/>
         </p:nvSpPr>
         <p:spPr>
           <a:xfrm>
-            <a:off x="2362199" y="2754085"/>
-            <a:ext cx="7554686" cy="4585871"/>
+            <a:off x="947242" y="998662"/>
+            <a:ext cx="6736139" cy="3693319"/>
           </a:xfrm>
           <a:prstGeom prst="rect">
             <a:avLst/>
@@ -3295,63 +4435,245 @@
           <a:noFill/>
         </p:spPr>
         <p:txBody>
-          <a:bodyPr wrap="square" rtlCol="0">
+          <a:bodyPr wrap="none" rtlCol="0">
             <a:spAutoFit/>
           </a:bodyPr>
           <a:lstStyle/>
           <a:p>
             <a:r>
-              <a:rPr kumimoji="1" lang="ja-JP" altLang="en-US" sz="8000" dirty="0"/>
-              <a:t>新テンプレート</a:t>
-            </a:r>
-            <a:endParaRPr kumimoji="1" lang="en-US" altLang="ja-JP" sz="8000" dirty="0"/>
-          </a:p>
-          <a:p>
-            <a:r>
-              <a:rPr kumimoji="1" lang="en-US" altLang="ja-JP" sz="6600" dirty="0"/>
-              <a:t>1227×910pixel</a:t>
-            </a:r>
-          </a:p>
-          <a:p>
-            <a:r>
-              <a:rPr kumimoji="1" lang="en-US" altLang="ja-JP" sz="4000" dirty="0"/>
+              <a:rPr lang="ja-JP" altLang="en-US" b="1" dirty="0"/>
+              <a:t>＜配信情報の制作について＞</a:t>
+            </a:r>
+            <a:endParaRPr lang="en-US" altLang="ja-JP" b="1" dirty="0"/>
+          </a:p>
+          <a:p>
+            <a:endParaRPr lang="en-US" altLang="ja-JP" b="1" dirty="0"/>
+          </a:p>
+          <a:p>
+            <a:r>
+              <a:rPr lang="ja-JP" altLang="en-US" dirty="0"/>
+              <a:t>フレームサイズ：</a:t>
+            </a:r>
+            <a:r>
+              <a:rPr lang="en-US" altLang="ja-JP" dirty="0"/>
+              <a:t>W864×H648</a:t>
+            </a:r>
+            <a:r>
+              <a:rPr lang="ja-JP" altLang="en-US" dirty="0"/>
+              <a:t>（ピクセル）</a:t>
+            </a:r>
+            <a:br>
+              <a:rPr lang="ja-JP" altLang="en-US" dirty="0"/>
+            </a:br>
+            <a:r>
+              <a:rPr lang="ja-JP" altLang="en-US" dirty="0"/>
+              <a:t>データの保存形式：</a:t>
+            </a:r>
+            <a:r>
+              <a:rPr lang="en-US" altLang="ja-JP" dirty="0"/>
+              <a:t>JPEG</a:t>
+            </a:r>
+          </a:p>
+          <a:p>
+            <a:r>
+              <a:rPr lang="en-US" altLang="ja-JP" b="1" dirty="0">
+                <a:solidFill>
+                  <a:srgbClr val="002060"/>
+                </a:solidFill>
+              </a:rPr>
               <a:t>※</a:t>
             </a:r>
             <a:r>
-              <a:rPr kumimoji="1" lang="ja-JP" altLang="en-US" sz="4000" dirty="0"/>
-              <a:t>これと同じ大きさで画像を</a:t>
-            </a:r>
-            <a:endParaRPr kumimoji="1" lang="en-US" altLang="ja-JP" sz="4000" dirty="0"/>
-          </a:p>
-          <a:p>
-            <a:r>
-              <a:rPr kumimoji="1" lang="ja-JP" altLang="en-US" sz="4000" dirty="0"/>
-              <a:t>　作成してください。</a:t>
-            </a:r>
-            <a:endParaRPr kumimoji="1" lang="en-US" altLang="ja-JP" sz="4000" dirty="0"/>
-          </a:p>
-          <a:p>
-            <a:endParaRPr kumimoji="1" lang="ja-JP" altLang="en-US" sz="6600" dirty="0"/>
+              <a:rPr lang="ja-JP" altLang="en-US" b="1" dirty="0">
+                <a:solidFill>
+                  <a:srgbClr val="002060"/>
+                </a:solidFill>
+              </a:rPr>
+              <a:t>このパワーポイントファイルに配信情報を作成していただく場合は</a:t>
+            </a:r>
+            <a:endParaRPr lang="en-US" altLang="ja-JP" b="1" dirty="0">
+              <a:solidFill>
+                <a:srgbClr val="002060"/>
+              </a:solidFill>
+            </a:endParaRPr>
+          </a:p>
+          <a:p>
+            <a:r>
+              <a:rPr lang="ja-JP" altLang="en-US" b="1" dirty="0">
+                <a:solidFill>
+                  <a:srgbClr val="002060"/>
+                </a:solidFill>
+              </a:rPr>
+              <a:t>　</a:t>
+            </a:r>
+            <a:r>
+              <a:rPr lang="en-US" altLang="ja-JP" b="1" dirty="0">
+                <a:solidFill>
+                  <a:srgbClr val="002060"/>
+                </a:solidFill>
+              </a:rPr>
+              <a:t>JPEG</a:t>
+            </a:r>
+            <a:r>
+              <a:rPr lang="ja-JP" altLang="en-US" b="1" dirty="0">
+                <a:solidFill>
+                  <a:srgbClr val="002060"/>
+                </a:solidFill>
+              </a:rPr>
+              <a:t>で保存をお願い致します。</a:t>
+            </a:r>
+            <a:endParaRPr lang="en-US" altLang="ja-JP" b="1" dirty="0">
+              <a:solidFill>
+                <a:srgbClr val="002060"/>
+              </a:solidFill>
+            </a:endParaRPr>
+          </a:p>
+          <a:p>
+            <a:r>
+              <a:rPr lang="ja-JP" altLang="en-US" b="1" dirty="0">
+                <a:solidFill>
+                  <a:srgbClr val="002060"/>
+                </a:solidFill>
+              </a:rPr>
+              <a:t>　</a:t>
+            </a:r>
+            <a:r>
+              <a:rPr lang="en-US" altLang="ja-JP" b="1" dirty="0">
+                <a:solidFill>
+                  <a:srgbClr val="002060"/>
+                </a:solidFill>
+              </a:rPr>
+              <a:t>JPEG</a:t>
+            </a:r>
+            <a:r>
+              <a:rPr lang="ja-JP" altLang="en-US" b="1" dirty="0">
+                <a:solidFill>
+                  <a:srgbClr val="002060"/>
+                </a:solidFill>
+              </a:rPr>
+              <a:t>のデータサイズは</a:t>
+            </a:r>
+            <a:r>
+              <a:rPr lang="en-US" altLang="ja-JP" b="1" dirty="0">
+                <a:solidFill>
+                  <a:srgbClr val="002060"/>
+                </a:solidFill>
+              </a:rPr>
+              <a:t>300KB</a:t>
+            </a:r>
+            <a:r>
+              <a:rPr lang="ja-JP" altLang="en-US" b="1" dirty="0" err="1">
+                <a:solidFill>
+                  <a:srgbClr val="002060"/>
+                </a:solidFill>
+              </a:rPr>
+              <a:t>までが</a:t>
+            </a:r>
+            <a:r>
+              <a:rPr lang="ja-JP" altLang="en-US" b="1" dirty="0">
+                <a:solidFill>
+                  <a:srgbClr val="002060"/>
+                </a:solidFill>
+              </a:rPr>
+              <a:t>望ましいです。</a:t>
+            </a:r>
+            <a:endParaRPr lang="en-US" altLang="ja-JP" b="1" dirty="0">
+              <a:solidFill>
+                <a:srgbClr val="002060"/>
+              </a:solidFill>
+            </a:endParaRPr>
+          </a:p>
+          <a:p>
+            <a:r>
+              <a:rPr lang="ja-JP" altLang="en-US" b="1" dirty="0">
+                <a:solidFill>
+                  <a:srgbClr val="002060"/>
+                </a:solidFill>
+              </a:rPr>
+              <a:t>　超えた場合は、配信できないことがあります。</a:t>
+            </a:r>
+            <a:endParaRPr lang="en-US" altLang="ja-JP" dirty="0">
+              <a:solidFill>
+                <a:prstClr val="black"/>
+              </a:solidFill>
+            </a:endParaRPr>
+          </a:p>
+          <a:p>
+            <a:endParaRPr lang="en-US" altLang="ja-JP" b="1" dirty="0">
+              <a:solidFill>
+                <a:srgbClr val="002060"/>
+              </a:solidFill>
+            </a:endParaRPr>
+          </a:p>
+          <a:p>
+            <a:endParaRPr lang="en-US" altLang="ja-JP" dirty="0"/>
+          </a:p>
+          <a:p>
+            <a:r>
+              <a:rPr lang="ja-JP" altLang="en-US" b="1" dirty="0"/>
+              <a:t>電子掲示板（ディスプレイ）配信の依頼方法・制作について</a:t>
+            </a:r>
+            <a:endParaRPr lang="en-US" altLang="ja-JP" b="1" dirty="0"/>
+          </a:p>
+          <a:p>
+            <a:r>
+              <a:rPr lang="ja-JP" altLang="en-US" dirty="0"/>
+              <a:t>大岡山学生支援センター未来人材育成支援室</a:t>
+            </a:r>
+            <a:r>
+              <a:rPr lang="en-US" altLang="ja-JP" dirty="0"/>
+              <a:t>HP</a:t>
+            </a:r>
+            <a:r>
+              <a:rPr lang="ja-JP" altLang="en-US" dirty="0"/>
+              <a:t>→</a:t>
+            </a:r>
+            <a:endParaRPr lang="en-US" altLang="ja-JP" dirty="0"/>
+          </a:p>
+          <a:p>
+            <a:r>
+              <a:rPr lang="ja-JP" altLang="en-US" dirty="0">
+                <a:hlinkClick r:id="rId3"/>
+              </a:rPr>
+              <a:t>大岡山学生支援センター 未来人材育成支援室</a:t>
+            </a:r>
+            <a:r>
+              <a:rPr lang="en-US" altLang="ja-JP" dirty="0">
+                <a:hlinkClick r:id="rId3"/>
+              </a:rPr>
+              <a:t>(</a:t>
+            </a:r>
+            <a:r>
+              <a:rPr lang="ja-JP" altLang="en-US" dirty="0">
+                <a:hlinkClick r:id="rId3"/>
+              </a:rPr>
+              <a:t>学生活動支援</a:t>
+            </a:r>
+            <a:r>
+              <a:rPr lang="en-US" altLang="ja-JP" dirty="0">
+                <a:hlinkClick r:id="rId3"/>
+              </a:rPr>
+              <a:t>)</a:t>
+            </a:r>
+            <a:endParaRPr lang="en-US" altLang="ja-JP" dirty="0"/>
           </a:p>
         </p:txBody>
       </p:sp>
     </p:spTree>
-    <p:extLst>
-      <p:ext uri="{BB962C8B-B14F-4D97-AF65-F5344CB8AC3E}">
-        <p14:creationId xmlns:p14="http://schemas.microsoft.com/office/powerpoint/2010/main" val="1279511195"/>
-      </p:ext>
-    </p:extLst>
   </p:cSld>
   <p:clrMapOvr>
     <a:masterClrMapping/>
   </p:clrMapOvr>
+  <p:transition>
+    <p:cut/>
+  </p:transition>
 </p:sld>
 </file>
 
 <file path=ppt/theme/theme1.xml><?xml version="1.0" encoding="utf-8"?>
-<a:theme xmlns:a="http://schemas.openxmlformats.org/drawingml/2006/main" name="Office テーマ">
+<a:theme xmlns:a="http://schemas.openxmlformats.org/drawingml/2006/main" name="Office ​​テーマ">
   <a:themeElements>
-    <a:clrScheme name="Office テーマ">
+    <a:clrScheme name="Office">
       <a:dk1>
         <a:sysClr val="windowText" lastClr="000000"/>
       </a:dk1>
@@ -3359,44 +4681,44 @@
         <a:sysClr val="window" lastClr="FFFFFF"/>
       </a:lt1>
       <a:dk2>
-        <a:srgbClr val="0E2841"/>
+        <a:srgbClr val="1F497D"/>
       </a:dk2>
       <a:lt2>
-        <a:srgbClr val="E8E8E8"/>
+        <a:srgbClr val="EEECE1"/>
       </a:lt2>
       <a:accent1>
-        <a:srgbClr val="156082"/>
+        <a:srgbClr val="4F81BD"/>
       </a:accent1>
       <a:accent2>
-        <a:srgbClr val="E97132"/>
+        <a:srgbClr val="C0504D"/>
       </a:accent2>
       <a:accent3>
-        <a:srgbClr val="196B24"/>
+        <a:srgbClr val="9BBB59"/>
       </a:accent3>
       <a:accent4>
-        <a:srgbClr val="0F9ED5"/>
+        <a:srgbClr val="8064A2"/>
       </a:accent4>
       <a:accent5>
-        <a:srgbClr val="A02B93"/>
+        <a:srgbClr val="4BACC6"/>
       </a:accent5>
       <a:accent6>
-        <a:srgbClr val="4EA72E"/>
+        <a:srgbClr val="F79646"/>
       </a:accent6>
       <a:hlink>
-        <a:srgbClr val="467886"/>
+        <a:srgbClr val="0000FF"/>
       </a:hlink>
       <a:folHlink>
-        <a:srgbClr val="96607D"/>
+        <a:srgbClr val="800080"/>
       </a:folHlink>
     </a:clrScheme>
-    <a:fontScheme name="Office テーマ">
+    <a:fontScheme name="Office">
       <a:majorFont>
-        <a:latin typeface="Aptos Display" panose="02110004020202020204"/>
+        <a:latin typeface="Calibri"/>
         <a:ea typeface=""/>
         <a:cs typeface=""/>
-        <a:font script="Jpan" typeface="游ゴシック Light"/>
+        <a:font script="Jpan" typeface="ＭＳ Ｐゴシック"/>
         <a:font script="Hang" typeface="맑은 고딕"/>
-        <a:font script="Hans" typeface="等线 Light"/>
+        <a:font script="Hans" typeface="宋体"/>
         <a:font script="Hant" typeface="新細明體"/>
         <a:font script="Arab" typeface="Times New Roman"/>
         <a:font script="Hebr" typeface="Times New Roman"/>
@@ -3424,31 +4746,14 @@
         <a:font script="Viet" typeface="Times New Roman"/>
         <a:font script="Uigh" typeface="Microsoft Uighur"/>
         <a:font script="Geor" typeface="Sylfaen"/>
-        <a:font script="Armn" typeface="Arial"/>
-        <a:font script="Bugi" typeface="Leelawadee UI"/>
-        <a:font script="Bopo" typeface="Microsoft JhengHei"/>
-        <a:font script="Java" typeface="Javanese Text"/>
-        <a:font script="Lisu" typeface="Segoe UI"/>
-        <a:font script="Mymr" typeface="Myanmar Text"/>
-        <a:font script="Nkoo" typeface="Ebrima"/>
-        <a:font script="Olck" typeface="Nirmala UI"/>
-        <a:font script="Osma" typeface="Ebrima"/>
-        <a:font script="Phag" typeface="Phagspa"/>
-        <a:font script="Syrn" typeface="Estrangelo Edessa"/>
-        <a:font script="Syrj" typeface="Estrangelo Edessa"/>
-        <a:font script="Syre" typeface="Estrangelo Edessa"/>
-        <a:font script="Sora" typeface="Nirmala UI"/>
-        <a:font script="Tale" typeface="Microsoft Tai Le"/>
-        <a:font script="Talu" typeface="Microsoft New Tai Lue"/>
-        <a:font script="Tfng" typeface="Ebrima"/>
       </a:majorFont>
       <a:minorFont>
-        <a:latin typeface="Aptos" panose="02110004020202020204"/>
+        <a:latin typeface="Calibri"/>
         <a:ea typeface=""/>
         <a:cs typeface=""/>
-        <a:font script="Jpan" typeface="游ゴシック"/>
+        <a:font script="Jpan" typeface="ＭＳ Ｐゴシック"/>
         <a:font script="Hang" typeface="맑은 고딕"/>
-        <a:font script="Hans" typeface="等线"/>
+        <a:font script="Hans" typeface="宋体"/>
         <a:font script="Hant" typeface="新細明體"/>
         <a:font script="Arab" typeface="Arial"/>
         <a:font script="Hebr" typeface="Arial"/>
@@ -3476,26 +4781,9 @@
         <a:font script="Viet" typeface="Arial"/>
         <a:font script="Uigh" typeface="Microsoft Uighur"/>
         <a:font script="Geor" typeface="Sylfaen"/>
-        <a:font script="Armn" typeface="Arial"/>
-        <a:font script="Bugi" typeface="Leelawadee UI"/>
-        <a:font script="Bopo" typeface="Microsoft JhengHei"/>
-        <a:font script="Java" typeface="Javanese Text"/>
-        <a:font script="Lisu" typeface="Segoe UI"/>
-        <a:font script="Mymr" typeface="Myanmar Text"/>
-        <a:font script="Nkoo" typeface="Ebrima"/>
-        <a:font script="Olck" typeface="Nirmala UI"/>
-        <a:font script="Osma" typeface="Ebrima"/>
-        <a:font script="Phag" typeface="Phagspa"/>
-        <a:font script="Syrn" typeface="Estrangelo Edessa"/>
-        <a:font script="Syrj" typeface="Estrangelo Edessa"/>
-        <a:font script="Syre" typeface="Estrangelo Edessa"/>
-        <a:font script="Sora" typeface="Nirmala UI"/>
-        <a:font script="Tale" typeface="Microsoft Tai Le"/>
-        <a:font script="Talu" typeface="Microsoft New Tai Lue"/>
-        <a:font script="Tfng" typeface="Ebrima"/>
       </a:minorFont>
     </a:fontScheme>
-    <a:fmtScheme name="Office テーマ">
+    <a:fmtScheme name="Office">
       <a:fillStyleLst>
         <a:solidFill>
           <a:schemeClr val="phClr"/>
@@ -3504,161 +4792,752 @@
           <a:gsLst>
             <a:gs pos="0">
               <a:schemeClr val="phClr">
-                <a:lumMod val="110000"/>
-                <a:satMod val="105000"/>
-                <a:tint val="67000"/>
+                <a:tint val="50000"/>
+                <a:satMod val="300000"/>
               </a:schemeClr>
             </a:gs>
-            <a:gs pos="50000">
+            <a:gs pos="35000">
               <a:schemeClr val="phClr">
-                <a:lumMod val="105000"/>
-                <a:satMod val="103000"/>
-                <a:tint val="73000"/>
+                <a:tint val="37000"/>
+                <a:satMod val="300000"/>
               </a:schemeClr>
             </a:gs>
             <a:gs pos="100000">
               <a:schemeClr val="phClr">
-                <a:lumMod val="105000"/>
-                <a:satMod val="109000"/>
-                <a:tint val="81000"/>
+                <a:tint val="15000"/>
+                <a:satMod val="350000"/>
               </a:schemeClr>
             </a:gs>
           </a:gsLst>
-          <a:lin ang="5400000" scaled="0"/>
+          <a:lin ang="16200000" scaled="1"/>
         </a:gradFill>
         <a:gradFill rotWithShape="1">
           <a:gsLst>
             <a:gs pos="0">
               <a:schemeClr val="phClr">
-                <a:satMod val="103000"/>
-                <a:lumMod val="102000"/>
-                <a:tint val="94000"/>
+                <a:shade val="51000"/>
+                <a:satMod val="130000"/>
               </a:schemeClr>
             </a:gs>
-            <a:gs pos="50000">
+            <a:gs pos="80000">
               <a:schemeClr val="phClr">
-                <a:satMod val="110000"/>
-                <a:lumMod val="100000"/>
-                <a:shade val="100000"/>
+                <a:shade val="93000"/>
+                <a:satMod val="130000"/>
               </a:schemeClr>
             </a:gs>
             <a:gs pos="100000">
               <a:schemeClr val="phClr">
-                <a:lumMod val="99000"/>
-                <a:satMod val="120000"/>
-                <a:shade val="78000"/>
+                <a:shade val="94000"/>
+                <a:satMod val="135000"/>
               </a:schemeClr>
             </a:gs>
           </a:gsLst>
-          <a:lin ang="5400000" scaled="0"/>
+          <a:lin ang="16200000" scaled="0"/>
         </a:gradFill>
       </a:fillStyleLst>
       <a:lnStyleLst>
-        <a:ln w="12700" cap="flat" cmpd="sng" algn="ctr">
+        <a:ln w="9525" cap="flat" cmpd="sng" algn="ctr">
           <a:solidFill>
-            <a:schemeClr val="phClr"/>
+            <a:schemeClr val="phClr">
+              <a:shade val="95000"/>
+              <a:satMod val="105000"/>
+            </a:schemeClr>
           </a:solidFill>
           <a:prstDash val="solid"/>
-          <a:miter lim="800000"/>
-        </a:ln>
-        <a:ln w="19050" cap="flat" cmpd="sng" algn="ctr">
-          <a:solidFill>
-            <a:schemeClr val="phClr"/>
-          </a:solidFill>
-          <a:prstDash val="solid"/>
-          <a:miter lim="800000"/>
         </a:ln>
         <a:ln w="25400" cap="flat" cmpd="sng" algn="ctr">
           <a:solidFill>
             <a:schemeClr val="phClr"/>
           </a:solidFill>
           <a:prstDash val="solid"/>
-          <a:miter lim="800000"/>
+        </a:ln>
+        <a:ln w="38100" cap="flat" cmpd="sng" algn="ctr">
+          <a:solidFill>
+            <a:schemeClr val="phClr"/>
+          </a:solidFill>
+          <a:prstDash val="solid"/>
         </a:ln>
       </a:lnStyleLst>
       <a:effectStyleLst>
         <a:effectStyle>
-          <a:effectLst/>
-        </a:effectStyle>
-        <a:effectStyle>
-          <a:effectLst/>
+          <a:effectLst>
+            <a:outerShdw blurRad="40000" dist="20000" dir="5400000" rotWithShape="0">
+              <a:srgbClr val="000000">
+                <a:alpha val="38000"/>
+              </a:srgbClr>
+            </a:outerShdw>
+          </a:effectLst>
         </a:effectStyle>
         <a:effectStyle>
           <a:effectLst>
-            <a:outerShdw blurRad="57150" dist="19050" dir="5400000" algn="ctr" rotWithShape="0">
+            <a:outerShdw blurRad="40000" dist="23000" dir="5400000" rotWithShape="0">
               <a:srgbClr val="000000">
-                <a:alpha val="63000"/>
+                <a:alpha val="35000"/>
               </a:srgbClr>
             </a:outerShdw>
           </a:effectLst>
+        </a:effectStyle>
+        <a:effectStyle>
+          <a:effectLst>
+            <a:outerShdw blurRad="40000" dist="23000" dir="5400000" rotWithShape="0">
+              <a:srgbClr val="000000">
+                <a:alpha val="35000"/>
+              </a:srgbClr>
+            </a:outerShdw>
+          </a:effectLst>
+          <a:scene3d>
+            <a:camera prst="orthographicFront">
+              <a:rot lat="0" lon="0" rev="0"/>
+            </a:camera>
+            <a:lightRig rig="threePt" dir="t">
+              <a:rot lat="0" lon="0" rev="1200000"/>
+            </a:lightRig>
+          </a:scene3d>
+          <a:sp3d>
+            <a:bevelT w="63500" h="25400"/>
+          </a:sp3d>
         </a:effectStyle>
       </a:effectStyleLst>
       <a:bgFillStyleLst>
         <a:solidFill>
           <a:schemeClr val="phClr"/>
         </a:solidFill>
+        <a:gradFill rotWithShape="1">
+          <a:gsLst>
+            <a:gs pos="0">
+              <a:schemeClr val="phClr">
+                <a:tint val="40000"/>
+                <a:satMod val="350000"/>
+              </a:schemeClr>
+            </a:gs>
+            <a:gs pos="40000">
+              <a:schemeClr val="phClr">
+                <a:tint val="45000"/>
+                <a:shade val="99000"/>
+                <a:satMod val="350000"/>
+              </a:schemeClr>
+            </a:gs>
+            <a:gs pos="100000">
+              <a:schemeClr val="phClr">
+                <a:shade val="20000"/>
+                <a:satMod val="255000"/>
+              </a:schemeClr>
+            </a:gs>
+          </a:gsLst>
+          <a:path path="circle">
+            <a:fillToRect l="50000" t="-80000" r="50000" b="180000"/>
+          </a:path>
+        </a:gradFill>
+        <a:gradFill rotWithShape="1">
+          <a:gsLst>
+            <a:gs pos="0">
+              <a:schemeClr val="phClr">
+                <a:tint val="80000"/>
+                <a:satMod val="300000"/>
+              </a:schemeClr>
+            </a:gs>
+            <a:gs pos="100000">
+              <a:schemeClr val="phClr">
+                <a:shade val="30000"/>
+                <a:satMod val="200000"/>
+              </a:schemeClr>
+            </a:gs>
+          </a:gsLst>
+          <a:path path="circle">
+            <a:fillToRect l="50000" t="50000" r="50000" b="50000"/>
+          </a:path>
+        </a:gradFill>
+      </a:bgFillStyleLst>
+    </a:fmtScheme>
+  </a:themeElements>
+  <a:objectDefaults/>
+  <a:extraClrSchemeLst/>
+</a:theme>
+</file>
+
+<file path=ppt/theme/theme2.xml><?xml version="1.0" encoding="utf-8"?>
+<a:theme xmlns:a="http://schemas.openxmlformats.org/drawingml/2006/main" name="Office Theme">
+  <a:themeElements>
+    <a:clrScheme name="">
+      <a:dk1>
+        <a:srgbClr val="000000"/>
+      </a:dk1>
+      <a:lt1>
+        <a:srgbClr val="FFFFFF"/>
+      </a:lt1>
+      <a:dk2>
+        <a:srgbClr val="000000"/>
+      </a:dk2>
+      <a:lt2>
+        <a:srgbClr val="808080"/>
+      </a:lt2>
+      <a:accent1>
+        <a:srgbClr val="00CC99"/>
+      </a:accent1>
+      <a:accent2>
+        <a:srgbClr val="3333CC"/>
+      </a:accent2>
+      <a:accent3>
+        <a:srgbClr val="FFFFFF"/>
+      </a:accent3>
+      <a:accent4>
+        <a:srgbClr val="000000"/>
+      </a:accent4>
+      <a:accent5>
+        <a:srgbClr val="AAE2CA"/>
+      </a:accent5>
+      <a:accent6>
+        <a:srgbClr val="2D2DB9"/>
+      </a:accent6>
+      <a:hlink>
+        <a:srgbClr val="CCCCFF"/>
+      </a:hlink>
+      <a:folHlink>
+        <a:srgbClr val="B2B2B2"/>
+      </a:folHlink>
+    </a:clrScheme>
+    <a:fontScheme name="Office">
+      <a:majorFont>
+        <a:latin typeface="Calibri"/>
+        <a:ea typeface=""/>
+        <a:cs typeface=""/>
+        <a:font script="Jpan" typeface="ＭＳ Ｐゴシック"/>
+        <a:font script="Hang" typeface="맑은 고딕"/>
+        <a:font script="Hans" typeface="宋体"/>
+        <a:font script="Hant" typeface="新細明體"/>
+        <a:font script="Arab" typeface="Times New Roman"/>
+        <a:font script="Hebr" typeface="Times New Roman"/>
+        <a:font script="Thai" typeface="Angsana New"/>
+        <a:font script="Ethi" typeface="Nyala"/>
+        <a:font script="Beng" typeface="Vrinda"/>
+        <a:font script="Gujr" typeface="Shruti"/>
+        <a:font script="Khmr" typeface="MoolBoran"/>
+        <a:font script="Knda" typeface="Tunga"/>
+        <a:font script="Guru" typeface="Raavi"/>
+        <a:font script="Cans" typeface="Euphemia"/>
+        <a:font script="Cher" typeface="Plantagenet Cherokee"/>
+        <a:font script="Yiii" typeface="Microsoft Yi Baiti"/>
+        <a:font script="Tibt" typeface="Microsoft Himalaya"/>
+        <a:font script="Thaa" typeface="MV Boli"/>
+        <a:font script="Deva" typeface="Mangal"/>
+        <a:font script="Telu" typeface="Gautami"/>
+        <a:font script="Taml" typeface="Latha"/>
+        <a:font script="Syrc" typeface="Estrangelo Edessa"/>
+        <a:font script="Orya" typeface="Kalinga"/>
+        <a:font script="Mlym" typeface="Kartika"/>
+        <a:font script="Laoo" typeface="DokChampa"/>
+        <a:font script="Sinh" typeface="Iskoola Pota"/>
+        <a:font script="Mong" typeface="Mongolian Baiti"/>
+        <a:font script="Viet" typeface="Times New Roman"/>
+        <a:font script="Uigh" typeface="Microsoft Uighur"/>
+        <a:font script="Geor" typeface="Sylfaen"/>
+      </a:majorFont>
+      <a:minorFont>
+        <a:latin typeface="Calibri"/>
+        <a:ea typeface=""/>
+        <a:cs typeface=""/>
+        <a:font script="Jpan" typeface="ＭＳ Ｐゴシック"/>
+        <a:font script="Hang" typeface="맑은 고딕"/>
+        <a:font script="Hans" typeface="宋体"/>
+        <a:font script="Hant" typeface="新細明體"/>
+        <a:font script="Arab" typeface="Arial"/>
+        <a:font script="Hebr" typeface="Arial"/>
+        <a:font script="Thai" typeface="Cordia New"/>
+        <a:font script="Ethi" typeface="Nyala"/>
+        <a:font script="Beng" typeface="Vrinda"/>
+        <a:font script="Gujr" typeface="Shruti"/>
+        <a:font script="Khmr" typeface="DaunPenh"/>
+        <a:font script="Knda" typeface="Tunga"/>
+        <a:font script="Guru" typeface="Raavi"/>
+        <a:font script="Cans" typeface="Euphemia"/>
+        <a:font script="Cher" typeface="Plantagenet Cherokee"/>
+        <a:font script="Yiii" typeface="Microsoft Yi Baiti"/>
+        <a:font script="Tibt" typeface="Microsoft Himalaya"/>
+        <a:font script="Thaa" typeface="MV Boli"/>
+        <a:font script="Deva" typeface="Mangal"/>
+        <a:font script="Telu" typeface="Gautami"/>
+        <a:font script="Taml" typeface="Latha"/>
+        <a:font script="Syrc" typeface="Estrangelo Edessa"/>
+        <a:font script="Orya" typeface="Kalinga"/>
+        <a:font script="Mlym" typeface="Kartika"/>
+        <a:font script="Laoo" typeface="DokChampa"/>
+        <a:font script="Sinh" typeface="Iskoola Pota"/>
+        <a:font script="Mong" typeface="Mongolian Baiti"/>
+        <a:font script="Viet" typeface="Arial"/>
+        <a:font script="Uigh" typeface="Microsoft Uighur"/>
+        <a:font script="Geor" typeface="Sylfaen"/>
+      </a:minorFont>
+    </a:fontScheme>
+    <a:fmtScheme name="Office">
+      <a:fillStyleLst>
         <a:solidFill>
-          <a:schemeClr val="phClr">
-            <a:tint val="95000"/>
-            <a:satMod val="170000"/>
-          </a:schemeClr>
+          <a:schemeClr val="phClr"/>
         </a:solidFill>
         <a:gradFill rotWithShape="1">
           <a:gsLst>
             <a:gs pos="0">
               <a:schemeClr val="phClr">
-                <a:tint val="93000"/>
-                <a:satMod val="150000"/>
-                <a:shade val="98000"/>
-                <a:lumMod val="102000"/>
+                <a:tint val="50000"/>
+                <a:satMod val="300000"/>
               </a:schemeClr>
             </a:gs>
-            <a:gs pos="50000">
+            <a:gs pos="35000">
               <a:schemeClr val="phClr">
-                <a:tint val="98000"/>
-                <a:satMod val="130000"/>
-                <a:shade val="90000"/>
-                <a:lumMod val="103000"/>
+                <a:tint val="37000"/>
+                <a:satMod val="300000"/>
               </a:schemeClr>
             </a:gs>
             <a:gs pos="100000">
               <a:schemeClr val="phClr">
-                <a:shade val="63000"/>
-                <a:satMod val="120000"/>
+                <a:tint val="15000"/>
+                <a:satMod val="350000"/>
               </a:schemeClr>
             </a:gs>
           </a:gsLst>
-          <a:lin ang="5400000" scaled="0"/>
+          <a:lin ang="16200000" scaled="1"/>
+        </a:gradFill>
+        <a:gradFill rotWithShape="1">
+          <a:gsLst>
+            <a:gs pos="0">
+              <a:schemeClr val="phClr">
+                <a:shade val="51000"/>
+                <a:satMod val="130000"/>
+              </a:schemeClr>
+            </a:gs>
+            <a:gs pos="80000">
+              <a:schemeClr val="phClr">
+                <a:shade val="93000"/>
+                <a:satMod val="130000"/>
+              </a:schemeClr>
+            </a:gs>
+            <a:gs pos="100000">
+              <a:schemeClr val="phClr">
+                <a:shade val="94000"/>
+                <a:satMod val="135000"/>
+              </a:schemeClr>
+            </a:gs>
+          </a:gsLst>
+          <a:lin ang="16200000" scaled="0"/>
+        </a:gradFill>
+      </a:fillStyleLst>
+      <a:lnStyleLst>
+        <a:ln w="9525" cap="flat" cmpd="sng" algn="ctr">
+          <a:solidFill>
+            <a:schemeClr val="phClr">
+              <a:shade val="95000"/>
+              <a:satMod val="105000"/>
+            </a:schemeClr>
+          </a:solidFill>
+          <a:prstDash val="solid"/>
+        </a:ln>
+        <a:ln w="25400" cap="flat" cmpd="sng" algn="ctr">
+          <a:solidFill>
+            <a:schemeClr val="phClr"/>
+          </a:solidFill>
+          <a:prstDash val="solid"/>
+        </a:ln>
+        <a:ln w="38100" cap="flat" cmpd="sng" algn="ctr">
+          <a:solidFill>
+            <a:schemeClr val="phClr"/>
+          </a:solidFill>
+          <a:prstDash val="solid"/>
+        </a:ln>
+      </a:lnStyleLst>
+      <a:effectStyleLst>
+        <a:effectStyle>
+          <a:effectLst>
+            <a:outerShdw blurRad="40000" dist="20000" dir="5400000" rotWithShape="0">
+              <a:srgbClr val="000000">
+                <a:alpha val="38000"/>
+              </a:srgbClr>
+            </a:outerShdw>
+          </a:effectLst>
+        </a:effectStyle>
+        <a:effectStyle>
+          <a:effectLst>
+            <a:outerShdw blurRad="40000" dist="23000" dir="5400000" rotWithShape="0">
+              <a:srgbClr val="000000">
+                <a:alpha val="35000"/>
+              </a:srgbClr>
+            </a:outerShdw>
+          </a:effectLst>
+        </a:effectStyle>
+        <a:effectStyle>
+          <a:effectLst>
+            <a:outerShdw blurRad="40000" dist="23000" dir="5400000" rotWithShape="0">
+              <a:srgbClr val="000000">
+                <a:alpha val="35000"/>
+              </a:srgbClr>
+            </a:outerShdw>
+          </a:effectLst>
+          <a:scene3d>
+            <a:camera prst="orthographicFront">
+              <a:rot lat="0" lon="0" rev="0"/>
+            </a:camera>
+            <a:lightRig rig="threePt" dir="t">
+              <a:rot lat="0" lon="0" rev="1200000"/>
+            </a:lightRig>
+          </a:scene3d>
+          <a:sp3d>
+            <a:bevelT w="63500" h="25400"/>
+          </a:sp3d>
+        </a:effectStyle>
+      </a:effectStyleLst>
+      <a:bgFillStyleLst>
+        <a:solidFill>
+          <a:schemeClr val="phClr"/>
+        </a:solidFill>
+        <a:gradFill rotWithShape="1">
+          <a:gsLst>
+            <a:gs pos="0">
+              <a:schemeClr val="phClr">
+                <a:tint val="40000"/>
+                <a:satMod val="350000"/>
+              </a:schemeClr>
+            </a:gs>
+            <a:gs pos="40000">
+              <a:schemeClr val="phClr">
+                <a:tint val="45000"/>
+                <a:shade val="99000"/>
+                <a:satMod val="350000"/>
+              </a:schemeClr>
+            </a:gs>
+            <a:gs pos="100000">
+              <a:schemeClr val="phClr">
+                <a:shade val="20000"/>
+                <a:satMod val="255000"/>
+              </a:schemeClr>
+            </a:gs>
+          </a:gsLst>
+          <a:path path="circle">
+            <a:fillToRect l="50000" t="-80000" r="50000" b="180000"/>
+          </a:path>
+        </a:gradFill>
+        <a:gradFill rotWithShape="1">
+          <a:gsLst>
+            <a:gs pos="0">
+              <a:schemeClr val="phClr">
+                <a:tint val="80000"/>
+                <a:satMod val="300000"/>
+              </a:schemeClr>
+            </a:gs>
+            <a:gs pos="100000">
+              <a:schemeClr val="phClr">
+                <a:shade val="30000"/>
+                <a:satMod val="200000"/>
+              </a:schemeClr>
+            </a:gs>
+          </a:gsLst>
+          <a:path path="circle">
+            <a:fillToRect l="50000" t="50000" r="50000" b="50000"/>
+          </a:path>
         </a:gradFill>
       </a:bgFillStyleLst>
     </a:fmtScheme>
   </a:themeElements>
-  <a:objectDefaults>
-    <a:lnDef>
-      <a:spPr/>
-      <a:bodyPr/>
-      <a:lstStyle/>
-      <a:style>
-        <a:lnRef idx="2">
-          <a:schemeClr val="accent1"/>
-        </a:lnRef>
-        <a:fillRef idx="0">
-          <a:schemeClr val="accent1"/>
-        </a:fillRef>
-        <a:effectRef idx="1">
-          <a:schemeClr val="accent1"/>
-        </a:effectRef>
-        <a:fontRef idx="minor">
-          <a:schemeClr val="tx1"/>
-        </a:fontRef>
-      </a:style>
-    </a:lnDef>
-  </a:objectDefaults>
+  <a:objectDefaults/>
   <a:extraClrSchemeLst/>
-  <a:extLst>
-    <a:ext uri="{05A4C25C-085E-4340-85A3-A5531E510DB2}">
-      <thm15:themeFamily xmlns:thm15="http://schemas.microsoft.com/office/thememl/2012/main" name="Office Theme" id="{2E142A2C-CD16-42D6-873A-C26D2A0506FA}" vid="{1BDDFF52-6CD6-40A5-AB3C-68EB2F1E4D0A}"/>
-    </a:ext>
-  </a:extLst>
 </a:theme>
+</file>
+
+<file path=ppt/theme/theme3.xml><?xml version="1.0" encoding="utf-8"?>
+<a:theme xmlns:a="http://schemas.openxmlformats.org/drawingml/2006/main" name="Office Theme">
+  <a:themeElements>
+    <a:clrScheme name="">
+      <a:dk1>
+        <a:srgbClr val="000000"/>
+      </a:dk1>
+      <a:lt1>
+        <a:srgbClr val="FFFFFF"/>
+      </a:lt1>
+      <a:dk2>
+        <a:srgbClr val="000000"/>
+      </a:dk2>
+      <a:lt2>
+        <a:srgbClr val="808080"/>
+      </a:lt2>
+      <a:accent1>
+        <a:srgbClr val="00CC99"/>
+      </a:accent1>
+      <a:accent2>
+        <a:srgbClr val="3333CC"/>
+      </a:accent2>
+      <a:accent3>
+        <a:srgbClr val="FFFFFF"/>
+      </a:accent3>
+      <a:accent4>
+        <a:srgbClr val="000000"/>
+      </a:accent4>
+      <a:accent5>
+        <a:srgbClr val="AAE2CA"/>
+      </a:accent5>
+      <a:accent6>
+        <a:srgbClr val="2D2DB9"/>
+      </a:accent6>
+      <a:hlink>
+        <a:srgbClr val="CCCCFF"/>
+      </a:hlink>
+      <a:folHlink>
+        <a:srgbClr val="B2B2B2"/>
+      </a:folHlink>
+    </a:clrScheme>
+    <a:fontScheme name="Office">
+      <a:majorFont>
+        <a:latin typeface="Calibri"/>
+        <a:ea typeface=""/>
+        <a:cs typeface=""/>
+        <a:font script="Jpan" typeface="ＭＳ Ｐゴシック"/>
+        <a:font script="Hang" typeface="맑은 고딕"/>
+        <a:font script="Hans" typeface="宋体"/>
+        <a:font script="Hant" typeface="新細明體"/>
+        <a:font script="Arab" typeface="Times New Roman"/>
+        <a:font script="Hebr" typeface="Times New Roman"/>
+        <a:font script="Thai" typeface="Angsana New"/>
+        <a:font script="Ethi" typeface="Nyala"/>
+        <a:font script="Beng" typeface="Vrinda"/>
+        <a:font script="Gujr" typeface="Shruti"/>
+        <a:font script="Khmr" typeface="MoolBoran"/>
+        <a:font script="Knda" typeface="Tunga"/>
+        <a:font script="Guru" typeface="Raavi"/>
+        <a:font script="Cans" typeface="Euphemia"/>
+        <a:font script="Cher" typeface="Plantagenet Cherokee"/>
+        <a:font script="Yiii" typeface="Microsoft Yi Baiti"/>
+        <a:font script="Tibt" typeface="Microsoft Himalaya"/>
+        <a:font script="Thaa" typeface="MV Boli"/>
+        <a:font script="Deva" typeface="Mangal"/>
+        <a:font script="Telu" typeface="Gautami"/>
+        <a:font script="Taml" typeface="Latha"/>
+        <a:font script="Syrc" typeface="Estrangelo Edessa"/>
+        <a:font script="Orya" typeface="Kalinga"/>
+        <a:font script="Mlym" typeface="Kartika"/>
+        <a:font script="Laoo" typeface="DokChampa"/>
+        <a:font script="Sinh" typeface="Iskoola Pota"/>
+        <a:font script="Mong" typeface="Mongolian Baiti"/>
+        <a:font script="Viet" typeface="Times New Roman"/>
+        <a:font script="Uigh" typeface="Microsoft Uighur"/>
+        <a:font script="Geor" typeface="Sylfaen"/>
+      </a:majorFont>
+      <a:minorFont>
+        <a:latin typeface="Calibri"/>
+        <a:ea typeface=""/>
+        <a:cs typeface=""/>
+        <a:font script="Jpan" typeface="ＭＳ Ｐゴシック"/>
+        <a:font script="Hang" typeface="맑은 고딕"/>
+        <a:font script="Hans" typeface="宋体"/>
+        <a:font script="Hant" typeface="新細明體"/>
+        <a:font script="Arab" typeface="Arial"/>
+        <a:font script="Hebr" typeface="Arial"/>
+        <a:font script="Thai" typeface="Cordia New"/>
+        <a:font script="Ethi" typeface="Nyala"/>
+        <a:font script="Beng" typeface="Vrinda"/>
+        <a:font script="Gujr" typeface="Shruti"/>
+        <a:font script="Khmr" typeface="DaunPenh"/>
+        <a:font script="Knda" typeface="Tunga"/>
+        <a:font script="Guru" typeface="Raavi"/>
+        <a:font script="Cans" typeface="Euphemia"/>
+        <a:font script="Cher" typeface="Plantagenet Cherokee"/>
+        <a:font script="Yiii" typeface="Microsoft Yi Baiti"/>
+        <a:font script="Tibt" typeface="Microsoft Himalaya"/>
+        <a:font script="Thaa" typeface="MV Boli"/>
+        <a:font script="Deva" typeface="Mangal"/>
+        <a:font script="Telu" typeface="Gautami"/>
+        <a:font script="Taml" typeface="Latha"/>
+        <a:font script="Syrc" typeface="Estrangelo Edessa"/>
+        <a:font script="Orya" typeface="Kalinga"/>
+        <a:font script="Mlym" typeface="Kartika"/>
+        <a:font script="Laoo" typeface="DokChampa"/>
+        <a:font script="Sinh" typeface="Iskoola Pota"/>
+        <a:font script="Mong" typeface="Mongolian Baiti"/>
+        <a:font script="Viet" typeface="Arial"/>
+        <a:font script="Uigh" typeface="Microsoft Uighur"/>
+        <a:font script="Geor" typeface="Sylfaen"/>
+      </a:minorFont>
+    </a:fontScheme>
+    <a:fmtScheme name="Office">
+      <a:fillStyleLst>
+        <a:solidFill>
+          <a:schemeClr val="phClr"/>
+        </a:solidFill>
+        <a:gradFill rotWithShape="1">
+          <a:gsLst>
+            <a:gs pos="0">
+              <a:schemeClr val="phClr">
+                <a:tint val="50000"/>
+                <a:satMod val="300000"/>
+              </a:schemeClr>
+            </a:gs>
+            <a:gs pos="35000">
+              <a:schemeClr val="phClr">
+                <a:tint val="37000"/>
+                <a:satMod val="300000"/>
+              </a:schemeClr>
+            </a:gs>
+            <a:gs pos="100000">
+              <a:schemeClr val="phClr">
+                <a:tint val="15000"/>
+                <a:satMod val="350000"/>
+              </a:schemeClr>
+            </a:gs>
+          </a:gsLst>
+          <a:lin ang="16200000" scaled="1"/>
+        </a:gradFill>
+        <a:gradFill rotWithShape="1">
+          <a:gsLst>
+            <a:gs pos="0">
+              <a:schemeClr val="phClr">
+                <a:shade val="51000"/>
+                <a:satMod val="130000"/>
+              </a:schemeClr>
+            </a:gs>
+            <a:gs pos="80000">
+              <a:schemeClr val="phClr">
+                <a:shade val="93000"/>
+                <a:satMod val="130000"/>
+              </a:schemeClr>
+            </a:gs>
+            <a:gs pos="100000">
+              <a:schemeClr val="phClr">
+                <a:shade val="94000"/>
+                <a:satMod val="135000"/>
+              </a:schemeClr>
+            </a:gs>
+          </a:gsLst>
+          <a:lin ang="16200000" scaled="0"/>
+        </a:gradFill>
+      </a:fillStyleLst>
+      <a:lnStyleLst>
+        <a:ln w="9525" cap="flat" cmpd="sng" algn="ctr">
+          <a:solidFill>
+            <a:schemeClr val="phClr">
+              <a:shade val="95000"/>
+              <a:satMod val="105000"/>
+            </a:schemeClr>
+          </a:solidFill>
+          <a:prstDash val="solid"/>
+        </a:ln>
+        <a:ln w="25400" cap="flat" cmpd="sng" algn="ctr">
+          <a:solidFill>
+            <a:schemeClr val="phClr"/>
+          </a:solidFill>
+          <a:prstDash val="solid"/>
+        </a:ln>
+        <a:ln w="38100" cap="flat" cmpd="sng" algn="ctr">
+          <a:solidFill>
+            <a:schemeClr val="phClr"/>
+          </a:solidFill>
+          <a:prstDash val="solid"/>
+        </a:ln>
+      </a:lnStyleLst>
+      <a:effectStyleLst>
+        <a:effectStyle>
+          <a:effectLst>
+            <a:outerShdw blurRad="40000" dist="20000" dir="5400000" rotWithShape="0">
+              <a:srgbClr val="000000">
+                <a:alpha val="38000"/>
+              </a:srgbClr>
+            </a:outerShdw>
+          </a:effectLst>
+        </a:effectStyle>
+        <a:effectStyle>
+          <a:effectLst>
+            <a:outerShdw blurRad="40000" dist="23000" dir="5400000" rotWithShape="0">
+              <a:srgbClr val="000000">
+                <a:alpha val="35000"/>
+              </a:srgbClr>
+            </a:outerShdw>
+          </a:effectLst>
+        </a:effectStyle>
+        <a:effectStyle>
+          <a:effectLst>
+            <a:outerShdw blurRad="40000" dist="23000" dir="5400000" rotWithShape="0">
+              <a:srgbClr val="000000">
+                <a:alpha val="35000"/>
+              </a:srgbClr>
+            </a:outerShdw>
+          </a:effectLst>
+          <a:scene3d>
+            <a:camera prst="orthographicFront">
+              <a:rot lat="0" lon="0" rev="0"/>
+            </a:camera>
+            <a:lightRig rig="threePt" dir="t">
+              <a:rot lat="0" lon="0" rev="1200000"/>
+            </a:lightRig>
+          </a:scene3d>
+          <a:sp3d>
+            <a:bevelT w="63500" h="25400"/>
+          </a:sp3d>
+        </a:effectStyle>
+      </a:effectStyleLst>
+      <a:bgFillStyleLst>
+        <a:solidFill>
+          <a:schemeClr val="phClr"/>
+        </a:solidFill>
+        <a:gradFill rotWithShape="1">
+          <a:gsLst>
+            <a:gs pos="0">
+              <a:schemeClr val="phClr">
+                <a:tint val="40000"/>
+                <a:satMod val="350000"/>
+              </a:schemeClr>
+            </a:gs>
+            <a:gs pos="40000">
+              <a:schemeClr val="phClr">
+                <a:tint val="45000"/>
+                <a:shade val="99000"/>
+                <a:satMod val="350000"/>
+              </a:schemeClr>
+            </a:gs>
+            <a:gs pos="100000">
+              <a:schemeClr val="phClr">
+                <a:shade val="20000"/>
+                <a:satMod val="255000"/>
+              </a:schemeClr>
+            </a:gs>
+          </a:gsLst>
+          <a:path path="circle">
+            <a:fillToRect l="50000" t="-80000" r="50000" b="180000"/>
+          </a:path>
+        </a:gradFill>
+        <a:gradFill rotWithShape="1">
+          <a:gsLst>
+            <a:gs pos="0">
+              <a:schemeClr val="phClr">
+                <a:tint val="80000"/>
+                <a:satMod val="300000"/>
+              </a:schemeClr>
+            </a:gs>
+            <a:gs pos="100000">
+              <a:schemeClr val="phClr">
+                <a:shade val="30000"/>
+                <a:satMod val="200000"/>
+              </a:schemeClr>
+            </a:gs>
+          </a:gsLst>
+          <a:path path="circle">
+            <a:fillToRect l="50000" t="50000" r="50000" b="50000"/>
+          </a:path>
+        </a:gradFill>
+      </a:bgFillStyleLst>
+    </a:fmtScheme>
+  </a:themeElements>
+  <a:objectDefaults/>
+  <a:extraClrSchemeLst/>
+</a:theme>
+</file>
+
+<file path=customXml/item1.xml><?xml version="1.0" encoding="utf-8"?>
+<?mso-contentType ?>
+<FormTemplates xmlns="http://schemas.microsoft.com/sharepoint/v3/contenttype/forms">
+  <Display>DocumentLibraryForm</Display>
+  <Edit>AssetEditForm</Edit>
+  <New>DocumentLibraryForm</New>
+</FormTemplates>
+</file>
+
+<file path=customXml/itemProps1.xml><?xml version="1.0" encoding="utf-8"?>
+<ds:datastoreItem xmlns:ds="http://schemas.openxmlformats.org/officeDocument/2006/customXml" ds:itemID="{FA0A74F7-6134-48B1-8F17-F17B71DAF71E}">
+  <ds:schemaRefs>
+    <ds:schemaRef ds:uri="http://schemas.microsoft.com/sharepoint/v3/contenttype/forms"/>
+  </ds:schemaRefs>
+</ds:datastoreItem>
 </file>